--- a/lab2/final/Лабораторная_2_вариант_9.pptx
+++ b/lab2/final/Лабораторная_2_вариант_9.pptx
@@ -5,20 +5,19 @@
     <p:sldMasterId id="2147483648" r:id="rId1"/>
   </p:sldMasterIdLst>
   <p:sldIdLst>
-    <p:sldId id="256" r:id="rId7"/>
-    <p:sldId id="257" r:id="rId8"/>
-    <p:sldId id="258" r:id="rId9"/>
-    <p:sldId id="259" r:id="rId10"/>
-    <p:sldId id="260" r:id="rId11"/>
-    <p:sldId id="261" r:id="rId12"/>
-    <p:sldId id="262" r:id="rId13"/>
-    <p:sldId id="263" r:id="rId14"/>
-    <p:sldId id="264" r:id="rId15"/>
-    <p:sldId id="265" r:id="rId16"/>
-    <p:sldId id="266" r:id="rId17"/>
-    <p:sldId id="267" r:id="rId18"/>
+    <p:sldId id="256" r:id="rId2"/>
+    <p:sldId id="257" r:id="rId3"/>
+    <p:sldId id="258" r:id="rId4"/>
+    <p:sldId id="259" r:id="rId5"/>
+    <p:sldId id="260" r:id="rId6"/>
+    <p:sldId id="262" r:id="rId7"/>
+    <p:sldId id="263" r:id="rId8"/>
+    <p:sldId id="264" r:id="rId9"/>
+    <p:sldId id="265" r:id="rId10"/>
+    <p:sldId id="266" r:id="rId11"/>
+    <p:sldId id="267" r:id="rId12"/>
   </p:sldIdLst>
-  <p:sldSz cx="12191695" cy="6858000" type="screen4x3"/>
+  <p:sldSz cx="12192000" cy="6858000"/>
   <p:notesSz cx="6858000" cy="9144000"/>
   <p:defaultTextStyle>
     <a:defPPr>
@@ -115,6 +114,22 @@
       </a:defRPr>
     </a:lvl9pPr>
   </p:defaultTextStyle>
+  <p:extLst>
+    <p:ext uri="{EFAFB233-063F-42B5-8137-9DF3F51BA10A}">
+      <p15:sldGuideLst xmlns:p15="http://schemas.microsoft.com/office/powerpoint/2012/main">
+        <p15:guide id="1" orient="horz" pos="2160">
+          <p15:clr>
+            <a:srgbClr val="A4A3A4"/>
+          </p15:clr>
+        </p15:guide>
+        <p15:guide id="2" pos="2880">
+          <p15:clr>
+            <a:srgbClr val="A4A3A4"/>
+          </p15:clr>
+        </p15:guide>
+      </p15:sldGuideLst>
+    </p:ext>
+  </p:extLst>
 </p:presentation>
 </file>
 
@@ -156,10 +171,9 @@
           <a:lstStyle/>
           <a:p>
             <a:r>
-              <a:rPr lang="en-US" smtClean="0"/>
+              <a:rPr lang="en-US"/>
               <a:t>Click to edit Master title style</a:t>
             </a:r>
-            <a:endParaRPr lang="en-US"/>
           </a:p>
         </p:txBody>
       </p:sp>
@@ -275,10 +289,9 @@
           </a:lstStyle>
           <a:p>
             <a:r>
-              <a:rPr lang="en-US" smtClean="0"/>
+              <a:rPr lang="en-US"/>
               <a:t>Click to edit Master subtitle style</a:t>
             </a:r>
-            <a:endParaRPr lang="en-US"/>
           </a:p>
         </p:txBody>
       </p:sp>
@@ -299,7 +312,7 @@
           <a:p>
             <a:fld id="{5BCAD085-E8A6-8845-BD4E-CB4CCA059FC4}" type="datetimeFigureOut">
               <a:rPr lang="en-US" smtClean="0"/>
-              <a:t>1/27/13</a:t>
+              <a:t>10/3/26</a:t>
             </a:fld>
             <a:endParaRPr lang="en-US"/>
           </a:p>
@@ -393,10 +406,9 @@
           <a:lstStyle/>
           <a:p>
             <a:r>
-              <a:rPr lang="en-US" smtClean="0"/>
+              <a:rPr lang="en-US"/>
               <a:t>Click to edit Master title style</a:t>
             </a:r>
-            <a:endParaRPr lang="en-US"/>
           </a:p>
         </p:txBody>
       </p:sp>
@@ -417,38 +429,37 @@
           <a:p>
             <a:pPr lvl="0"/>
             <a:r>
-              <a:rPr lang="en-US" smtClean="0"/>
+              <a:rPr lang="en-US"/>
               <a:t>Click to edit Master text styles</a:t>
             </a:r>
           </a:p>
           <a:p>
             <a:pPr lvl="1"/>
             <a:r>
-              <a:rPr lang="en-US" smtClean="0"/>
+              <a:rPr lang="en-US"/>
               <a:t>Second level</a:t>
             </a:r>
           </a:p>
           <a:p>
             <a:pPr lvl="2"/>
             <a:r>
-              <a:rPr lang="en-US" smtClean="0"/>
+              <a:rPr lang="en-US"/>
               <a:t>Third level</a:t>
             </a:r>
           </a:p>
           <a:p>
             <a:pPr lvl="3"/>
             <a:r>
-              <a:rPr lang="en-US" smtClean="0"/>
+              <a:rPr lang="en-US"/>
               <a:t>Fourth level</a:t>
             </a:r>
           </a:p>
           <a:p>
             <a:pPr lvl="4"/>
             <a:r>
-              <a:rPr lang="en-US" smtClean="0"/>
+              <a:rPr lang="en-US"/>
               <a:t>Fifth level</a:t>
             </a:r>
-            <a:endParaRPr lang="en-US"/>
           </a:p>
         </p:txBody>
       </p:sp>
@@ -469,7 +480,7 @@
           <a:p>
             <a:fld id="{5BCAD085-E8A6-8845-BD4E-CB4CCA059FC4}" type="datetimeFigureOut">
               <a:rPr lang="en-US" smtClean="0"/>
-              <a:t>1/27/13</a:t>
+              <a:t>10/3/26</a:t>
             </a:fld>
             <a:endParaRPr lang="en-US"/>
           </a:p>
@@ -568,10 +579,9 @@
           <a:lstStyle/>
           <a:p>
             <a:r>
-              <a:rPr lang="en-US" smtClean="0"/>
+              <a:rPr lang="en-US"/>
               <a:t>Click to edit Master title style</a:t>
             </a:r>
-            <a:endParaRPr lang="en-US"/>
           </a:p>
         </p:txBody>
       </p:sp>
@@ -597,38 +607,37 @@
           <a:p>
             <a:pPr lvl="0"/>
             <a:r>
-              <a:rPr lang="en-US" smtClean="0"/>
+              <a:rPr lang="en-US"/>
               <a:t>Click to edit Master text styles</a:t>
             </a:r>
           </a:p>
           <a:p>
             <a:pPr lvl="1"/>
             <a:r>
-              <a:rPr lang="en-US" smtClean="0"/>
+              <a:rPr lang="en-US"/>
               <a:t>Second level</a:t>
             </a:r>
           </a:p>
           <a:p>
             <a:pPr lvl="2"/>
             <a:r>
-              <a:rPr lang="en-US" smtClean="0"/>
+              <a:rPr lang="en-US"/>
               <a:t>Third level</a:t>
             </a:r>
           </a:p>
           <a:p>
             <a:pPr lvl="3"/>
             <a:r>
-              <a:rPr lang="en-US" smtClean="0"/>
+              <a:rPr lang="en-US"/>
               <a:t>Fourth level</a:t>
             </a:r>
           </a:p>
           <a:p>
             <a:pPr lvl="4"/>
             <a:r>
-              <a:rPr lang="en-US" smtClean="0"/>
+              <a:rPr lang="en-US"/>
               <a:t>Fifth level</a:t>
             </a:r>
-            <a:endParaRPr lang="en-US"/>
           </a:p>
         </p:txBody>
       </p:sp>
@@ -649,7 +658,7 @@
           <a:p>
             <a:fld id="{5BCAD085-E8A6-8845-BD4E-CB4CCA059FC4}" type="datetimeFigureOut">
               <a:rPr lang="en-US" smtClean="0"/>
-              <a:t>1/27/13</a:t>
+              <a:t>10/3/26</a:t>
             </a:fld>
             <a:endParaRPr lang="en-US"/>
           </a:p>
@@ -743,10 +752,9 @@
           <a:lstStyle/>
           <a:p>
             <a:r>
-              <a:rPr lang="en-US" smtClean="0"/>
+              <a:rPr lang="en-US"/>
               <a:t>Click to edit Master title style</a:t>
             </a:r>
-            <a:endParaRPr lang="en-US"/>
           </a:p>
         </p:txBody>
       </p:sp>
@@ -767,38 +775,37 @@
           <a:p>
             <a:pPr lvl="0"/>
             <a:r>
-              <a:rPr lang="en-US" smtClean="0"/>
+              <a:rPr lang="en-US"/>
               <a:t>Click to edit Master text styles</a:t>
             </a:r>
           </a:p>
           <a:p>
             <a:pPr lvl="1"/>
             <a:r>
-              <a:rPr lang="en-US" smtClean="0"/>
+              <a:rPr lang="en-US"/>
               <a:t>Second level</a:t>
             </a:r>
           </a:p>
           <a:p>
             <a:pPr lvl="2"/>
             <a:r>
-              <a:rPr lang="en-US" smtClean="0"/>
+              <a:rPr lang="en-US"/>
               <a:t>Third level</a:t>
             </a:r>
           </a:p>
           <a:p>
             <a:pPr lvl="3"/>
             <a:r>
-              <a:rPr lang="en-US" smtClean="0"/>
+              <a:rPr lang="en-US"/>
               <a:t>Fourth level</a:t>
             </a:r>
           </a:p>
           <a:p>
             <a:pPr lvl="4"/>
             <a:r>
-              <a:rPr lang="en-US" smtClean="0"/>
+              <a:rPr lang="en-US"/>
               <a:t>Fifth level</a:t>
             </a:r>
-            <a:endParaRPr lang="en-US"/>
           </a:p>
         </p:txBody>
       </p:sp>
@@ -819,7 +826,7 @@
           <a:p>
             <a:fld id="{5BCAD085-E8A6-8845-BD4E-CB4CCA059FC4}" type="datetimeFigureOut">
               <a:rPr lang="en-US" smtClean="0"/>
-              <a:t>1/27/13</a:t>
+              <a:t>10/3/26</a:t>
             </a:fld>
             <a:endParaRPr lang="en-US"/>
           </a:p>
@@ -922,10 +929,9 @@
           </a:lstStyle>
           <a:p>
             <a:r>
-              <a:rPr lang="en-US" smtClean="0"/>
+              <a:rPr lang="en-US"/>
               <a:t>Click to edit Master title style</a:t>
             </a:r>
-            <a:endParaRPr lang="en-US"/>
           </a:p>
         </p:txBody>
       </p:sp>
@@ -1042,7 +1048,7 @@
           <a:p>
             <a:pPr lvl="0"/>
             <a:r>
-              <a:rPr lang="en-US" smtClean="0"/>
+              <a:rPr lang="en-US"/>
               <a:t>Click to edit Master text styles</a:t>
             </a:r>
           </a:p>
@@ -1065,7 +1071,7 @@
           <a:p>
             <a:fld id="{5BCAD085-E8A6-8845-BD4E-CB4CCA059FC4}" type="datetimeFigureOut">
               <a:rPr lang="en-US" smtClean="0"/>
-              <a:t>1/27/13</a:t>
+              <a:t>10/3/26</a:t>
             </a:fld>
             <a:endParaRPr lang="en-US"/>
           </a:p>
@@ -1159,10 +1165,9 @@
           <a:lstStyle/>
           <a:p>
             <a:r>
-              <a:rPr lang="en-US" smtClean="0"/>
+              <a:rPr lang="en-US"/>
               <a:t>Click to edit Master title style</a:t>
             </a:r>
-            <a:endParaRPr lang="en-US"/>
           </a:p>
         </p:txBody>
       </p:sp>
@@ -1216,38 +1221,37 @@
           <a:p>
             <a:pPr lvl="0"/>
             <a:r>
-              <a:rPr lang="en-US" smtClean="0"/>
+              <a:rPr lang="en-US"/>
               <a:t>Click to edit Master text styles</a:t>
             </a:r>
           </a:p>
           <a:p>
             <a:pPr lvl="1"/>
             <a:r>
-              <a:rPr lang="en-US" smtClean="0"/>
+              <a:rPr lang="en-US"/>
               <a:t>Second level</a:t>
             </a:r>
           </a:p>
           <a:p>
             <a:pPr lvl="2"/>
             <a:r>
-              <a:rPr lang="en-US" smtClean="0"/>
+              <a:rPr lang="en-US"/>
               <a:t>Third level</a:t>
             </a:r>
           </a:p>
           <a:p>
             <a:pPr lvl="3"/>
             <a:r>
-              <a:rPr lang="en-US" smtClean="0"/>
+              <a:rPr lang="en-US"/>
               <a:t>Fourth level</a:t>
             </a:r>
           </a:p>
           <a:p>
             <a:pPr lvl="4"/>
             <a:r>
-              <a:rPr lang="en-US" smtClean="0"/>
+              <a:rPr lang="en-US"/>
               <a:t>Fifth level</a:t>
             </a:r>
-            <a:endParaRPr lang="en-US"/>
           </a:p>
         </p:txBody>
       </p:sp>
@@ -1301,38 +1305,37 @@
           <a:p>
             <a:pPr lvl="0"/>
             <a:r>
-              <a:rPr lang="en-US" smtClean="0"/>
+              <a:rPr lang="en-US"/>
               <a:t>Click to edit Master text styles</a:t>
             </a:r>
           </a:p>
           <a:p>
             <a:pPr lvl="1"/>
             <a:r>
-              <a:rPr lang="en-US" smtClean="0"/>
+              <a:rPr lang="en-US"/>
               <a:t>Second level</a:t>
             </a:r>
           </a:p>
           <a:p>
             <a:pPr lvl="2"/>
             <a:r>
-              <a:rPr lang="en-US" smtClean="0"/>
+              <a:rPr lang="en-US"/>
               <a:t>Third level</a:t>
             </a:r>
           </a:p>
           <a:p>
             <a:pPr lvl="3"/>
             <a:r>
-              <a:rPr lang="en-US" smtClean="0"/>
+              <a:rPr lang="en-US"/>
               <a:t>Fourth level</a:t>
             </a:r>
           </a:p>
           <a:p>
             <a:pPr lvl="4"/>
             <a:r>
-              <a:rPr lang="en-US" smtClean="0"/>
+              <a:rPr lang="en-US"/>
               <a:t>Fifth level</a:t>
             </a:r>
-            <a:endParaRPr lang="en-US"/>
           </a:p>
         </p:txBody>
       </p:sp>
@@ -1353,7 +1356,7 @@
           <a:p>
             <a:fld id="{5BCAD085-E8A6-8845-BD4E-CB4CCA059FC4}" type="datetimeFigureOut">
               <a:rPr lang="en-US" smtClean="0"/>
-              <a:t>1/27/13</a:t>
+              <a:t>10/3/26</a:t>
             </a:fld>
             <a:endParaRPr lang="en-US"/>
           </a:p>
@@ -1451,10 +1454,9 @@
           </a:lstStyle>
           <a:p>
             <a:r>
-              <a:rPr lang="en-US" smtClean="0"/>
+              <a:rPr lang="en-US"/>
               <a:t>Click to edit Master title style</a:t>
             </a:r>
-            <a:endParaRPr lang="en-US"/>
           </a:p>
         </p:txBody>
       </p:sp>
@@ -1517,7 +1519,7 @@
           <a:p>
             <a:pPr lvl="0"/>
             <a:r>
-              <a:rPr lang="en-US" smtClean="0"/>
+              <a:rPr lang="en-US"/>
               <a:t>Click to edit Master text styles</a:t>
             </a:r>
           </a:p>
@@ -1573,38 +1575,37 @@
           <a:p>
             <a:pPr lvl="0"/>
             <a:r>
-              <a:rPr lang="en-US" smtClean="0"/>
+              <a:rPr lang="en-US"/>
               <a:t>Click to edit Master text styles</a:t>
             </a:r>
           </a:p>
           <a:p>
             <a:pPr lvl="1"/>
             <a:r>
-              <a:rPr lang="en-US" smtClean="0"/>
+              <a:rPr lang="en-US"/>
               <a:t>Second level</a:t>
             </a:r>
           </a:p>
           <a:p>
             <a:pPr lvl="2"/>
             <a:r>
-              <a:rPr lang="en-US" smtClean="0"/>
+              <a:rPr lang="en-US"/>
               <a:t>Third level</a:t>
             </a:r>
           </a:p>
           <a:p>
             <a:pPr lvl="3"/>
             <a:r>
-              <a:rPr lang="en-US" smtClean="0"/>
+              <a:rPr lang="en-US"/>
               <a:t>Fourth level</a:t>
             </a:r>
           </a:p>
           <a:p>
             <a:pPr lvl="4"/>
             <a:r>
-              <a:rPr lang="en-US" smtClean="0"/>
+              <a:rPr lang="en-US"/>
               <a:t>Fifth level</a:t>
             </a:r>
-            <a:endParaRPr lang="en-US"/>
           </a:p>
         </p:txBody>
       </p:sp>
@@ -1667,7 +1668,7 @@
           <a:p>
             <a:pPr lvl="0"/>
             <a:r>
-              <a:rPr lang="en-US" smtClean="0"/>
+              <a:rPr lang="en-US"/>
               <a:t>Click to edit Master text styles</a:t>
             </a:r>
           </a:p>
@@ -1723,38 +1724,37 @@
           <a:p>
             <a:pPr lvl="0"/>
             <a:r>
-              <a:rPr lang="en-US" smtClean="0"/>
+              <a:rPr lang="en-US"/>
               <a:t>Click to edit Master text styles</a:t>
             </a:r>
           </a:p>
           <a:p>
             <a:pPr lvl="1"/>
             <a:r>
-              <a:rPr lang="en-US" smtClean="0"/>
+              <a:rPr lang="en-US"/>
               <a:t>Second level</a:t>
             </a:r>
           </a:p>
           <a:p>
             <a:pPr lvl="2"/>
             <a:r>
-              <a:rPr lang="en-US" smtClean="0"/>
+              <a:rPr lang="en-US"/>
               <a:t>Third level</a:t>
             </a:r>
           </a:p>
           <a:p>
             <a:pPr lvl="3"/>
             <a:r>
-              <a:rPr lang="en-US" smtClean="0"/>
+              <a:rPr lang="en-US"/>
               <a:t>Fourth level</a:t>
             </a:r>
           </a:p>
           <a:p>
             <a:pPr lvl="4"/>
             <a:r>
-              <a:rPr lang="en-US" smtClean="0"/>
+              <a:rPr lang="en-US"/>
               <a:t>Fifth level</a:t>
             </a:r>
-            <a:endParaRPr lang="en-US"/>
           </a:p>
         </p:txBody>
       </p:sp>
@@ -1775,7 +1775,7 @@
           <a:p>
             <a:fld id="{5BCAD085-E8A6-8845-BD4E-CB4CCA059FC4}" type="datetimeFigureOut">
               <a:rPr lang="en-US" smtClean="0"/>
-              <a:t>1/27/13</a:t>
+              <a:t>10/3/26</a:t>
             </a:fld>
             <a:endParaRPr lang="en-US"/>
           </a:p>
@@ -1869,10 +1869,9 @@
           <a:lstStyle/>
           <a:p>
             <a:r>
-              <a:rPr lang="en-US" smtClean="0"/>
+              <a:rPr lang="en-US"/>
               <a:t>Click to edit Master title style</a:t>
             </a:r>
-            <a:endParaRPr lang="en-US"/>
           </a:p>
         </p:txBody>
       </p:sp>
@@ -1893,7 +1892,7 @@
           <a:p>
             <a:fld id="{5BCAD085-E8A6-8845-BD4E-CB4CCA059FC4}" type="datetimeFigureOut">
               <a:rPr lang="en-US" smtClean="0"/>
-              <a:t>1/27/13</a:t>
+              <a:t>10/3/26</a:t>
             </a:fld>
             <a:endParaRPr lang="en-US"/>
           </a:p>
@@ -1988,7 +1987,7 @@
           <a:p>
             <a:fld id="{5BCAD085-E8A6-8845-BD4E-CB4CCA059FC4}" type="datetimeFigureOut">
               <a:rPr lang="en-US" smtClean="0"/>
-              <a:t>1/27/13</a:t>
+              <a:t>10/3/26</a:t>
             </a:fld>
             <a:endParaRPr lang="en-US"/>
           </a:p>
@@ -2091,10 +2090,9 @@
           </a:lstStyle>
           <a:p>
             <a:r>
-              <a:rPr lang="en-US" smtClean="0"/>
+              <a:rPr lang="en-US"/>
               <a:t>Click to edit Master title style</a:t>
             </a:r>
-            <a:endParaRPr lang="en-US"/>
           </a:p>
         </p:txBody>
       </p:sp>
@@ -2148,38 +2146,37 @@
           <a:p>
             <a:pPr lvl="0"/>
             <a:r>
-              <a:rPr lang="en-US" smtClean="0"/>
+              <a:rPr lang="en-US"/>
               <a:t>Click to edit Master text styles</a:t>
             </a:r>
           </a:p>
           <a:p>
             <a:pPr lvl="1"/>
             <a:r>
-              <a:rPr lang="en-US" smtClean="0"/>
+              <a:rPr lang="en-US"/>
               <a:t>Second level</a:t>
             </a:r>
           </a:p>
           <a:p>
             <a:pPr lvl="2"/>
             <a:r>
-              <a:rPr lang="en-US" smtClean="0"/>
+              <a:rPr lang="en-US"/>
               <a:t>Third level</a:t>
             </a:r>
           </a:p>
           <a:p>
             <a:pPr lvl="3"/>
             <a:r>
-              <a:rPr lang="en-US" smtClean="0"/>
+              <a:rPr lang="en-US"/>
               <a:t>Fourth level</a:t>
             </a:r>
           </a:p>
           <a:p>
             <a:pPr lvl="4"/>
             <a:r>
-              <a:rPr lang="en-US" smtClean="0"/>
+              <a:rPr lang="en-US"/>
               <a:t>Fifth level</a:t>
             </a:r>
-            <a:endParaRPr lang="en-US"/>
           </a:p>
         </p:txBody>
       </p:sp>
@@ -2242,7 +2239,7 @@
           <a:p>
             <a:pPr lvl="0"/>
             <a:r>
-              <a:rPr lang="en-US" smtClean="0"/>
+              <a:rPr lang="en-US"/>
               <a:t>Click to edit Master text styles</a:t>
             </a:r>
           </a:p>
@@ -2265,7 +2262,7 @@
           <a:p>
             <a:fld id="{5BCAD085-E8A6-8845-BD4E-CB4CCA059FC4}" type="datetimeFigureOut">
               <a:rPr lang="en-US" smtClean="0"/>
-              <a:t>1/27/13</a:t>
+              <a:t>10/3/26</a:t>
             </a:fld>
             <a:endParaRPr lang="en-US"/>
           </a:p>
@@ -2368,10 +2365,9 @@
           </a:lstStyle>
           <a:p>
             <a:r>
-              <a:rPr lang="en-US" smtClean="0"/>
+              <a:rPr lang="en-US"/>
               <a:t>Click to edit Master title style</a:t>
             </a:r>
-            <a:endParaRPr lang="en-US"/>
           </a:p>
         </p:txBody>
       </p:sp>
@@ -2495,7 +2491,7 @@
           <a:p>
             <a:pPr lvl="0"/>
             <a:r>
-              <a:rPr lang="en-US" smtClean="0"/>
+              <a:rPr lang="en-US"/>
               <a:t>Click to edit Master text styles</a:t>
             </a:r>
           </a:p>
@@ -2518,7 +2514,7 @@
           <a:p>
             <a:fld id="{5BCAD085-E8A6-8845-BD4E-CB4CCA059FC4}" type="datetimeFigureOut">
               <a:rPr lang="en-US" smtClean="0"/>
-              <a:t>1/27/13</a:t>
+              <a:t>10/3/26</a:t>
             </a:fld>
             <a:endParaRPr lang="en-US"/>
           </a:p>
@@ -2627,10 +2623,9 @@
           <a:lstStyle/>
           <a:p>
             <a:r>
-              <a:rPr lang="en-US" smtClean="0"/>
+              <a:rPr lang="en-US"/>
               <a:t>Click to edit Master title style</a:t>
             </a:r>
-            <a:endParaRPr lang="en-US"/>
           </a:p>
         </p:txBody>
       </p:sp>
@@ -2661,38 +2656,37 @@
           <a:p>
             <a:pPr lvl="0"/>
             <a:r>
-              <a:rPr lang="en-US" smtClean="0"/>
+              <a:rPr lang="en-US"/>
               <a:t>Click to edit Master text styles</a:t>
             </a:r>
           </a:p>
           <a:p>
             <a:pPr lvl="1"/>
             <a:r>
-              <a:rPr lang="en-US" smtClean="0"/>
+              <a:rPr lang="en-US"/>
               <a:t>Second level</a:t>
             </a:r>
           </a:p>
           <a:p>
             <a:pPr lvl="2"/>
             <a:r>
-              <a:rPr lang="en-US" smtClean="0"/>
+              <a:rPr lang="en-US"/>
               <a:t>Third level</a:t>
             </a:r>
           </a:p>
           <a:p>
             <a:pPr lvl="3"/>
             <a:r>
-              <a:rPr lang="en-US" smtClean="0"/>
+              <a:rPr lang="en-US"/>
               <a:t>Fourth level</a:t>
             </a:r>
           </a:p>
           <a:p>
             <a:pPr lvl="4"/>
             <a:r>
-              <a:rPr lang="en-US" smtClean="0"/>
+              <a:rPr lang="en-US"/>
               <a:t>Fifth level</a:t>
             </a:r>
-            <a:endParaRPr lang="en-US"/>
           </a:p>
         </p:txBody>
       </p:sp>
@@ -2731,7 +2725,7 @@
           <a:p>
             <a:fld id="{5BCAD085-E8A6-8845-BD4E-CB4CCA059FC4}" type="datetimeFigureOut">
               <a:rPr lang="en-US" smtClean="0"/>
-              <a:t>1/27/13</a:t>
+              <a:t>10/3/26</a:t>
             </a:fld>
             <a:endParaRPr lang="en-US"/>
           </a:p>
@@ -3090,7 +3084,7 @@
 </file>
 
 <file path=ppt/slides/slide1.xml><?xml version="1.0" encoding="utf-8"?>
-<p:sld xmlns:a="http://schemas.openxmlformats.org/drawingml/2006/main" xmlns:p="http://schemas.openxmlformats.org/presentationml/2006/main" xmlns:r="http://schemas.openxmlformats.org/officeDocument/2006/relationships">
+<p:sld xmlns:a="http://schemas.openxmlformats.org/drawingml/2006/main" xmlns:r="http://schemas.openxmlformats.org/officeDocument/2006/relationships" xmlns:p="http://schemas.openxmlformats.org/presentationml/2006/main">
   <p:cSld>
     <p:bg>
       <p:bgPr>
@@ -3106,7 +3100,14 @@
         <p:cNvGrpSpPr/>
         <p:nvPr/>
       </p:nvGrpSpPr>
-      <p:grpSpPr/>
+      <p:grpSpPr>
+        <a:xfrm>
+          <a:off x="0" y="0"/>
+          <a:ext cx="0" cy="0"/>
+          <a:chOff x="0" y="0"/>
+          <a:chExt cx="0" cy="0"/>
+        </a:xfrm>
+      </p:grpSpPr>
       <p:sp>
         <p:nvSpPr>
           <p:cNvPr id="2" name="Rectangle 1"/>
@@ -3130,10 +3131,11 @@
           <a:effectLst/>
         </p:spPr>
         <p:txBody>
-          <a:bodyPr rtlCol="0" anchor="ctr" wrap="square"/>
+          <a:bodyPr wrap="square" rtlCol="0" anchor="ctr"/>
           <a:lstStyle/>
           <a:p>
             <a:pPr algn="ctr"/>
+            <a:endParaRPr/>
           </a:p>
         </p:txBody>
       </p:sp>
@@ -3154,7 +3156,7 @@
           <a:noFill/>
         </p:spPr>
         <p:txBody>
-          <a:bodyPr wrap="square" lIns="0" rIns="0" tIns="0" bIns="0" anchor="t">
+          <a:bodyPr wrap="square" lIns="0" tIns="0" rIns="0" bIns="0" anchor="t">
             <a:spAutoFit/>
           </a:bodyPr>
           <a:lstStyle/>
@@ -3197,7 +3199,7 @@
           <a:noFill/>
         </p:spPr>
         <p:txBody>
-          <a:bodyPr wrap="square" lIns="0" rIns="0" tIns="0" bIns="0" anchor="t">
+          <a:bodyPr wrap="square" lIns="0" tIns="0" rIns="0" bIns="0" anchor="t">
             <a:spAutoFit/>
           </a:bodyPr>
           <a:lstStyle/>
@@ -3258,7 +3260,7 @@
           <a:noFill/>
         </p:spPr>
         <p:txBody>
-          <a:bodyPr wrap="square" lIns="0" rIns="0" tIns="0" bIns="0" anchor="t">
+          <a:bodyPr wrap="square" lIns="0" tIns="0" rIns="0" bIns="0" anchor="t">
             <a:spAutoFit/>
           </a:bodyPr>
           <a:lstStyle/>
@@ -3319,7 +3321,7 @@
           <a:noFill/>
         </p:spPr>
         <p:txBody>
-          <a:bodyPr wrap="square" lIns="0" rIns="0" tIns="0" bIns="0" anchor="t">
+          <a:bodyPr wrap="square" lIns="0" tIns="0" rIns="0" bIns="0" anchor="t">
             <a:spAutoFit/>
           </a:bodyPr>
           <a:lstStyle/>
@@ -3392,7 +3394,7 @@
           <a:noFill/>
         </p:spPr>
         <p:txBody>
-          <a:bodyPr wrap="square" lIns="0" rIns="0" tIns="0" bIns="0" anchor="t">
+          <a:bodyPr wrap="square" lIns="0" tIns="0" rIns="0" bIns="0" anchor="t">
             <a:spAutoFit/>
           </a:bodyPr>
           <a:lstStyle/>
@@ -3434,7 +3436,7 @@
           <a:noFill/>
         </p:spPr>
         <p:txBody>
-          <a:bodyPr wrap="square" lIns="0" rIns="0" tIns="0" bIns="0" anchor="t">
+          <a:bodyPr wrap="square" lIns="0" tIns="0" rIns="0" bIns="0" anchor="t">
             <a:spAutoFit/>
           </a:bodyPr>
           <a:lstStyle/>
@@ -3468,7 +3470,7 @@
 </file>
 
 <file path=ppt/slides/slide10.xml><?xml version="1.0" encoding="utf-8"?>
-<p:sld xmlns:a="http://schemas.openxmlformats.org/drawingml/2006/main" xmlns:p="http://schemas.openxmlformats.org/presentationml/2006/main" xmlns:r="http://schemas.openxmlformats.org/officeDocument/2006/relationships">
+<p:sld xmlns:a="http://schemas.openxmlformats.org/drawingml/2006/main" xmlns:r="http://schemas.openxmlformats.org/officeDocument/2006/relationships" xmlns:p="http://schemas.openxmlformats.org/presentationml/2006/main">
   <p:cSld>
     <p:bg>
       <p:bgPr>
@@ -3484,7 +3486,14 @@
         <p:cNvGrpSpPr/>
         <p:nvPr/>
       </p:nvGrpSpPr>
-      <p:grpSpPr/>
+      <p:grpSpPr>
+        <a:xfrm>
+          <a:off x="0" y="0"/>
+          <a:ext cx="0" cy="0"/>
+          <a:chOff x="0" y="0"/>
+          <a:chExt cx="0" cy="0"/>
+        </a:xfrm>
+      </p:grpSpPr>
       <p:sp>
         <p:nvSpPr>
           <p:cNvPr id="2" name="TextBox 1"/>
@@ -3502,7 +3511,7 @@
           <a:noFill/>
         </p:spPr>
         <p:txBody>
-          <a:bodyPr wrap="square" lIns="0" rIns="0" tIns="0" bIns="0" anchor="t">
+          <a:bodyPr wrap="square" lIns="0" tIns="0" rIns="0" bIns="0" anchor="t">
             <a:spAutoFit/>
           </a:bodyPr>
           <a:lstStyle/>
@@ -3545,7 +3554,7 @@
           <a:noFill/>
         </p:spPr>
         <p:txBody>
-          <a:bodyPr wrap="square" lIns="0" rIns="0" tIns="0" bIns="0" anchor="t">
+          <a:bodyPr wrap="square" lIns="0" tIns="0" rIns="0" bIns="0" anchor="t">
             <a:spAutoFit/>
           </a:bodyPr>
           <a:lstStyle/>
@@ -3587,7 +3596,7 @@
           <a:noFill/>
         </p:spPr>
         <p:txBody>
-          <a:bodyPr wrap="square" lIns="0" rIns="0" tIns="0" bIns="0" anchor="t">
+          <a:bodyPr wrap="square" lIns="0" tIns="0" rIns="0" bIns="0" anchor="t">
             <a:spAutoFit/>
           </a:bodyPr>
           <a:lstStyle/>
@@ -3607,7 +3616,7 @@
               </a:defRPr>
             </a:pPr>
             <a:r>
-              <a:t>Часть первая</a:t>
+              <a:t>Часть вторая</a:t>
             </a:r>
           </a:p>
         </p:txBody>
@@ -3629,7 +3638,7 @@
           <a:noFill/>
         </p:spPr>
         <p:txBody>
-          <a:bodyPr wrap="square" lIns="0" rIns="0" tIns="0" bIns="0" anchor="t">
+          <a:bodyPr wrap="square" lIns="0" tIns="0" rIns="0" bIns="0" anchor="t">
             <a:spAutoFit/>
           </a:bodyPr>
           <a:lstStyle/>
@@ -3671,7 +3680,7 @@
           <a:noFill/>
         </p:spPr>
         <p:txBody>
-          <a:bodyPr wrap="square" lIns="0" rIns="0" tIns="0" bIns="0" anchor="t">
+          <a:bodyPr wrap="square" lIns="0" tIns="0" rIns="0" bIns="0" anchor="t">
             <a:spAutoFit/>
           </a:bodyPr>
           <a:lstStyle/>
@@ -3691,7 +3700,7 @@
               </a:defRPr>
             </a:pPr>
             <a:r>
-              <a:t>10</a:t>
+              <a:t>11</a:t>
             </a:r>
           </a:p>
         </p:txBody>
@@ -3713,7 +3722,7 @@
           <a:noFill/>
         </p:spPr>
         <p:txBody>
-          <a:bodyPr wrap="square" lIns="0" rIns="0" tIns="0" bIns="0" anchor="t">
+          <a:bodyPr wrap="square" lIns="0" tIns="0" rIns="0" bIns="0" anchor="t">
             <a:spAutoFit/>
           </a:bodyPr>
           <a:lstStyle/>
@@ -3733,7 +3742,7 @@
               </a:defRPr>
             </a:pPr>
             <a:r>
-              <a:t>Что такое гистограмма и зачем она нужна?</a:t>
+              <a:t>В чём разница между профилем и проекцией?</a:t>
             </a:r>
           </a:p>
         </p:txBody>
@@ -3755,7 +3764,7 @@
           <a:noFill/>
         </p:spPr>
         <p:txBody>
-          <a:bodyPr wrap="square" lIns="0" rIns="0" tIns="0" bIns="0" anchor="t">
+          <a:bodyPr wrap="square" lIns="0" tIns="0" rIns="0" bIns="0" anchor="t">
             <a:spAutoFit/>
           </a:bodyPr>
           <a:lstStyle/>
@@ -3775,7 +3784,7 @@
               </a:defRPr>
             </a:pPr>
             <a:r>
-              <a:t>Распределение количества пикселей по уровням яркости. Нужна для анализа тонов, контраста и выбора порога сегментации.</a:t>
+              <a:t>Профиль — среднее, нормированное на длину строки или столбца. Проекция — сумма, она зависит от размера изображения.</a:t>
             </a:r>
           </a:p>
         </p:txBody>
@@ -3797,7 +3806,7 @@
           <a:noFill/>
         </p:spPr>
         <p:txBody>
-          <a:bodyPr wrap="square" lIns="0" rIns="0" tIns="0" bIns="0" anchor="t">
+          <a:bodyPr wrap="square" lIns="0" tIns="0" rIns="0" bIns="0" anchor="t">
             <a:spAutoFit/>
           </a:bodyPr>
           <a:lstStyle/>
@@ -3817,7 +3826,7 @@
               </a:defRPr>
             </a:pPr>
             <a:r>
-              <a:t>Чем гистограмма цветного кадра отличается от серого?</a:t>
+              <a:t>Как гистограмма помогает улучшить контраст?</a:t>
             </a:r>
           </a:p>
         </p:txBody>
@@ -3839,7 +3848,7 @@
           <a:noFill/>
         </p:spPr>
         <p:txBody>
-          <a:bodyPr wrap="square" lIns="0" rIns="0" tIns="0" bIns="0" anchor="t">
+          <a:bodyPr wrap="square" lIns="0" tIns="0" rIns="0" bIns="0" anchor="t">
             <a:spAutoFit/>
           </a:bodyPr>
           <a:lstStyle/>
@@ -3859,7 +3868,7 @@
               </a:defRPr>
             </a:pPr>
             <a:r>
-              <a:t>У серого один канал и одна гистограмма 0…255. У цветного строят три — по R, G и B; одинаковая яркость получается разными сочетаниями цветов.</a:t>
+              <a:t>По ней видно сжатие диапазона яркостей; отсюда решение о растяжении контраста или эквализации гистограммы.</a:t>
             </a:r>
           </a:p>
         </p:txBody>
@@ -3881,7 +3890,7 @@
           <a:noFill/>
         </p:spPr>
         <p:txBody>
-          <a:bodyPr wrap="square" lIns="0" rIns="0" tIns="0" bIns="0" anchor="t">
+          <a:bodyPr wrap="square" lIns="0" tIns="0" rIns="0" bIns="0" anchor="t">
             <a:spAutoFit/>
           </a:bodyPr>
           <a:lstStyle/>
@@ -3901,7 +3910,7 @@
               </a:defRPr>
             </a:pPr>
             <a:r>
-              <a:t>Что такое профиль изображения?</a:t>
+              <a:t>Зачем нужны проекции бинарного изображения?</a:t>
             </a:r>
           </a:p>
         </p:txBody>
@@ -3923,7 +3932,7 @@
           <a:noFill/>
         </p:spPr>
         <p:txBody>
-          <a:bodyPr wrap="square" lIns="0" rIns="0" tIns="0" bIns="0" anchor="t">
+          <a:bodyPr wrap="square" lIns="0" tIns="0" rIns="0" bIns="0" anchor="t">
             <a:spAutoFit/>
           </a:bodyPr>
           <a:lstStyle/>
@@ -3943,7 +3952,7 @@
               </a:defRPr>
             </a:pPr>
             <a:r>
-              <a:t>Одномерный массив средних интенсивностей по строкам или по столбцам.</a:t>
+              <a:t>По пикам и провалам находят строки текста, границы объектов, пустые интервалы, положение и размеры объектов.</a:t>
             </a:r>
           </a:p>
         </p:txBody>
@@ -3957,15 +3966,15 @@
         <p:spPr>
           <a:xfrm>
             <a:off x="6323076" y="2011680"/>
-            <a:ext cx="5042916" cy="455675"/>
-          </a:xfrm>
-          <a:prstGeom prst="rect">
-            <a:avLst/>
-          </a:prstGeom>
-          <a:noFill/>
-        </p:spPr>
-        <p:txBody>
-          <a:bodyPr wrap="square" lIns="0" rIns="0" tIns="0" bIns="0" anchor="t">
+            <a:ext cx="5042916" cy="227837"/>
+          </a:xfrm>
+          <a:prstGeom prst="rect">
+            <a:avLst/>
+          </a:prstGeom>
+          <a:noFill/>
+        </p:spPr>
+        <p:txBody>
+          <a:bodyPr wrap="square" lIns="0" tIns="0" rIns="0" bIns="0" anchor="t">
             <a:spAutoFit/>
           </a:bodyPr>
           <a:lstStyle/>
@@ -3985,7 +3994,7 @@
               </a:defRPr>
             </a:pPr>
             <a:r>
-              <a:t>Как вычисляются горизонтальный и вертикальный профили?</a:t>
+              <a:t>Как изменится гистограмма после сглаживания?</a:t>
             </a:r>
           </a:p>
         </p:txBody>
@@ -3998,16 +4007,16 @@
         </p:nvSpPr>
         <p:spPr>
           <a:xfrm>
-            <a:off x="6323076" y="2531364"/>
-            <a:ext cx="5042916" cy="763524"/>
-          </a:xfrm>
-          <a:prstGeom prst="rect">
-            <a:avLst/>
-          </a:prstGeom>
-          <a:noFill/>
-        </p:spPr>
-        <p:txBody>
-          <a:bodyPr wrap="square" lIns="0" rIns="0" tIns="0" bIns="0" anchor="t">
+            <a:off x="6323076" y="2303526"/>
+            <a:ext cx="5042916" cy="991361"/>
+          </a:xfrm>
+          <a:prstGeom prst="rect">
+            <a:avLst/>
+          </a:prstGeom>
+          <a:noFill/>
+        </p:spPr>
+        <p:txBody>
+          <a:bodyPr wrap="square" lIns="0" tIns="0" rIns="0" bIns="0" anchor="t">
             <a:spAutoFit/>
           </a:bodyPr>
           <a:lstStyle/>
@@ -4027,7 +4036,7 @@
               </a:defRPr>
             </a:pPr>
             <a:r>
-              <a:t>Горизонтальный — усреднением по оси столбцов (axis=1), вертикальный — по оси строк (axis=0).</a:t>
+              <a:t>Высокочастотный шум уменьшается, экстремальные значения встречаются реже, распределение становится компактнее и менее «зубчатым».</a:t>
             </a:r>
           </a:p>
         </p:txBody>
@@ -4049,7 +4058,7 @@
           <a:noFill/>
         </p:spPr>
         <p:txBody>
-          <a:bodyPr wrap="square" lIns="0" rIns="0" tIns="0" bIns="0" anchor="t">
+          <a:bodyPr wrap="square" lIns="0" tIns="0" rIns="0" bIns="0" anchor="t">
             <a:spAutoFit/>
           </a:bodyPr>
           <a:lstStyle/>
@@ -4069,7 +4078,7 @@
               </a:defRPr>
             </a:pPr>
             <a:r>
-              <a:t>Что такое проекция изображения?</a:t>
+              <a:t>Что показывает пик на гистограмме?</a:t>
             </a:r>
           </a:p>
         </p:txBody>
@@ -4091,7 +4100,7 @@
           <a:noFill/>
         </p:spPr>
         <p:txBody>
-          <a:bodyPr wrap="square" lIns="0" rIns="0" tIns="0" bIns="0" anchor="t">
+          <a:bodyPr wrap="square" lIns="0" tIns="0" rIns="0" bIns="0" anchor="t">
             <a:spAutoFit/>
           </a:bodyPr>
           <a:lstStyle/>
@@ -4111,7 +4120,7 @@
               </a:defRPr>
             </a:pPr>
             <a:r>
-              <a:t>Сумма интенсивностей вдоль одной координаты: она сворачивает двумерный кадр в одномерный сигнал.</a:t>
+              <a:t>Самый частый уровень яркости и количество пикселей на нём. Он не обязан совпадать с яркостью интересующего объекта.</a:t>
             </a:r>
           </a:p>
         </p:txBody>
@@ -4125,7 +4134,7 @@
 </file>
 
 <file path=ppt/slides/slide11.xml><?xml version="1.0" encoding="utf-8"?>
-<p:sld xmlns:a="http://schemas.openxmlformats.org/drawingml/2006/main" xmlns:p="http://schemas.openxmlformats.org/presentationml/2006/main" xmlns:r="http://schemas.openxmlformats.org/officeDocument/2006/relationships">
+<p:sld xmlns:a="http://schemas.openxmlformats.org/drawingml/2006/main" xmlns:r="http://schemas.openxmlformats.org/officeDocument/2006/relationships" xmlns:p="http://schemas.openxmlformats.org/presentationml/2006/main">
   <p:cSld>
     <p:bg>
       <p:bgPr>
@@ -4141,7 +4150,14 @@
         <p:cNvGrpSpPr/>
         <p:nvPr/>
       </p:nvGrpSpPr>
-      <p:grpSpPr/>
+      <p:grpSpPr>
+        <a:xfrm>
+          <a:off x="0" y="0"/>
+          <a:ext cx="0" cy="0"/>
+          <a:chOff x="0" y="0"/>
+          <a:chExt cx="0" cy="0"/>
+        </a:xfrm>
+      </p:grpSpPr>
       <p:sp>
         <p:nvSpPr>
           <p:cNvPr id="2" name="TextBox 1"/>
@@ -4159,7 +4175,7 @@
           <a:noFill/>
         </p:spPr>
         <p:txBody>
-          <a:bodyPr wrap="square" lIns="0" rIns="0" tIns="0" bIns="0" anchor="t">
+          <a:bodyPr wrap="square" lIns="0" tIns="0" rIns="0" bIns="0" anchor="t">
             <a:spAutoFit/>
           </a:bodyPr>
           <a:lstStyle/>
@@ -4180,7 +4196,7 @@
             </a:pPr>
             <a:r>
               <a:rPr spc="140"/>
-              <a:t>ЗАЩИТА</a:t>
+              <a:t>ВЫВОДЫ</a:t>
             </a:r>
           </a:p>
         </p:txBody>
@@ -4202,7 +4218,7 @@
           <a:noFill/>
         </p:spPr>
         <p:txBody>
-          <a:bodyPr wrap="square" lIns="0" rIns="0" tIns="0" bIns="0" anchor="t">
+          <a:bodyPr wrap="square" lIns="0" tIns="0" rIns="0" bIns="0" anchor="t">
             <a:spAutoFit/>
           </a:bodyPr>
           <a:lstStyle/>
@@ -4222,7 +4238,7 @@
               </a:defRPr>
             </a:pPr>
             <a:r>
-              <a:t>Контрольные вопросы</a:t>
+              <a:t>Итоги</a:t>
             </a:r>
           </a:p>
         </p:txBody>
@@ -4244,7 +4260,7 @@
           <a:noFill/>
         </p:spPr>
         <p:txBody>
-          <a:bodyPr wrap="square" lIns="0" rIns="0" tIns="0" bIns="0" anchor="t">
+          <a:bodyPr wrap="square" lIns="0" tIns="0" rIns="0" bIns="0" anchor="t">
             <a:spAutoFit/>
           </a:bodyPr>
           <a:lstStyle/>
@@ -4264,7 +4280,7 @@
               </a:defRPr>
             </a:pPr>
             <a:r>
-              <a:t>Часть вторая</a:t>
+              <a:t>Что выполнено в ноутбуке</a:t>
             </a:r>
           </a:p>
         </p:txBody>
@@ -4286,7 +4302,7 @@
           <a:noFill/>
         </p:spPr>
         <p:txBody>
-          <a:bodyPr wrap="square" lIns="0" rIns="0" tIns="0" bIns="0" anchor="t">
+          <a:bodyPr wrap="square" lIns="0" tIns="0" rIns="0" bIns="0" anchor="t">
             <a:spAutoFit/>
           </a:bodyPr>
           <a:lstStyle/>
@@ -4328,7 +4344,7 @@
           <a:noFill/>
         </p:spPr>
         <p:txBody>
-          <a:bodyPr wrap="square" lIns="0" rIns="0" tIns="0" bIns="0" anchor="t">
+          <a:bodyPr wrap="square" lIns="0" tIns="0" rIns="0" bIns="0" anchor="t">
             <a:spAutoFit/>
           </a:bodyPr>
           <a:lstStyle/>
@@ -4348,41 +4364,74 @@
               </a:defRPr>
             </a:pPr>
             <a:r>
-              <a:t>11</a:t>
-            </a:r>
-          </a:p>
-        </p:txBody>
-      </p:sp>
-      <p:sp>
-        <p:nvSpPr>
-          <p:cNvPr id="7" name="TextBox 6"/>
-          <p:cNvSpPr txBox="1"/>
-          <p:nvPr/>
-        </p:nvSpPr>
-        <p:spPr>
-          <a:xfrm>
-            <a:off x="822960" y="2011680"/>
-            <a:ext cx="5042916" cy="227837"/>
-          </a:xfrm>
-          <a:prstGeom prst="rect">
-            <a:avLst/>
-          </a:prstGeom>
-          <a:noFill/>
-        </p:spPr>
-        <p:txBody>
-          <a:bodyPr wrap="square" lIns="0" rIns="0" tIns="0" bIns="0" anchor="t">
-            <a:spAutoFit/>
-          </a:bodyPr>
-          <a:lstStyle/>
-          <a:p>
-            <a:pPr algn="l">
-              <a:lnSpc>
-                <a:spcPct val="115000"/>
-              </a:lnSpc>
-              <a:spcAft>
-                <a:spcPts val="0"/>
-              </a:spcAft>
-              <a:defRPr sz="1300" b="1">
+              <a:t>12</a:t>
+            </a:r>
+          </a:p>
+        </p:txBody>
+      </p:sp>
+      <p:sp>
+        <p:nvSpPr>
+          <p:cNvPr id="7" name="Rounded Rectangle 6"/>
+          <p:cNvSpPr/>
+          <p:nvPr/>
+        </p:nvSpPr>
+        <p:spPr>
+          <a:xfrm>
+            <a:off x="822960" y="2103120"/>
+            <a:ext cx="146304" cy="146304"/>
+          </a:xfrm>
+          <a:prstGeom prst="roundRect">
+            <a:avLst>
+              <a:gd name="adj" fmla="val 50000"/>
+            </a:avLst>
+          </a:prstGeom>
+          <a:solidFill>
+            <a:srgbClr val="146B3A"/>
+          </a:solidFill>
+          <a:ln>
+            <a:noFill/>
+          </a:ln>
+          <a:effectLst/>
+        </p:spPr>
+        <p:txBody>
+          <a:bodyPr wrap="square" rtlCol="0" anchor="ctr"/>
+          <a:lstStyle/>
+          <a:p>
+            <a:pPr algn="ctr"/>
+            <a:endParaRPr/>
+          </a:p>
+        </p:txBody>
+      </p:sp>
+      <p:sp>
+        <p:nvSpPr>
+          <p:cNvPr id="8" name="TextBox 7"/>
+          <p:cNvSpPr txBox="1"/>
+          <p:nvPr/>
+        </p:nvSpPr>
+        <p:spPr>
+          <a:xfrm>
+            <a:off x="1207008" y="2011680"/>
+            <a:ext cx="10158984" cy="448056"/>
+          </a:xfrm>
+          <a:prstGeom prst="rect">
+            <a:avLst/>
+          </a:prstGeom>
+          <a:noFill/>
+        </p:spPr>
+        <p:txBody>
+          <a:bodyPr wrap="square" lIns="0" tIns="0" rIns="0" bIns="0" anchor="t">
+            <a:spAutoFit/>
+          </a:bodyPr>
+          <a:lstStyle/>
+          <a:p>
+            <a:pPr algn="l">
+              <a:lnSpc>
+                <a:spcPct val="120000"/>
+              </a:lnSpc>
+              <a:spcAft>
+                <a:spcPts val="0"/>
+              </a:spcAft>
+              <a:defRPr sz="1650" b="0">
                 <a:solidFill>
                   <a:srgbClr val="15171C"/>
                 </a:solidFill>
@@ -4390,83 +4439,74 @@
               </a:defRPr>
             </a:pPr>
             <a:r>
-              <a:t>В чём разница между профилем и проекцией?</a:t>
-            </a:r>
-          </a:p>
-        </p:txBody>
-      </p:sp>
-      <p:sp>
-        <p:nvSpPr>
-          <p:cNvPr id="8" name="TextBox 7"/>
-          <p:cNvSpPr txBox="1"/>
-          <p:nvPr/>
-        </p:nvSpPr>
-        <p:spPr>
-          <a:xfrm>
-            <a:off x="822960" y="2303526"/>
-            <a:ext cx="5042916" cy="991361"/>
-          </a:xfrm>
-          <a:prstGeom prst="rect">
-            <a:avLst/>
-          </a:prstGeom>
-          <a:noFill/>
-        </p:spPr>
-        <p:txBody>
-          <a:bodyPr wrap="square" lIns="0" rIns="0" tIns="0" bIns="0" anchor="t">
-            <a:spAutoFit/>
-          </a:bodyPr>
-          <a:lstStyle/>
-          <a:p>
-            <a:pPr algn="l">
-              <a:lnSpc>
-                <a:spcPct val="122000"/>
-              </a:lnSpc>
-              <a:spcAft>
-                <a:spcPts val="0"/>
-              </a:spcAft>
-              <a:defRPr sz="1250" b="0">
-                <a:solidFill>
-                  <a:srgbClr val="5B6070"/>
-                </a:solidFill>
-                <a:latin typeface="Helvetica Neue"/>
-              </a:defRPr>
-            </a:pPr>
-            <a:r>
-              <a:t>Профиль — среднее, нормированное на длину строки или столбца. Проекция — сумма, она зависит от размера изображения.</a:t>
-            </a:r>
-          </a:p>
-        </p:txBody>
-      </p:sp>
-      <p:sp>
-        <p:nvSpPr>
-          <p:cNvPr id="9" name="TextBox 8"/>
-          <p:cNvSpPr txBox="1"/>
-          <p:nvPr/>
-        </p:nvSpPr>
-        <p:spPr>
-          <a:xfrm>
-            <a:off x="822960" y="3322320"/>
-            <a:ext cx="5042916" cy="227837"/>
-          </a:xfrm>
-          <a:prstGeom prst="rect">
-            <a:avLst/>
-          </a:prstGeom>
-          <a:noFill/>
-        </p:spPr>
-        <p:txBody>
-          <a:bodyPr wrap="square" lIns="0" rIns="0" tIns="0" bIns="0" anchor="t">
-            <a:spAutoFit/>
-          </a:bodyPr>
-          <a:lstStyle/>
-          <a:p>
-            <a:pPr algn="l">
-              <a:lnSpc>
-                <a:spcPct val="115000"/>
-              </a:lnSpc>
-              <a:spcAft>
-                <a:spcPts val="0"/>
-              </a:spcAft>
-              <a:defRPr sz="1300" b="1">
+              <a:t>Гистограмма построена: доминирующая интенсивность 225, 40765 пикселей</a:t>
+            </a:r>
+          </a:p>
+        </p:txBody>
+      </p:sp>
+      <p:sp>
+        <p:nvSpPr>
+          <p:cNvPr id="9" name="Rounded Rectangle 8"/>
+          <p:cNvSpPr/>
+          <p:nvPr/>
+        </p:nvSpPr>
+        <p:spPr>
+          <a:xfrm>
+            <a:off x="822960" y="2551176"/>
+            <a:ext cx="146304" cy="146304"/>
+          </a:xfrm>
+          <a:prstGeom prst="roundRect">
+            <a:avLst>
+              <a:gd name="adj" fmla="val 50000"/>
+            </a:avLst>
+          </a:prstGeom>
+          <a:solidFill>
+            <a:srgbClr val="146B3A"/>
+          </a:solidFill>
+          <a:ln>
+            <a:noFill/>
+          </a:ln>
+          <a:effectLst/>
+        </p:spPr>
+        <p:txBody>
+          <a:bodyPr wrap="square" rtlCol="0" anchor="ctr"/>
+          <a:lstStyle/>
+          <a:p>
+            <a:pPr algn="ctr"/>
+            <a:endParaRPr/>
+          </a:p>
+        </p:txBody>
+      </p:sp>
+      <p:sp>
+        <p:nvSpPr>
+          <p:cNvPr id="10" name="TextBox 9"/>
+          <p:cNvSpPr txBox="1"/>
+          <p:nvPr/>
+        </p:nvSpPr>
+        <p:spPr>
+          <a:xfrm>
+            <a:off x="1207008" y="2459736"/>
+            <a:ext cx="10158984" cy="448056"/>
+          </a:xfrm>
+          <a:prstGeom prst="rect">
+            <a:avLst/>
+          </a:prstGeom>
+          <a:noFill/>
+        </p:spPr>
+        <p:txBody>
+          <a:bodyPr wrap="square" lIns="0" tIns="0" rIns="0" bIns="0" anchor="t">
+            <a:spAutoFit/>
+          </a:bodyPr>
+          <a:lstStyle/>
+          <a:p>
+            <a:pPr algn="l">
+              <a:lnSpc>
+                <a:spcPct val="120000"/>
+              </a:lnSpc>
+              <a:spcAft>
+                <a:spcPts val="0"/>
+              </a:spcAft>
+              <a:defRPr sz="1650" b="0">
                 <a:solidFill>
                   <a:srgbClr val="15171C"/>
                 </a:solidFill>
@@ -4474,83 +4514,74 @@
               </a:defRPr>
             </a:pPr>
             <a:r>
-              <a:t>Как гистограмма помогает улучшить контраст?</a:t>
-            </a:r>
-          </a:p>
-        </p:txBody>
-      </p:sp>
-      <p:sp>
-        <p:nvSpPr>
-          <p:cNvPr id="10" name="TextBox 9"/>
-          <p:cNvSpPr txBox="1"/>
-          <p:nvPr/>
-        </p:nvSpPr>
-        <p:spPr>
-          <a:xfrm>
-            <a:off x="822960" y="3614166"/>
-            <a:ext cx="5042916" cy="991361"/>
-          </a:xfrm>
-          <a:prstGeom prst="rect">
-            <a:avLst/>
-          </a:prstGeom>
-          <a:noFill/>
-        </p:spPr>
-        <p:txBody>
-          <a:bodyPr wrap="square" lIns="0" rIns="0" tIns="0" bIns="0" anchor="t">
-            <a:spAutoFit/>
-          </a:bodyPr>
-          <a:lstStyle/>
-          <a:p>
-            <a:pPr algn="l">
-              <a:lnSpc>
-                <a:spcPct val="122000"/>
-              </a:lnSpc>
-              <a:spcAft>
-                <a:spcPts val="0"/>
-              </a:spcAft>
-              <a:defRPr sz="1250" b="0">
-                <a:solidFill>
-                  <a:srgbClr val="5B6070"/>
-                </a:solidFill>
-                <a:latin typeface="Helvetica Neue"/>
-              </a:defRPr>
-            </a:pPr>
-            <a:r>
-              <a:t>По ней видно сжатие диапазона яркостей; отсюда решение о растяжении контраста или эквализации гистограммы.</a:t>
-            </a:r>
-          </a:p>
-        </p:txBody>
-      </p:sp>
-      <p:sp>
-        <p:nvSpPr>
-          <p:cNvPr id="11" name="TextBox 10"/>
-          <p:cNvSpPr txBox="1"/>
-          <p:nvPr/>
-        </p:nvSpPr>
-        <p:spPr>
-          <a:xfrm>
-            <a:off x="822960" y="4632960"/>
-            <a:ext cx="5042916" cy="227837"/>
-          </a:xfrm>
-          <a:prstGeom prst="rect">
-            <a:avLst/>
-          </a:prstGeom>
-          <a:noFill/>
-        </p:spPr>
-        <p:txBody>
-          <a:bodyPr wrap="square" lIns="0" rIns="0" tIns="0" bIns="0" anchor="t">
-            <a:spAutoFit/>
-          </a:bodyPr>
-          <a:lstStyle/>
-          <a:p>
-            <a:pPr algn="l">
-              <a:lnSpc>
-                <a:spcPct val="115000"/>
-              </a:lnSpc>
-              <a:spcAft>
-                <a:spcPts val="0"/>
-              </a:spcAft>
-              <a:defRPr sz="1300" b="1">
+              <a:t>Профили после Лапласа дали строку 562 и столбец 535</a:t>
+            </a:r>
+          </a:p>
+        </p:txBody>
+      </p:sp>
+      <p:sp>
+        <p:nvSpPr>
+          <p:cNvPr id="11" name="Rounded Rectangle 10"/>
+          <p:cNvSpPr/>
+          <p:nvPr/>
+        </p:nvSpPr>
+        <p:spPr>
+          <a:xfrm>
+            <a:off x="822960" y="2999232"/>
+            <a:ext cx="146304" cy="146304"/>
+          </a:xfrm>
+          <a:prstGeom prst="roundRect">
+            <a:avLst>
+              <a:gd name="adj" fmla="val 50000"/>
+            </a:avLst>
+          </a:prstGeom>
+          <a:solidFill>
+            <a:srgbClr val="146B3A"/>
+          </a:solidFill>
+          <a:ln>
+            <a:noFill/>
+          </a:ln>
+          <a:effectLst/>
+        </p:spPr>
+        <p:txBody>
+          <a:bodyPr wrap="square" rtlCol="0" anchor="ctr"/>
+          <a:lstStyle/>
+          <a:p>
+            <a:pPr algn="ctr"/>
+            <a:endParaRPr/>
+          </a:p>
+        </p:txBody>
+      </p:sp>
+      <p:sp>
+        <p:nvSpPr>
+          <p:cNvPr id="12" name="TextBox 11"/>
+          <p:cNvSpPr txBox="1"/>
+          <p:nvPr/>
+        </p:nvSpPr>
+        <p:spPr>
+          <a:xfrm>
+            <a:off x="1207008" y="2907792"/>
+            <a:ext cx="10158984" cy="448056"/>
+          </a:xfrm>
+          <a:prstGeom prst="rect">
+            <a:avLst/>
+          </a:prstGeom>
+          <a:noFill/>
+        </p:spPr>
+        <p:txBody>
+          <a:bodyPr wrap="square" lIns="0" tIns="0" rIns="0" bIns="0" anchor="t">
+            <a:spAutoFit/>
+          </a:bodyPr>
+          <a:lstStyle/>
+          <a:p>
+            <a:pPr algn="l">
+              <a:lnSpc>
+                <a:spcPct val="120000"/>
+              </a:lnSpc>
+              <a:spcAft>
+                <a:spcPts val="0"/>
+              </a:spcAft>
+              <a:defRPr sz="1650" b="0">
                 <a:solidFill>
                   <a:srgbClr val="15171C"/>
                 </a:solidFill>
@@ -4558,83 +4589,74 @@
               </a:defRPr>
             </a:pPr>
             <a:r>
-              <a:t>Зачем нужны проекции бинарного изображения?</a:t>
-            </a:r>
-          </a:p>
-        </p:txBody>
-      </p:sp>
-      <p:sp>
-        <p:nvSpPr>
-          <p:cNvPr id="12" name="TextBox 11"/>
-          <p:cNvSpPr txBox="1"/>
-          <p:nvPr/>
-        </p:nvSpPr>
-        <p:spPr>
-          <a:xfrm>
-            <a:off x="822960" y="4924806"/>
-            <a:ext cx="5042916" cy="991361"/>
-          </a:xfrm>
-          <a:prstGeom prst="rect">
-            <a:avLst/>
-          </a:prstGeom>
-          <a:noFill/>
-        </p:spPr>
-        <p:txBody>
-          <a:bodyPr wrap="square" lIns="0" rIns="0" tIns="0" bIns="0" anchor="t">
-            <a:spAutoFit/>
-          </a:bodyPr>
-          <a:lstStyle/>
-          <a:p>
-            <a:pPr algn="l">
-              <a:lnSpc>
-                <a:spcPct val="122000"/>
-              </a:lnSpc>
-              <a:spcAft>
-                <a:spcPts val="0"/>
-              </a:spcAft>
-              <a:defRPr sz="1250" b="0">
-                <a:solidFill>
-                  <a:srgbClr val="5B6070"/>
-                </a:solidFill>
-                <a:latin typeface="Helvetica Neue"/>
-              </a:defRPr>
-            </a:pPr>
-            <a:r>
-              <a:t>По пикам и провалам находят строки текста, границы объектов, пустые интервалы, положение и размеры объектов.</a:t>
-            </a:r>
-          </a:p>
-        </p:txBody>
-      </p:sp>
-      <p:sp>
-        <p:nvSpPr>
-          <p:cNvPr id="13" name="TextBox 12"/>
-          <p:cNvSpPr txBox="1"/>
-          <p:nvPr/>
-        </p:nvSpPr>
-        <p:spPr>
-          <a:xfrm>
-            <a:off x="6323076" y="2011680"/>
-            <a:ext cx="5042916" cy="227837"/>
-          </a:xfrm>
-          <a:prstGeom prst="rect">
-            <a:avLst/>
-          </a:prstGeom>
-          <a:noFill/>
-        </p:spPr>
-        <p:txBody>
-          <a:bodyPr wrap="square" lIns="0" rIns="0" tIns="0" bIns="0" anchor="t">
-            <a:spAutoFit/>
-          </a:bodyPr>
-          <a:lstStyle/>
-          <a:p>
-            <a:pPr algn="l">
-              <a:lnSpc>
-                <a:spcPct val="115000"/>
-              </a:lnSpc>
-              <a:spcAft>
-                <a:spcPts val="0"/>
-              </a:spcAft>
-              <a:defRPr sz="1300" b="1">
+              <a:t>Горизонтальная проекция: максимум в строке 86</a:t>
+            </a:r>
+          </a:p>
+        </p:txBody>
+      </p:sp>
+      <p:sp>
+        <p:nvSpPr>
+          <p:cNvPr id="13" name="Rounded Rectangle 12"/>
+          <p:cNvSpPr/>
+          <p:nvPr/>
+        </p:nvSpPr>
+        <p:spPr>
+          <a:xfrm>
+            <a:off x="822960" y="3447288"/>
+            <a:ext cx="146304" cy="146304"/>
+          </a:xfrm>
+          <a:prstGeom prst="roundRect">
+            <a:avLst>
+              <a:gd name="adj" fmla="val 50000"/>
+            </a:avLst>
+          </a:prstGeom>
+          <a:solidFill>
+            <a:srgbClr val="146B3A"/>
+          </a:solidFill>
+          <a:ln>
+            <a:noFill/>
+          </a:ln>
+          <a:effectLst/>
+        </p:spPr>
+        <p:txBody>
+          <a:bodyPr wrap="square" rtlCol="0" anchor="ctr"/>
+          <a:lstStyle/>
+          <a:p>
+            <a:pPr algn="ctr"/>
+            <a:endParaRPr/>
+          </a:p>
+        </p:txBody>
+      </p:sp>
+      <p:sp>
+        <p:nvSpPr>
+          <p:cNvPr id="14" name="TextBox 13"/>
+          <p:cNvSpPr txBox="1"/>
+          <p:nvPr/>
+        </p:nvSpPr>
+        <p:spPr>
+          <a:xfrm>
+            <a:off x="1207008" y="3355848"/>
+            <a:ext cx="10158984" cy="448056"/>
+          </a:xfrm>
+          <a:prstGeom prst="rect">
+            <a:avLst/>
+          </a:prstGeom>
+          <a:noFill/>
+        </p:spPr>
+        <p:txBody>
+          <a:bodyPr wrap="square" lIns="0" tIns="0" rIns="0" bIns="0" anchor="t">
+            <a:spAutoFit/>
+          </a:bodyPr>
+          <a:lstStyle/>
+          <a:p>
+            <a:pPr algn="l">
+              <a:lnSpc>
+                <a:spcPct val="120000"/>
+              </a:lnSpc>
+              <a:spcAft>
+                <a:spcPts val="0"/>
+              </a:spcAft>
+              <a:defRPr sz="1650" b="0">
                 <a:solidFill>
                   <a:srgbClr val="15171C"/>
                 </a:solidFill>
@@ -4642,83 +4664,74 @@
               </a:defRPr>
             </a:pPr>
             <a:r>
-              <a:t>Как изменится гистограмма после сглаживания?</a:t>
-            </a:r>
-          </a:p>
-        </p:txBody>
-      </p:sp>
-      <p:sp>
-        <p:nvSpPr>
-          <p:cNvPr id="14" name="TextBox 13"/>
-          <p:cNvSpPr txBox="1"/>
-          <p:nvPr/>
-        </p:nvSpPr>
-        <p:spPr>
-          <a:xfrm>
-            <a:off x="6323076" y="2303526"/>
-            <a:ext cx="5042916" cy="991361"/>
-          </a:xfrm>
-          <a:prstGeom prst="rect">
-            <a:avLst/>
-          </a:prstGeom>
-          <a:noFill/>
-        </p:spPr>
-        <p:txBody>
-          <a:bodyPr wrap="square" lIns="0" rIns="0" tIns="0" bIns="0" anchor="t">
-            <a:spAutoFit/>
-          </a:bodyPr>
-          <a:lstStyle/>
-          <a:p>
-            <a:pPr algn="l">
-              <a:lnSpc>
-                <a:spcPct val="122000"/>
-              </a:lnSpc>
-              <a:spcAft>
-                <a:spcPts val="0"/>
-              </a:spcAft>
-              <a:defRPr sz="1250" b="0">
-                <a:solidFill>
-                  <a:srgbClr val="5B6070"/>
-                </a:solidFill>
-                <a:latin typeface="Helvetica Neue"/>
-              </a:defRPr>
-            </a:pPr>
-            <a:r>
-              <a:t>Высокочастотный шум уменьшается, экстремальные значения встречаются реже, распределение становится компактнее и менее «зубчатым».</a:t>
-            </a:r>
-          </a:p>
-        </p:txBody>
-      </p:sp>
-      <p:sp>
-        <p:nvSpPr>
-          <p:cNvPr id="15" name="TextBox 14"/>
-          <p:cNvSpPr txBox="1"/>
-          <p:nvPr/>
-        </p:nvSpPr>
-        <p:spPr>
-          <a:xfrm>
-            <a:off x="6323076" y="3322320"/>
-            <a:ext cx="5042916" cy="227837"/>
-          </a:xfrm>
-          <a:prstGeom prst="rect">
-            <a:avLst/>
-          </a:prstGeom>
-          <a:noFill/>
-        </p:spPr>
-        <p:txBody>
-          <a:bodyPr wrap="square" lIns="0" rIns="0" tIns="0" bIns="0" anchor="t">
-            <a:spAutoFit/>
-          </a:bodyPr>
-          <a:lstStyle/>
-          <a:p>
-            <a:pPr algn="l">
-              <a:lnSpc>
-                <a:spcPct val="115000"/>
-              </a:lnSpc>
-              <a:spcAft>
-                <a:spcPts val="0"/>
-              </a:spcAft>
-              <a:defRPr sz="1300" b="1">
+              <a:t>Вертикальная проекция: максимум в столбце 372</a:t>
+            </a:r>
+          </a:p>
+        </p:txBody>
+      </p:sp>
+      <p:sp>
+        <p:nvSpPr>
+          <p:cNvPr id="15" name="Rounded Rectangle 14"/>
+          <p:cNvSpPr/>
+          <p:nvPr/>
+        </p:nvSpPr>
+        <p:spPr>
+          <a:xfrm>
+            <a:off x="822960" y="3895344"/>
+            <a:ext cx="146304" cy="146304"/>
+          </a:xfrm>
+          <a:prstGeom prst="roundRect">
+            <a:avLst>
+              <a:gd name="adj" fmla="val 50000"/>
+            </a:avLst>
+          </a:prstGeom>
+          <a:solidFill>
+            <a:srgbClr val="146B3A"/>
+          </a:solidFill>
+          <a:ln>
+            <a:noFill/>
+          </a:ln>
+          <a:effectLst/>
+        </p:spPr>
+        <p:txBody>
+          <a:bodyPr wrap="square" rtlCol="0" anchor="ctr"/>
+          <a:lstStyle/>
+          <a:p>
+            <a:pPr algn="ctr"/>
+            <a:endParaRPr/>
+          </a:p>
+        </p:txBody>
+      </p:sp>
+      <p:sp>
+        <p:nvSpPr>
+          <p:cNvPr id="16" name="TextBox 15"/>
+          <p:cNvSpPr txBox="1"/>
+          <p:nvPr/>
+        </p:nvSpPr>
+        <p:spPr>
+          <a:xfrm>
+            <a:off x="1207008" y="3803904"/>
+            <a:ext cx="10158984" cy="448056"/>
+          </a:xfrm>
+          <a:prstGeom prst="rect">
+            <a:avLst/>
+          </a:prstGeom>
+          <a:noFill/>
+        </p:spPr>
+        <p:txBody>
+          <a:bodyPr wrap="square" lIns="0" tIns="0" rIns="0" bIns="0" anchor="t">
+            <a:spAutoFit/>
+          </a:bodyPr>
+          <a:lstStyle/>
+          <a:p>
+            <a:pPr algn="l">
+              <a:lnSpc>
+                <a:spcPct val="120000"/>
+              </a:lnSpc>
+              <a:spcAft>
+                <a:spcPts val="0"/>
+              </a:spcAft>
+              <a:defRPr sz="1650" b="0">
                 <a:solidFill>
                   <a:srgbClr val="15171C"/>
                 </a:solidFill>
@@ -4726,49 +4739,124 @@
               </a:defRPr>
             </a:pPr>
             <a:r>
-              <a:t>Что показывает пик на гистограмме?</a:t>
-            </a:r>
-          </a:p>
-        </p:txBody>
-      </p:sp>
-      <p:sp>
-        <p:nvSpPr>
-          <p:cNvPr id="16" name="TextBox 15"/>
-          <p:cNvSpPr txBox="1"/>
-          <p:nvPr/>
-        </p:nvSpPr>
-        <p:spPr>
-          <a:xfrm>
-            <a:off x="6323076" y="3614166"/>
-            <a:ext cx="5042916" cy="991361"/>
-          </a:xfrm>
-          <a:prstGeom prst="rect">
-            <a:avLst/>
-          </a:prstGeom>
-          <a:noFill/>
-        </p:spPr>
-        <p:txBody>
-          <a:bodyPr wrap="square" lIns="0" rIns="0" tIns="0" bIns="0" anchor="t">
-            <a:spAutoFit/>
-          </a:bodyPr>
-          <a:lstStyle/>
-          <a:p>
-            <a:pPr algn="l">
-              <a:lnSpc>
-                <a:spcPct val="122000"/>
-              </a:lnSpc>
-              <a:spcAft>
-                <a:spcPts val="0"/>
-              </a:spcAft>
-              <a:defRPr sz="1250" b="0">
-                <a:solidFill>
-                  <a:srgbClr val="5B6070"/>
-                </a:solidFill>
-                <a:latin typeface="Helvetica Neue"/>
-              </a:defRPr>
-            </a:pPr>
-            <a:r>
-              <a:t>Самый частый уровень яркости и количество пикселей на нём. Он не обязан совпадать с яркостью интересующего объекта.</a:t>
+              <a:t>Отсу разделил кадр порогом 141; белых пикселей 85.04 %</a:t>
+            </a:r>
+          </a:p>
+        </p:txBody>
+      </p:sp>
+      <p:sp>
+        <p:nvSpPr>
+          <p:cNvPr id="17" name="Rounded Rectangle 16"/>
+          <p:cNvSpPr/>
+          <p:nvPr/>
+        </p:nvSpPr>
+        <p:spPr>
+          <a:xfrm>
+            <a:off x="822960" y="4343400"/>
+            <a:ext cx="146304" cy="146304"/>
+          </a:xfrm>
+          <a:prstGeom prst="roundRect">
+            <a:avLst>
+              <a:gd name="adj" fmla="val 50000"/>
+            </a:avLst>
+          </a:prstGeom>
+          <a:solidFill>
+            <a:srgbClr val="146B3A"/>
+          </a:solidFill>
+          <a:ln>
+            <a:noFill/>
+          </a:ln>
+          <a:effectLst/>
+        </p:spPr>
+        <p:txBody>
+          <a:bodyPr wrap="square" rtlCol="0" anchor="ctr"/>
+          <a:lstStyle/>
+          <a:p>
+            <a:pPr algn="ctr"/>
+            <a:endParaRPr/>
+          </a:p>
+        </p:txBody>
+      </p:sp>
+      <p:sp>
+        <p:nvSpPr>
+          <p:cNvPr id="18" name="TextBox 17"/>
+          <p:cNvSpPr txBox="1"/>
+          <p:nvPr/>
+        </p:nvSpPr>
+        <p:spPr>
+          <a:xfrm>
+            <a:off x="1207008" y="4251960"/>
+            <a:ext cx="10158984" cy="448056"/>
+          </a:xfrm>
+          <a:prstGeom prst="rect">
+            <a:avLst/>
+          </a:prstGeom>
+          <a:noFill/>
+        </p:spPr>
+        <p:txBody>
+          <a:bodyPr wrap="square" lIns="0" tIns="0" rIns="0" bIns="0" anchor="t">
+            <a:spAutoFit/>
+          </a:bodyPr>
+          <a:lstStyle/>
+          <a:p>
+            <a:pPr algn="l">
+              <a:lnSpc>
+                <a:spcPct val="120000"/>
+              </a:lnSpc>
+              <a:spcAft>
+                <a:spcPts val="0"/>
+              </a:spcAft>
+              <a:defRPr sz="1650" b="0">
+                <a:solidFill>
+                  <a:srgbClr val="15171C"/>
+                </a:solidFill>
+                <a:latin typeface="Helvetica Neue"/>
+              </a:defRPr>
+            </a:pPr>
+            <a:r>
+              <a:t>Бинарные профили и проекции интерпретируются как распределение белой области</a:t>
+            </a:r>
+          </a:p>
+        </p:txBody>
+      </p:sp>
+      <p:sp>
+        <p:nvSpPr>
+          <p:cNvPr id="19" name="TextBox 18"/>
+          <p:cNvSpPr txBox="1"/>
+          <p:nvPr/>
+        </p:nvSpPr>
+        <p:spPr>
+          <a:xfrm>
+            <a:off x="822960" y="5120640"/>
+            <a:ext cx="10543032" cy="731520"/>
+          </a:xfrm>
+          <a:prstGeom prst="rect">
+            <a:avLst/>
+          </a:prstGeom>
+          <a:noFill/>
+        </p:spPr>
+        <p:txBody>
+          <a:bodyPr wrap="square" lIns="0" tIns="0" rIns="0" bIns="0" anchor="t">
+            <a:spAutoFit/>
+          </a:bodyPr>
+          <a:lstStyle/>
+          <a:p>
+            <a:pPr algn="l">
+              <a:lnSpc>
+                <a:spcPct val="128000"/>
+              </a:lnSpc>
+              <a:spcAft>
+                <a:spcPts val="600"/>
+              </a:spcAft>
+              <a:defRPr sz="1600" b="1">
+                <a:solidFill>
+                  <a:srgbClr val="0B57D0"/>
+                </a:solidFill>
+                <a:latin typeface="Helvetica Neue"/>
+              </a:defRPr>
+            </a:pPr>
+            <a:r>
+              <a:t>Гистограмма отвечает «какая яркость встречается чаще», Лаплас — «где сильнее меняется яркость», проекция — «где накоплено больше общей яркости».</a:t>
             </a:r>
           </a:p>
         </p:txBody>
@@ -4781,8 +4869,8 @@
 </p:sld>
 </file>
 
-<file path=ppt/slides/slide12.xml><?xml version="1.0" encoding="utf-8"?>
-<p:sld xmlns:a="http://schemas.openxmlformats.org/drawingml/2006/main" xmlns:p="http://schemas.openxmlformats.org/presentationml/2006/main" xmlns:r="http://schemas.openxmlformats.org/officeDocument/2006/relationships">
+<file path=ppt/slides/slide2.xml><?xml version="1.0" encoding="utf-8"?>
+<p:sld xmlns:a="http://schemas.openxmlformats.org/drawingml/2006/main" xmlns:r="http://schemas.openxmlformats.org/officeDocument/2006/relationships" xmlns:p="http://schemas.openxmlformats.org/presentationml/2006/main">
   <p:cSld>
     <p:bg>
       <p:bgPr>
@@ -4798,7 +4886,14 @@
         <p:cNvGrpSpPr/>
         <p:nvPr/>
       </p:nvGrpSpPr>
-      <p:grpSpPr/>
+      <p:grpSpPr>
+        <a:xfrm>
+          <a:off x="0" y="0"/>
+          <a:ext cx="0" cy="0"/>
+          <a:chOff x="0" y="0"/>
+          <a:chExt cx="0" cy="0"/>
+        </a:xfrm>
+      </p:grpSpPr>
       <p:sp>
         <p:nvSpPr>
           <p:cNvPr id="2" name="TextBox 1"/>
@@ -4816,7 +4911,7 @@
           <a:noFill/>
         </p:spPr>
         <p:txBody>
-          <a:bodyPr wrap="square" lIns="0" rIns="0" tIns="0" bIns="0" anchor="t">
+          <a:bodyPr wrap="square" lIns="0" tIns="0" rIns="0" bIns="0" anchor="t">
             <a:spAutoFit/>
           </a:bodyPr>
           <a:lstStyle/>
@@ -4837,7 +4932,7 @@
             </a:pPr>
             <a:r>
               <a:rPr spc="140"/>
-              <a:t>ВЫВОДЫ</a:t>
+              <a:t>ПОСТАНОВКА</a:t>
             </a:r>
           </a:p>
         </p:txBody>
@@ -4859,7 +4954,7 @@
           <a:noFill/>
         </p:spPr>
         <p:txBody>
-          <a:bodyPr wrap="square" lIns="0" rIns="0" tIns="0" bIns="0" anchor="t">
+          <a:bodyPr wrap="square" lIns="0" tIns="0" rIns="0" bIns="0" anchor="t">
             <a:spAutoFit/>
           </a:bodyPr>
           <a:lstStyle/>
@@ -4879,7 +4974,7 @@
               </a:defRPr>
             </a:pPr>
             <a:r>
-              <a:t>Итоги</a:t>
+              <a:t>Задание варианта 9</a:t>
             </a:r>
           </a:p>
         </p:txBody>
@@ -4901,7 +4996,7 @@
           <a:noFill/>
         </p:spPr>
         <p:txBody>
-          <a:bodyPr wrap="square" lIns="0" rIns="0" tIns="0" bIns="0" anchor="t">
+          <a:bodyPr wrap="square" lIns="0" tIns="0" rIns="0" bIns="0" anchor="t">
             <a:spAutoFit/>
           </a:bodyPr>
           <a:lstStyle/>
@@ -4921,7 +5016,7 @@
               </a:defRPr>
             </a:pPr>
             <a:r>
-              <a:t>Что выполнено в ноутбуке</a:t>
+              <a:t>Пять пунктов</a:t>
             </a:r>
           </a:p>
         </p:txBody>
@@ -4943,7 +5038,7 @@
           <a:noFill/>
         </p:spPr>
         <p:txBody>
-          <a:bodyPr wrap="square" lIns="0" rIns="0" tIns="0" bIns="0" anchor="t">
+          <a:bodyPr wrap="square" lIns="0" tIns="0" rIns="0" bIns="0" anchor="t">
             <a:spAutoFit/>
           </a:bodyPr>
           <a:lstStyle/>
@@ -4985,7 +5080,7 @@
           <a:noFill/>
         </p:spPr>
         <p:txBody>
-          <a:bodyPr wrap="square" lIns="0" rIns="0" tIns="0" bIns="0" anchor="t">
+          <a:bodyPr wrap="square" lIns="0" tIns="0" rIns="0" bIns="0" anchor="t">
             <a:spAutoFit/>
           </a:bodyPr>
           <a:lstStyle/>
@@ -5005,7 +5100,7 @@
               </a:defRPr>
             </a:pPr>
             <a:r>
-              <a:t>12</a:t>
+              <a:t>02</a:t>
             </a:r>
           </a:p>
         </p:txBody>
@@ -5018,16 +5113,16 @@
         </p:nvSpPr>
         <p:spPr>
           <a:xfrm>
-            <a:off x="822960" y="2103120"/>
-            <a:ext cx="146304" cy="146304"/>
+            <a:off x="822960" y="2057400"/>
+            <a:ext cx="365760" cy="365760"/>
           </a:xfrm>
           <a:prstGeom prst="roundRect">
             <a:avLst>
-              <a:gd name="adj" fmla="val 50000"/>
+              <a:gd name="adj" fmla="val 25000"/>
             </a:avLst>
           </a:prstGeom>
           <a:solidFill>
-            <a:srgbClr val="146B3A"/>
+            <a:srgbClr val="D7E3FC"/>
           </a:solidFill>
           <a:ln>
             <a:noFill/>
@@ -5035,10 +5130,11 @@
           <a:effectLst/>
         </p:spPr>
         <p:txBody>
-          <a:bodyPr rtlCol="0" anchor="ctr" wrap="square"/>
+          <a:bodyPr wrap="square" rtlCol="0" anchor="ctr"/>
           <a:lstStyle/>
           <a:p>
             <a:pPr algn="ctr"/>
+            <a:endParaRPr/>
           </a:p>
         </p:txBody>
       </p:sp>
@@ -5050,16 +5146,58 @@
         </p:nvSpPr>
         <p:spPr>
           <a:xfrm>
-            <a:off x="1207008" y="2011680"/>
-            <a:ext cx="10158984" cy="448056"/>
-          </a:xfrm>
-          <a:prstGeom prst="rect">
-            <a:avLst/>
-          </a:prstGeom>
-          <a:noFill/>
-        </p:spPr>
-        <p:txBody>
-          <a:bodyPr wrap="square" lIns="0" rIns="0" tIns="0" bIns="0" anchor="t">
+            <a:off x="822960" y="2125980"/>
+            <a:ext cx="365760" cy="219456"/>
+          </a:xfrm>
+          <a:prstGeom prst="rect">
+            <a:avLst/>
+          </a:prstGeom>
+          <a:noFill/>
+        </p:spPr>
+        <p:txBody>
+          <a:bodyPr wrap="square" lIns="0" tIns="0" rIns="0" bIns="0" anchor="t">
+            <a:spAutoFit/>
+          </a:bodyPr>
+          <a:lstStyle/>
+          <a:p>
+            <a:pPr algn="ctr">
+              <a:lnSpc>
+                <a:spcPct val="128000"/>
+              </a:lnSpc>
+              <a:spcAft>
+                <a:spcPts val="0"/>
+              </a:spcAft>
+              <a:defRPr sz="950" b="1">
+                <a:solidFill>
+                  <a:srgbClr val="0A2E6B"/>
+                </a:solidFill>
+                <a:latin typeface="Helvetica Neue"/>
+              </a:defRPr>
+            </a:pPr>
+            <a:r>
+              <a:t>01</a:t>
+            </a:r>
+          </a:p>
+        </p:txBody>
+      </p:sp>
+      <p:sp>
+        <p:nvSpPr>
+          <p:cNvPr id="9" name="TextBox 8"/>
+          <p:cNvSpPr txBox="1"/>
+          <p:nvPr/>
+        </p:nvSpPr>
+        <p:spPr>
+          <a:xfrm>
+            <a:off x="1408176" y="2075688"/>
+            <a:ext cx="6318503" cy="640080"/>
+          </a:xfrm>
+          <a:prstGeom prst="rect">
+            <a:avLst/>
+          </a:prstGeom>
+          <a:noFill/>
+        </p:spPr>
+        <p:txBody>
+          <a:bodyPr wrap="square" lIns="0" tIns="0" rIns="0" bIns="0" anchor="t">
             <a:spAutoFit/>
           </a:bodyPr>
           <a:lstStyle/>
@@ -5071,7 +5209,7 @@
               <a:spcAft>
                 <a:spcPts val="0"/>
               </a:spcAft>
-              <a:defRPr sz="1650" b="0">
+              <a:defRPr sz="1600" b="0">
                 <a:solidFill>
                   <a:srgbClr val="15171C"/>
                 </a:solidFill>
@@ -5079,29 +5217,29 @@
               </a:defRPr>
             </a:pPr>
             <a:r>
-              <a:t>Гистограмма построена: доминирующая интенсивность 225, 40765 пикселей</a:t>
-            </a:r>
-          </a:p>
-        </p:txBody>
-      </p:sp>
-      <p:sp>
-        <p:nvSpPr>
-          <p:cNvPr id="9" name="Rounded Rectangle 8"/>
+              <a:t>Построить гистограмму и найти пик интенсивности</a:t>
+            </a:r>
+          </a:p>
+        </p:txBody>
+      </p:sp>
+      <p:sp>
+        <p:nvSpPr>
+          <p:cNvPr id="10" name="Rounded Rectangle 9"/>
           <p:cNvSpPr/>
           <p:nvPr/>
         </p:nvSpPr>
         <p:spPr>
           <a:xfrm>
-            <a:off x="822960" y="2551176"/>
-            <a:ext cx="146304" cy="146304"/>
+            <a:off x="822960" y="2697480"/>
+            <a:ext cx="365760" cy="365760"/>
           </a:xfrm>
           <a:prstGeom prst="roundRect">
             <a:avLst>
-              <a:gd name="adj" fmla="val 50000"/>
+              <a:gd name="adj" fmla="val 25000"/>
             </a:avLst>
           </a:prstGeom>
           <a:solidFill>
-            <a:srgbClr val="146B3A"/>
+            <a:srgbClr val="D7E3FC"/>
           </a:solidFill>
           <a:ln>
             <a:noFill/>
@@ -5109,31 +5247,74 @@
           <a:effectLst/>
         </p:spPr>
         <p:txBody>
-          <a:bodyPr rtlCol="0" anchor="ctr" wrap="square"/>
+          <a:bodyPr wrap="square" rtlCol="0" anchor="ctr"/>
           <a:lstStyle/>
           <a:p>
             <a:pPr algn="ctr"/>
-          </a:p>
-        </p:txBody>
-      </p:sp>
-      <p:sp>
-        <p:nvSpPr>
-          <p:cNvPr id="10" name="TextBox 9"/>
-          <p:cNvSpPr txBox="1"/>
-          <p:nvPr/>
-        </p:nvSpPr>
-        <p:spPr>
-          <a:xfrm>
-            <a:off x="1207008" y="2459736"/>
-            <a:ext cx="10158984" cy="448056"/>
-          </a:xfrm>
-          <a:prstGeom prst="rect">
-            <a:avLst/>
-          </a:prstGeom>
-          <a:noFill/>
-        </p:spPr>
-        <p:txBody>
-          <a:bodyPr wrap="square" lIns="0" rIns="0" tIns="0" bIns="0" anchor="t">
+            <a:endParaRPr/>
+          </a:p>
+        </p:txBody>
+      </p:sp>
+      <p:sp>
+        <p:nvSpPr>
+          <p:cNvPr id="11" name="TextBox 10"/>
+          <p:cNvSpPr txBox="1"/>
+          <p:nvPr/>
+        </p:nvSpPr>
+        <p:spPr>
+          <a:xfrm>
+            <a:off x="822960" y="2766060"/>
+            <a:ext cx="365760" cy="219456"/>
+          </a:xfrm>
+          <a:prstGeom prst="rect">
+            <a:avLst/>
+          </a:prstGeom>
+          <a:noFill/>
+        </p:spPr>
+        <p:txBody>
+          <a:bodyPr wrap="square" lIns="0" tIns="0" rIns="0" bIns="0" anchor="t">
+            <a:spAutoFit/>
+          </a:bodyPr>
+          <a:lstStyle/>
+          <a:p>
+            <a:pPr algn="ctr">
+              <a:lnSpc>
+                <a:spcPct val="128000"/>
+              </a:lnSpc>
+              <a:spcAft>
+                <a:spcPts val="0"/>
+              </a:spcAft>
+              <a:defRPr sz="950" b="1">
+                <a:solidFill>
+                  <a:srgbClr val="0A2E6B"/>
+                </a:solidFill>
+                <a:latin typeface="Helvetica Neue"/>
+              </a:defRPr>
+            </a:pPr>
+            <a:r>
+              <a:t>02</a:t>
+            </a:r>
+          </a:p>
+        </p:txBody>
+      </p:sp>
+      <p:sp>
+        <p:nvSpPr>
+          <p:cNvPr id="12" name="TextBox 11"/>
+          <p:cNvSpPr txBox="1"/>
+          <p:nvPr/>
+        </p:nvSpPr>
+        <p:spPr>
+          <a:xfrm>
+            <a:off x="1408176" y="2715768"/>
+            <a:ext cx="6318503" cy="640080"/>
+          </a:xfrm>
+          <a:prstGeom prst="rect">
+            <a:avLst/>
+          </a:prstGeom>
+          <a:noFill/>
+        </p:spPr>
+        <p:txBody>
+          <a:bodyPr wrap="square" lIns="0" tIns="0" rIns="0" bIns="0" anchor="t">
             <a:spAutoFit/>
           </a:bodyPr>
           <a:lstStyle/>
@@ -5145,7 +5326,7 @@
               <a:spcAft>
                 <a:spcPts val="0"/>
               </a:spcAft>
-              <a:defRPr sz="1650" b="0">
+              <a:defRPr sz="1600" b="0">
                 <a:solidFill>
                   <a:srgbClr val="15171C"/>
                 </a:solidFill>
@@ -5153,29 +5334,29 @@
               </a:defRPr>
             </a:pPr>
             <a:r>
-              <a:t>Профили после Лапласа дали строку 562 и столбец 535</a:t>
-            </a:r>
-          </a:p>
-        </p:txBody>
-      </p:sp>
-      <p:sp>
-        <p:nvSpPr>
-          <p:cNvPr id="11" name="Rounded Rectangle 10"/>
+              <a:t>Построить профили после применения фильтра Лапласа</a:t>
+            </a:r>
+          </a:p>
+        </p:txBody>
+      </p:sp>
+      <p:sp>
+        <p:nvSpPr>
+          <p:cNvPr id="13" name="Rounded Rectangle 12"/>
           <p:cNvSpPr/>
           <p:nvPr/>
         </p:nvSpPr>
         <p:spPr>
           <a:xfrm>
-            <a:off x="822960" y="2999232"/>
-            <a:ext cx="146304" cy="146304"/>
+            <a:off x="822960" y="3337560"/>
+            <a:ext cx="365760" cy="365760"/>
           </a:xfrm>
           <a:prstGeom prst="roundRect">
             <a:avLst>
-              <a:gd name="adj" fmla="val 50000"/>
+              <a:gd name="adj" fmla="val 25000"/>
             </a:avLst>
           </a:prstGeom>
           <a:solidFill>
-            <a:srgbClr val="146B3A"/>
+            <a:srgbClr val="D7E3FC"/>
           </a:solidFill>
           <a:ln>
             <a:noFill/>
@@ -5183,31 +5364,74 @@
           <a:effectLst/>
         </p:spPr>
         <p:txBody>
-          <a:bodyPr rtlCol="0" anchor="ctr" wrap="square"/>
+          <a:bodyPr wrap="square" rtlCol="0" anchor="ctr"/>
           <a:lstStyle/>
           <a:p>
             <a:pPr algn="ctr"/>
-          </a:p>
-        </p:txBody>
-      </p:sp>
-      <p:sp>
-        <p:nvSpPr>
-          <p:cNvPr id="12" name="TextBox 11"/>
-          <p:cNvSpPr txBox="1"/>
-          <p:nvPr/>
-        </p:nvSpPr>
-        <p:spPr>
-          <a:xfrm>
-            <a:off x="1207008" y="2907792"/>
-            <a:ext cx="10158984" cy="448056"/>
-          </a:xfrm>
-          <a:prstGeom prst="rect">
-            <a:avLst/>
-          </a:prstGeom>
-          <a:noFill/>
-        </p:spPr>
-        <p:txBody>
-          <a:bodyPr wrap="square" lIns="0" rIns="0" tIns="0" bIns="0" anchor="t">
+            <a:endParaRPr/>
+          </a:p>
+        </p:txBody>
+      </p:sp>
+      <p:sp>
+        <p:nvSpPr>
+          <p:cNvPr id="14" name="TextBox 13"/>
+          <p:cNvSpPr txBox="1"/>
+          <p:nvPr/>
+        </p:nvSpPr>
+        <p:spPr>
+          <a:xfrm>
+            <a:off x="822960" y="3406140"/>
+            <a:ext cx="365760" cy="219456"/>
+          </a:xfrm>
+          <a:prstGeom prst="rect">
+            <a:avLst/>
+          </a:prstGeom>
+          <a:noFill/>
+        </p:spPr>
+        <p:txBody>
+          <a:bodyPr wrap="square" lIns="0" tIns="0" rIns="0" bIns="0" anchor="t">
+            <a:spAutoFit/>
+          </a:bodyPr>
+          <a:lstStyle/>
+          <a:p>
+            <a:pPr algn="ctr">
+              <a:lnSpc>
+                <a:spcPct val="128000"/>
+              </a:lnSpc>
+              <a:spcAft>
+                <a:spcPts val="0"/>
+              </a:spcAft>
+              <a:defRPr sz="950" b="1">
+                <a:solidFill>
+                  <a:srgbClr val="0A2E6B"/>
+                </a:solidFill>
+                <a:latin typeface="Helvetica Neue"/>
+              </a:defRPr>
+            </a:pPr>
+            <a:r>
+              <a:t>03</a:t>
+            </a:r>
+          </a:p>
+        </p:txBody>
+      </p:sp>
+      <p:sp>
+        <p:nvSpPr>
+          <p:cNvPr id="15" name="TextBox 14"/>
+          <p:cNvSpPr txBox="1"/>
+          <p:nvPr/>
+        </p:nvSpPr>
+        <p:spPr>
+          <a:xfrm>
+            <a:off x="1408176" y="3355848"/>
+            <a:ext cx="6318503" cy="640080"/>
+          </a:xfrm>
+          <a:prstGeom prst="rect">
+            <a:avLst/>
+          </a:prstGeom>
+          <a:noFill/>
+        </p:spPr>
+        <p:txBody>
+          <a:bodyPr wrap="square" lIns="0" tIns="0" rIns="0" bIns="0" anchor="t">
             <a:spAutoFit/>
           </a:bodyPr>
           <a:lstStyle/>
@@ -5219,7 +5443,7 @@
               <a:spcAft>
                 <a:spcPts val="0"/>
               </a:spcAft>
-              <a:defRPr sz="1650" b="0">
+              <a:defRPr sz="1600" b="0">
                 <a:solidFill>
                   <a:srgbClr val="15171C"/>
                 </a:solidFill>
@@ -5227,29 +5451,29 @@
               </a:defRPr>
             </a:pPr>
             <a:r>
-              <a:t>Горизонтальная проекция: максимум в строке 86</a:t>
-            </a:r>
-          </a:p>
-        </p:txBody>
-      </p:sp>
-      <p:sp>
-        <p:nvSpPr>
-          <p:cNvPr id="13" name="Rounded Rectangle 12"/>
+              <a:t>Построить горизонтальную проекцию и найти строку максимума</a:t>
+            </a:r>
+          </a:p>
+        </p:txBody>
+      </p:sp>
+      <p:sp>
+        <p:nvSpPr>
+          <p:cNvPr id="16" name="Rounded Rectangle 15"/>
           <p:cNvSpPr/>
           <p:nvPr/>
         </p:nvSpPr>
         <p:spPr>
           <a:xfrm>
-            <a:off x="822960" y="3447288"/>
-            <a:ext cx="146304" cy="146304"/>
+            <a:off x="822960" y="3977639"/>
+            <a:ext cx="365760" cy="365760"/>
           </a:xfrm>
           <a:prstGeom prst="roundRect">
             <a:avLst>
-              <a:gd name="adj" fmla="val 50000"/>
+              <a:gd name="adj" fmla="val 25000"/>
             </a:avLst>
           </a:prstGeom>
           <a:solidFill>
-            <a:srgbClr val="146B3A"/>
+            <a:srgbClr val="D7E3FC"/>
           </a:solidFill>
           <a:ln>
             <a:noFill/>
@@ -5257,31 +5481,74 @@
           <a:effectLst/>
         </p:spPr>
         <p:txBody>
-          <a:bodyPr rtlCol="0" anchor="ctr" wrap="square"/>
+          <a:bodyPr wrap="square" rtlCol="0" anchor="ctr"/>
           <a:lstStyle/>
           <a:p>
             <a:pPr algn="ctr"/>
-          </a:p>
-        </p:txBody>
-      </p:sp>
-      <p:sp>
-        <p:nvSpPr>
-          <p:cNvPr id="14" name="TextBox 13"/>
-          <p:cNvSpPr txBox="1"/>
-          <p:nvPr/>
-        </p:nvSpPr>
-        <p:spPr>
-          <a:xfrm>
-            <a:off x="1207008" y="3355848"/>
-            <a:ext cx="10158984" cy="448056"/>
-          </a:xfrm>
-          <a:prstGeom prst="rect">
-            <a:avLst/>
-          </a:prstGeom>
-          <a:noFill/>
-        </p:spPr>
-        <p:txBody>
-          <a:bodyPr wrap="square" lIns="0" rIns="0" tIns="0" bIns="0" anchor="t">
+            <a:endParaRPr/>
+          </a:p>
+        </p:txBody>
+      </p:sp>
+      <p:sp>
+        <p:nvSpPr>
+          <p:cNvPr id="17" name="TextBox 16"/>
+          <p:cNvSpPr txBox="1"/>
+          <p:nvPr/>
+        </p:nvSpPr>
+        <p:spPr>
+          <a:xfrm>
+            <a:off x="822960" y="4046220"/>
+            <a:ext cx="365760" cy="219456"/>
+          </a:xfrm>
+          <a:prstGeom prst="rect">
+            <a:avLst/>
+          </a:prstGeom>
+          <a:noFill/>
+        </p:spPr>
+        <p:txBody>
+          <a:bodyPr wrap="square" lIns="0" tIns="0" rIns="0" bIns="0" anchor="t">
+            <a:spAutoFit/>
+          </a:bodyPr>
+          <a:lstStyle/>
+          <a:p>
+            <a:pPr algn="ctr">
+              <a:lnSpc>
+                <a:spcPct val="128000"/>
+              </a:lnSpc>
+              <a:spcAft>
+                <a:spcPts val="0"/>
+              </a:spcAft>
+              <a:defRPr sz="950" b="1">
+                <a:solidFill>
+                  <a:srgbClr val="0A2E6B"/>
+                </a:solidFill>
+                <a:latin typeface="Helvetica Neue"/>
+              </a:defRPr>
+            </a:pPr>
+            <a:r>
+              <a:t>04</a:t>
+            </a:r>
+          </a:p>
+        </p:txBody>
+      </p:sp>
+      <p:sp>
+        <p:nvSpPr>
+          <p:cNvPr id="18" name="TextBox 17"/>
+          <p:cNvSpPr txBox="1"/>
+          <p:nvPr/>
+        </p:nvSpPr>
+        <p:spPr>
+          <a:xfrm>
+            <a:off x="1408176" y="3995927"/>
+            <a:ext cx="6318503" cy="640080"/>
+          </a:xfrm>
+          <a:prstGeom prst="rect">
+            <a:avLst/>
+          </a:prstGeom>
+          <a:noFill/>
+        </p:spPr>
+        <p:txBody>
+          <a:bodyPr wrap="square" lIns="0" tIns="0" rIns="0" bIns="0" anchor="t">
             <a:spAutoFit/>
           </a:bodyPr>
           <a:lstStyle/>
@@ -5293,7 +5560,7 @@
               <a:spcAft>
                 <a:spcPts val="0"/>
               </a:spcAft>
-              <a:defRPr sz="1650" b="0">
+              <a:defRPr sz="1600" b="0">
                 <a:solidFill>
                   <a:srgbClr val="15171C"/>
                 </a:solidFill>
@@ -5301,29 +5568,29 @@
               </a:defRPr>
             </a:pPr>
             <a:r>
-              <a:t>Вертикальная проекция: максимум в столбце 372</a:t>
-            </a:r>
-          </a:p>
-        </p:txBody>
-      </p:sp>
-      <p:sp>
-        <p:nvSpPr>
-          <p:cNvPr id="15" name="Rounded Rectangle 14"/>
+              <a:t>Построить вертикальную проекцию и найти столбец максимума</a:t>
+            </a:r>
+          </a:p>
+        </p:txBody>
+      </p:sp>
+      <p:sp>
+        <p:nvSpPr>
+          <p:cNvPr id="19" name="Rounded Rectangle 18"/>
           <p:cNvSpPr/>
           <p:nvPr/>
         </p:nvSpPr>
         <p:spPr>
           <a:xfrm>
-            <a:off x="822960" y="3895344"/>
-            <a:ext cx="146304" cy="146304"/>
+            <a:off x="822960" y="4617720"/>
+            <a:ext cx="365760" cy="365760"/>
           </a:xfrm>
           <a:prstGeom prst="roundRect">
             <a:avLst>
-              <a:gd name="adj" fmla="val 50000"/>
+              <a:gd name="adj" fmla="val 25000"/>
             </a:avLst>
           </a:prstGeom>
           <a:solidFill>
-            <a:srgbClr val="146B3A"/>
+            <a:srgbClr val="D7E3FC"/>
           </a:solidFill>
           <a:ln>
             <a:noFill/>
@@ -5331,31 +5598,74 @@
           <a:effectLst/>
         </p:spPr>
         <p:txBody>
-          <a:bodyPr rtlCol="0" anchor="ctr" wrap="square"/>
+          <a:bodyPr wrap="square" rtlCol="0" anchor="ctr"/>
           <a:lstStyle/>
           <a:p>
             <a:pPr algn="ctr"/>
-          </a:p>
-        </p:txBody>
-      </p:sp>
-      <p:sp>
-        <p:nvSpPr>
-          <p:cNvPr id="16" name="TextBox 15"/>
-          <p:cNvSpPr txBox="1"/>
-          <p:nvPr/>
-        </p:nvSpPr>
-        <p:spPr>
-          <a:xfrm>
-            <a:off x="1207008" y="3803904"/>
-            <a:ext cx="10158984" cy="448056"/>
-          </a:xfrm>
-          <a:prstGeom prst="rect">
-            <a:avLst/>
-          </a:prstGeom>
-          <a:noFill/>
-        </p:spPr>
-        <p:txBody>
-          <a:bodyPr wrap="square" lIns="0" rIns="0" tIns="0" bIns="0" anchor="t">
+            <a:endParaRPr/>
+          </a:p>
+        </p:txBody>
+      </p:sp>
+      <p:sp>
+        <p:nvSpPr>
+          <p:cNvPr id="20" name="TextBox 19"/>
+          <p:cNvSpPr txBox="1"/>
+          <p:nvPr/>
+        </p:nvSpPr>
+        <p:spPr>
+          <a:xfrm>
+            <a:off x="822960" y="4686300"/>
+            <a:ext cx="365760" cy="219456"/>
+          </a:xfrm>
+          <a:prstGeom prst="rect">
+            <a:avLst/>
+          </a:prstGeom>
+          <a:noFill/>
+        </p:spPr>
+        <p:txBody>
+          <a:bodyPr wrap="square" lIns="0" tIns="0" rIns="0" bIns="0" anchor="t">
+            <a:spAutoFit/>
+          </a:bodyPr>
+          <a:lstStyle/>
+          <a:p>
+            <a:pPr algn="ctr">
+              <a:lnSpc>
+                <a:spcPct val="128000"/>
+              </a:lnSpc>
+              <a:spcAft>
+                <a:spcPts val="0"/>
+              </a:spcAft>
+              <a:defRPr sz="950" b="1">
+                <a:solidFill>
+                  <a:srgbClr val="0A2E6B"/>
+                </a:solidFill>
+                <a:latin typeface="Helvetica Neue"/>
+              </a:defRPr>
+            </a:pPr>
+            <a:r>
+              <a:t>05</a:t>
+            </a:r>
+          </a:p>
+        </p:txBody>
+      </p:sp>
+      <p:sp>
+        <p:nvSpPr>
+          <p:cNvPr id="21" name="TextBox 20"/>
+          <p:cNvSpPr txBox="1"/>
+          <p:nvPr/>
+        </p:nvSpPr>
+        <p:spPr>
+          <a:xfrm>
+            <a:off x="1408176" y="4636007"/>
+            <a:ext cx="6318503" cy="640080"/>
+          </a:xfrm>
+          <a:prstGeom prst="rect">
+            <a:avLst/>
+          </a:prstGeom>
+          <a:noFill/>
+        </p:spPr>
+        <p:txBody>
+          <a:bodyPr wrap="square" lIns="0" tIns="0" rIns="0" bIns="0" anchor="t">
             <a:spAutoFit/>
           </a:bodyPr>
           <a:lstStyle/>
@@ -5367,7 +5677,7 @@
               <a:spcAft>
                 <a:spcPts val="0"/>
               </a:spcAft>
-              <a:defRPr sz="1650" b="0">
+              <a:defRPr sz="1600" b="0">
                 <a:solidFill>
                   <a:srgbClr val="15171C"/>
                 </a:solidFill>
@@ -5375,29 +5685,29 @@
               </a:defRPr>
             </a:pPr>
             <a:r>
-              <a:t>Отсу разделил кадр порогом 141; белых пикселей 85.04 %</a:t>
-            </a:r>
-          </a:p>
-        </p:txBody>
-      </p:sp>
-      <p:sp>
-        <p:nvSpPr>
-          <p:cNvPr id="17" name="Rounded Rectangle 16"/>
+              <a:t>Повторить профили и проекции после бинаризации Отсу</a:t>
+            </a:r>
+          </a:p>
+        </p:txBody>
+      </p:sp>
+      <p:sp>
+        <p:nvSpPr>
+          <p:cNvPr id="22" name="Rounded Rectangle 21"/>
           <p:cNvSpPr/>
           <p:nvPr/>
         </p:nvSpPr>
         <p:spPr>
           <a:xfrm>
-            <a:off x="822960" y="4343400"/>
-            <a:ext cx="146304" cy="146304"/>
+            <a:off x="8101583" y="2011680"/>
+            <a:ext cx="3264408" cy="944880"/>
           </a:xfrm>
           <a:prstGeom prst="roundRect">
             <a:avLst>
-              <a:gd name="adj" fmla="val 50000"/>
+              <a:gd name="adj" fmla="val 13548"/>
             </a:avLst>
           </a:prstGeom>
           <a:solidFill>
-            <a:srgbClr val="146B3A"/>
+            <a:srgbClr val="F3F6FC"/>
           </a:solidFill>
           <a:ln>
             <a:noFill/>
@@ -5405,85 +5715,44 @@
           <a:effectLst/>
         </p:spPr>
         <p:txBody>
-          <a:bodyPr rtlCol="0" anchor="ctr" wrap="square"/>
+          <a:bodyPr wrap="square" rtlCol="0" anchor="ctr"/>
           <a:lstStyle/>
           <a:p>
             <a:pPr algn="ctr"/>
-          </a:p>
-        </p:txBody>
-      </p:sp>
-      <p:sp>
-        <p:nvSpPr>
-          <p:cNvPr id="18" name="TextBox 17"/>
-          <p:cNvSpPr txBox="1"/>
-          <p:nvPr/>
-        </p:nvSpPr>
-        <p:spPr>
-          <a:xfrm>
-            <a:off x="1207008" y="4251960"/>
-            <a:ext cx="10158984" cy="448056"/>
-          </a:xfrm>
-          <a:prstGeom prst="rect">
-            <a:avLst/>
-          </a:prstGeom>
-          <a:noFill/>
-        </p:spPr>
-        <p:txBody>
-          <a:bodyPr wrap="square" lIns="0" rIns="0" tIns="0" bIns="0" anchor="t">
-            <a:spAutoFit/>
-          </a:bodyPr>
-          <a:lstStyle/>
-          <a:p>
-            <a:pPr algn="l">
-              <a:lnSpc>
-                <a:spcPct val="120000"/>
-              </a:lnSpc>
-              <a:spcAft>
-                <a:spcPts val="0"/>
-              </a:spcAft>
-              <a:defRPr sz="1650" b="0">
-                <a:solidFill>
-                  <a:srgbClr val="15171C"/>
-                </a:solidFill>
-                <a:latin typeface="Helvetica Neue"/>
-              </a:defRPr>
-            </a:pPr>
-            <a:r>
-              <a:t>Бинарные профили и проекции интерпретируются как распределение белой области</a:t>
-            </a:r>
-          </a:p>
-        </p:txBody>
-      </p:sp>
-      <p:sp>
-        <p:nvSpPr>
-          <p:cNvPr id="19" name="TextBox 18"/>
-          <p:cNvSpPr txBox="1"/>
-          <p:nvPr/>
-        </p:nvSpPr>
-        <p:spPr>
-          <a:xfrm>
-            <a:off x="822960" y="5120640"/>
-            <a:ext cx="10543032" cy="731520"/>
-          </a:xfrm>
-          <a:prstGeom prst="rect">
-            <a:avLst/>
-          </a:prstGeom>
-          <a:noFill/>
-        </p:spPr>
-        <p:txBody>
-          <a:bodyPr wrap="square" lIns="0" rIns="0" tIns="0" bIns="0" anchor="t">
-            <a:spAutoFit/>
-          </a:bodyPr>
-          <a:lstStyle/>
-          <a:p>
-            <a:pPr algn="l">
-              <a:lnSpc>
-                <a:spcPct val="128000"/>
-              </a:lnSpc>
-              <a:spcAft>
-                <a:spcPts val="600"/>
-              </a:spcAft>
-              <a:defRPr sz="1600" b="1">
+            <a:endParaRPr/>
+          </a:p>
+        </p:txBody>
+      </p:sp>
+      <p:sp>
+        <p:nvSpPr>
+          <p:cNvPr id="23" name="TextBox 22"/>
+          <p:cNvSpPr txBox="1"/>
+          <p:nvPr/>
+        </p:nvSpPr>
+        <p:spPr>
+          <a:xfrm>
+            <a:off x="8357615" y="2191512"/>
+            <a:ext cx="2752344" cy="365760"/>
+          </a:xfrm>
+          <a:prstGeom prst="rect">
+            <a:avLst/>
+          </a:prstGeom>
+          <a:noFill/>
+        </p:spPr>
+        <p:txBody>
+          <a:bodyPr wrap="square" lIns="0" tIns="0" rIns="0" bIns="0" anchor="t">
+            <a:spAutoFit/>
+          </a:bodyPr>
+          <a:lstStyle/>
+          <a:p>
+            <a:pPr algn="l">
+              <a:lnSpc>
+                <a:spcPct val="100000"/>
+              </a:lnSpc>
+              <a:spcAft>
+                <a:spcPts val="0"/>
+              </a:spcAft>
+              <a:defRPr sz="2500" b="1">
                 <a:solidFill>
                   <a:srgbClr val="0B57D0"/>
                 </a:solidFill>
@@ -5491,7 +5760,283 @@
               </a:defRPr>
             </a:pPr>
             <a:r>
-              <a:t>Гистограмма отвечает «какая яркость встречается чаще», Лаплас — «где сильнее меняется яркость», проекция — «где накоплено больше общей яркости».</a:t>
+              <a:t>1000 × 563</a:t>
+            </a:r>
+          </a:p>
+        </p:txBody>
+      </p:sp>
+      <p:sp>
+        <p:nvSpPr>
+          <p:cNvPr id="24" name="TextBox 23"/>
+          <p:cNvSpPr txBox="1"/>
+          <p:nvPr/>
+        </p:nvSpPr>
+        <p:spPr>
+          <a:xfrm>
+            <a:off x="8357615" y="2593848"/>
+            <a:ext cx="2752344" cy="274320"/>
+          </a:xfrm>
+          <a:prstGeom prst="rect">
+            <a:avLst/>
+          </a:prstGeom>
+          <a:noFill/>
+        </p:spPr>
+        <p:txBody>
+          <a:bodyPr wrap="square" lIns="0" tIns="0" rIns="0" bIns="0" anchor="t">
+            <a:spAutoFit/>
+          </a:bodyPr>
+          <a:lstStyle/>
+          <a:p>
+            <a:pPr algn="l">
+              <a:lnSpc>
+                <a:spcPct val="118000"/>
+              </a:lnSpc>
+              <a:spcAft>
+                <a:spcPts val="0"/>
+              </a:spcAft>
+              <a:defRPr sz="1000" b="0">
+                <a:solidFill>
+                  <a:srgbClr val="5B6070"/>
+                </a:solidFill>
+                <a:latin typeface="Helvetica Neue"/>
+              </a:defRPr>
+            </a:pPr>
+            <a:r>
+              <a:t>размер кадра, пикселей</a:t>
+            </a:r>
+          </a:p>
+        </p:txBody>
+      </p:sp>
+      <p:sp>
+        <p:nvSpPr>
+          <p:cNvPr id="25" name="Rounded Rectangle 24"/>
+          <p:cNvSpPr/>
+          <p:nvPr/>
+        </p:nvSpPr>
+        <p:spPr>
+          <a:xfrm>
+            <a:off x="8101583" y="3194304"/>
+            <a:ext cx="3264408" cy="944880"/>
+          </a:xfrm>
+          <a:prstGeom prst="roundRect">
+            <a:avLst>
+              <a:gd name="adj" fmla="val 13548"/>
+            </a:avLst>
+          </a:prstGeom>
+          <a:solidFill>
+            <a:srgbClr val="F3F6FC"/>
+          </a:solidFill>
+          <a:ln>
+            <a:noFill/>
+          </a:ln>
+          <a:effectLst/>
+        </p:spPr>
+        <p:txBody>
+          <a:bodyPr wrap="square" rtlCol="0" anchor="ctr"/>
+          <a:lstStyle/>
+          <a:p>
+            <a:pPr algn="ctr"/>
+            <a:endParaRPr/>
+          </a:p>
+        </p:txBody>
+      </p:sp>
+      <p:sp>
+        <p:nvSpPr>
+          <p:cNvPr id="26" name="TextBox 25"/>
+          <p:cNvSpPr txBox="1"/>
+          <p:nvPr/>
+        </p:nvSpPr>
+        <p:spPr>
+          <a:xfrm>
+            <a:off x="8357615" y="3374136"/>
+            <a:ext cx="2752344" cy="365760"/>
+          </a:xfrm>
+          <a:prstGeom prst="rect">
+            <a:avLst/>
+          </a:prstGeom>
+          <a:noFill/>
+        </p:spPr>
+        <p:txBody>
+          <a:bodyPr wrap="square" lIns="0" tIns="0" rIns="0" bIns="0" anchor="t">
+            <a:spAutoFit/>
+          </a:bodyPr>
+          <a:lstStyle/>
+          <a:p>
+            <a:pPr algn="l">
+              <a:lnSpc>
+                <a:spcPct val="100000"/>
+              </a:lnSpc>
+              <a:spcAft>
+                <a:spcPts val="0"/>
+              </a:spcAft>
+              <a:defRPr sz="2500" b="1">
+                <a:solidFill>
+                  <a:srgbClr val="0B57D0"/>
+                </a:solidFill>
+                <a:latin typeface="Helvetica Neue"/>
+              </a:defRPr>
+            </a:pPr>
+            <a:r>
+              <a:t>0 … 255</a:t>
+            </a:r>
+          </a:p>
+        </p:txBody>
+      </p:sp>
+      <p:sp>
+        <p:nvSpPr>
+          <p:cNvPr id="27" name="TextBox 26"/>
+          <p:cNvSpPr txBox="1"/>
+          <p:nvPr/>
+        </p:nvSpPr>
+        <p:spPr>
+          <a:xfrm>
+            <a:off x="8357615" y="3776472"/>
+            <a:ext cx="2752344" cy="274320"/>
+          </a:xfrm>
+          <a:prstGeom prst="rect">
+            <a:avLst/>
+          </a:prstGeom>
+          <a:noFill/>
+        </p:spPr>
+        <p:txBody>
+          <a:bodyPr wrap="square" lIns="0" tIns="0" rIns="0" bIns="0" anchor="t">
+            <a:spAutoFit/>
+          </a:bodyPr>
+          <a:lstStyle/>
+          <a:p>
+            <a:pPr algn="l">
+              <a:lnSpc>
+                <a:spcPct val="118000"/>
+              </a:lnSpc>
+              <a:spcAft>
+                <a:spcPts val="0"/>
+              </a:spcAft>
+              <a:defRPr sz="1000" b="0">
+                <a:solidFill>
+                  <a:srgbClr val="5B6070"/>
+                </a:solidFill>
+                <a:latin typeface="Helvetica Neue"/>
+              </a:defRPr>
+            </a:pPr>
+            <a:r>
+              <a:t>диапазон значений яркости</a:t>
+            </a:r>
+          </a:p>
+        </p:txBody>
+      </p:sp>
+      <p:sp>
+        <p:nvSpPr>
+          <p:cNvPr id="28" name="Rounded Rectangle 27"/>
+          <p:cNvSpPr/>
+          <p:nvPr/>
+        </p:nvSpPr>
+        <p:spPr>
+          <a:xfrm>
+            <a:off x="8101583" y="4376928"/>
+            <a:ext cx="3264408" cy="944880"/>
+          </a:xfrm>
+          <a:prstGeom prst="roundRect">
+            <a:avLst>
+              <a:gd name="adj" fmla="val 13548"/>
+            </a:avLst>
+          </a:prstGeom>
+          <a:solidFill>
+            <a:srgbClr val="F3F6FC"/>
+          </a:solidFill>
+          <a:ln>
+            <a:noFill/>
+          </a:ln>
+          <a:effectLst/>
+        </p:spPr>
+        <p:txBody>
+          <a:bodyPr wrap="square" rtlCol="0" anchor="ctr"/>
+          <a:lstStyle/>
+          <a:p>
+            <a:pPr algn="ctr"/>
+            <a:endParaRPr/>
+          </a:p>
+        </p:txBody>
+      </p:sp>
+      <p:sp>
+        <p:nvSpPr>
+          <p:cNvPr id="29" name="TextBox 28"/>
+          <p:cNvSpPr txBox="1"/>
+          <p:nvPr/>
+        </p:nvSpPr>
+        <p:spPr>
+          <a:xfrm>
+            <a:off x="8357615" y="4556760"/>
+            <a:ext cx="2752344" cy="365760"/>
+          </a:xfrm>
+          <a:prstGeom prst="rect">
+            <a:avLst/>
+          </a:prstGeom>
+          <a:noFill/>
+        </p:spPr>
+        <p:txBody>
+          <a:bodyPr wrap="square" lIns="0" tIns="0" rIns="0" bIns="0" anchor="t">
+            <a:spAutoFit/>
+          </a:bodyPr>
+          <a:lstStyle/>
+          <a:p>
+            <a:pPr algn="l">
+              <a:lnSpc>
+                <a:spcPct val="100000"/>
+              </a:lnSpc>
+              <a:spcAft>
+                <a:spcPts val="0"/>
+              </a:spcAft>
+              <a:defRPr sz="2500" b="1">
+                <a:solidFill>
+                  <a:srgbClr val="0B57D0"/>
+                </a:solidFill>
+                <a:latin typeface="Helvetica Neue"/>
+              </a:defRPr>
+            </a:pPr>
+            <a:r>
+              <a:t>1 канал</a:t>
+            </a:r>
+          </a:p>
+        </p:txBody>
+      </p:sp>
+      <p:sp>
+        <p:nvSpPr>
+          <p:cNvPr id="30" name="TextBox 29"/>
+          <p:cNvSpPr txBox="1"/>
+          <p:nvPr/>
+        </p:nvSpPr>
+        <p:spPr>
+          <a:xfrm>
+            <a:off x="8357615" y="4959096"/>
+            <a:ext cx="2752344" cy="274320"/>
+          </a:xfrm>
+          <a:prstGeom prst="rect">
+            <a:avLst/>
+          </a:prstGeom>
+          <a:noFill/>
+        </p:spPr>
+        <p:txBody>
+          <a:bodyPr wrap="square" lIns="0" tIns="0" rIns="0" bIns="0" anchor="t">
+            <a:spAutoFit/>
+          </a:bodyPr>
+          <a:lstStyle/>
+          <a:p>
+            <a:pPr algn="l">
+              <a:lnSpc>
+                <a:spcPct val="118000"/>
+              </a:lnSpc>
+              <a:spcAft>
+                <a:spcPts val="0"/>
+              </a:spcAft>
+              <a:defRPr sz="1000" b="0">
+                <a:solidFill>
+                  <a:srgbClr val="5B6070"/>
+                </a:solidFill>
+                <a:latin typeface="Helvetica Neue"/>
+              </a:defRPr>
+            </a:pPr>
+            <a:r>
+              <a:t>чтение с IMREAD_GRAYSCALE</a:t>
             </a:r>
           </a:p>
         </p:txBody>
@@ -5504,8 +6049,8 @@
 </p:sld>
 </file>
 
-<file path=ppt/slides/slide2.xml><?xml version="1.0" encoding="utf-8"?>
-<p:sld xmlns:a="http://schemas.openxmlformats.org/drawingml/2006/main" xmlns:p="http://schemas.openxmlformats.org/presentationml/2006/main" xmlns:r="http://schemas.openxmlformats.org/officeDocument/2006/relationships">
+<file path=ppt/slides/slide3.xml><?xml version="1.0" encoding="utf-8"?>
+<p:sld xmlns:a="http://schemas.openxmlformats.org/drawingml/2006/main" xmlns:r="http://schemas.openxmlformats.org/officeDocument/2006/relationships" xmlns:p="http://schemas.openxmlformats.org/presentationml/2006/main">
   <p:cSld>
     <p:bg>
       <p:bgPr>
@@ -5521,7 +6066,14 @@
         <p:cNvGrpSpPr/>
         <p:nvPr/>
       </p:nvGrpSpPr>
-      <p:grpSpPr/>
+      <p:grpSpPr>
+        <a:xfrm>
+          <a:off x="0" y="0"/>
+          <a:ext cx="0" cy="0"/>
+          <a:chOff x="0" y="0"/>
+          <a:chExt cx="0" cy="0"/>
+        </a:xfrm>
+      </p:grpSpPr>
       <p:sp>
         <p:nvSpPr>
           <p:cNvPr id="2" name="TextBox 1"/>
@@ -5539,7 +6091,7 @@
           <a:noFill/>
         </p:spPr>
         <p:txBody>
-          <a:bodyPr wrap="square" lIns="0" rIns="0" tIns="0" bIns="0" anchor="t">
+          <a:bodyPr wrap="square" lIns="0" tIns="0" rIns="0" bIns="0" anchor="t">
             <a:spAutoFit/>
           </a:bodyPr>
           <a:lstStyle/>
@@ -5560,7 +6112,7 @@
             </a:pPr>
             <a:r>
               <a:rPr spc="140"/>
-              <a:t>ПОСТАНОВКА</a:t>
+              <a:t>ТЕОРИЯ</a:t>
             </a:r>
           </a:p>
         </p:txBody>
@@ -5582,7 +6134,7 @@
           <a:noFill/>
         </p:spPr>
         <p:txBody>
-          <a:bodyPr wrap="square" lIns="0" rIns="0" tIns="0" bIns="0" anchor="t">
+          <a:bodyPr wrap="square" lIns="0" tIns="0" rIns="0" bIns="0" anchor="t">
             <a:spAutoFit/>
           </a:bodyPr>
           <a:lstStyle/>
@@ -5602,7 +6154,7 @@
               </a:defRPr>
             </a:pPr>
             <a:r>
-              <a:t>Задание варианта 9</a:t>
+              <a:t>Три способа посмотреть на кадр</a:t>
             </a:r>
           </a:p>
         </p:txBody>
@@ -5624,7 +6176,7 @@
           <a:noFill/>
         </p:spPr>
         <p:txBody>
-          <a:bodyPr wrap="square" lIns="0" rIns="0" tIns="0" bIns="0" anchor="t">
+          <a:bodyPr wrap="square" lIns="0" tIns="0" rIns="0" bIns="0" anchor="t">
             <a:spAutoFit/>
           </a:bodyPr>
           <a:lstStyle/>
@@ -5644,7 +6196,7 @@
               </a:defRPr>
             </a:pPr>
             <a:r>
-              <a:t>Пять пунктов</a:t>
+              <a:t>Каждая характеристика отвечает на свой вопрос</a:t>
             </a:r>
           </a:p>
         </p:txBody>
@@ -5666,7 +6218,7 @@
           <a:noFill/>
         </p:spPr>
         <p:txBody>
-          <a:bodyPr wrap="square" lIns="0" rIns="0" tIns="0" bIns="0" anchor="t">
+          <a:bodyPr wrap="square" lIns="0" tIns="0" rIns="0" bIns="0" anchor="t">
             <a:spAutoFit/>
           </a:bodyPr>
           <a:lstStyle/>
@@ -5708,7 +6260,7 @@
           <a:noFill/>
         </p:spPr>
         <p:txBody>
-          <a:bodyPr wrap="square" lIns="0" rIns="0" tIns="0" bIns="0" anchor="t">
+          <a:bodyPr wrap="square" lIns="0" tIns="0" rIns="0" bIns="0" anchor="t">
             <a:spAutoFit/>
           </a:bodyPr>
           <a:lstStyle/>
@@ -5728,7 +6280,7 @@
               </a:defRPr>
             </a:pPr>
             <a:r>
-              <a:t>02</a:t>
+              <a:t>03</a:t>
             </a:r>
           </a:p>
         </p:txBody>
@@ -5741,592 +6293,12 @@
         </p:nvSpPr>
         <p:spPr>
           <a:xfrm>
-            <a:off x="822960" y="2057400"/>
-            <a:ext cx="365760" cy="365760"/>
+            <a:off x="822960" y="1938528"/>
+            <a:ext cx="3355848" cy="2249424"/>
           </a:xfrm>
           <a:prstGeom prst="roundRect">
             <a:avLst>
-              <a:gd name="adj" fmla="val 25000"/>
-            </a:avLst>
-          </a:prstGeom>
-          <a:solidFill>
-            <a:srgbClr val="D7E3FC"/>
-          </a:solidFill>
-          <a:ln>
-            <a:noFill/>
-          </a:ln>
-          <a:effectLst/>
-        </p:spPr>
-        <p:txBody>
-          <a:bodyPr rtlCol="0" anchor="ctr" wrap="square"/>
-          <a:lstStyle/>
-          <a:p>
-            <a:pPr algn="ctr"/>
-          </a:p>
-        </p:txBody>
-      </p:sp>
-      <p:sp>
-        <p:nvSpPr>
-          <p:cNvPr id="8" name="TextBox 7"/>
-          <p:cNvSpPr txBox="1"/>
-          <p:nvPr/>
-        </p:nvSpPr>
-        <p:spPr>
-          <a:xfrm>
-            <a:off x="822960" y="2125980"/>
-            <a:ext cx="365760" cy="219456"/>
-          </a:xfrm>
-          <a:prstGeom prst="rect">
-            <a:avLst/>
-          </a:prstGeom>
-          <a:noFill/>
-        </p:spPr>
-        <p:txBody>
-          <a:bodyPr wrap="square" lIns="0" rIns="0" tIns="0" bIns="0" anchor="t">
-            <a:spAutoFit/>
-          </a:bodyPr>
-          <a:lstStyle/>
-          <a:p>
-            <a:pPr algn="ctr">
-              <a:lnSpc>
-                <a:spcPct val="128000"/>
-              </a:lnSpc>
-              <a:spcAft>
-                <a:spcPts val="0"/>
-              </a:spcAft>
-              <a:defRPr sz="950" b="1">
-                <a:solidFill>
-                  <a:srgbClr val="0A2E6B"/>
-                </a:solidFill>
-                <a:latin typeface="Helvetica Neue"/>
-              </a:defRPr>
-            </a:pPr>
-            <a:r>
-              <a:t>01</a:t>
-            </a:r>
-          </a:p>
-        </p:txBody>
-      </p:sp>
-      <p:sp>
-        <p:nvSpPr>
-          <p:cNvPr id="9" name="TextBox 8"/>
-          <p:cNvSpPr txBox="1"/>
-          <p:nvPr/>
-        </p:nvSpPr>
-        <p:spPr>
-          <a:xfrm>
-            <a:off x="1408176" y="2075688"/>
-            <a:ext cx="6318503" cy="640080"/>
-          </a:xfrm>
-          <a:prstGeom prst="rect">
-            <a:avLst/>
-          </a:prstGeom>
-          <a:noFill/>
-        </p:spPr>
-        <p:txBody>
-          <a:bodyPr wrap="square" lIns="0" rIns="0" tIns="0" bIns="0" anchor="t">
-            <a:spAutoFit/>
-          </a:bodyPr>
-          <a:lstStyle/>
-          <a:p>
-            <a:pPr algn="l">
-              <a:lnSpc>
-                <a:spcPct val="120000"/>
-              </a:lnSpc>
-              <a:spcAft>
-                <a:spcPts val="0"/>
-              </a:spcAft>
-              <a:defRPr sz="1600" b="0">
-                <a:solidFill>
-                  <a:srgbClr val="15171C"/>
-                </a:solidFill>
-                <a:latin typeface="Helvetica Neue"/>
-              </a:defRPr>
-            </a:pPr>
-            <a:r>
-              <a:t>Построить гистограмму и найти пик интенсивности</a:t>
-            </a:r>
-          </a:p>
-        </p:txBody>
-      </p:sp>
-      <p:sp>
-        <p:nvSpPr>
-          <p:cNvPr id="10" name="Rounded Rectangle 9"/>
-          <p:cNvSpPr/>
-          <p:nvPr/>
-        </p:nvSpPr>
-        <p:spPr>
-          <a:xfrm>
-            <a:off x="822960" y="2697480"/>
-            <a:ext cx="365760" cy="365760"/>
-          </a:xfrm>
-          <a:prstGeom prst="roundRect">
-            <a:avLst>
-              <a:gd name="adj" fmla="val 25000"/>
-            </a:avLst>
-          </a:prstGeom>
-          <a:solidFill>
-            <a:srgbClr val="D7E3FC"/>
-          </a:solidFill>
-          <a:ln>
-            <a:noFill/>
-          </a:ln>
-          <a:effectLst/>
-        </p:spPr>
-        <p:txBody>
-          <a:bodyPr rtlCol="0" anchor="ctr" wrap="square"/>
-          <a:lstStyle/>
-          <a:p>
-            <a:pPr algn="ctr"/>
-          </a:p>
-        </p:txBody>
-      </p:sp>
-      <p:sp>
-        <p:nvSpPr>
-          <p:cNvPr id="11" name="TextBox 10"/>
-          <p:cNvSpPr txBox="1"/>
-          <p:nvPr/>
-        </p:nvSpPr>
-        <p:spPr>
-          <a:xfrm>
-            <a:off x="822960" y="2766060"/>
-            <a:ext cx="365760" cy="219456"/>
-          </a:xfrm>
-          <a:prstGeom prst="rect">
-            <a:avLst/>
-          </a:prstGeom>
-          <a:noFill/>
-        </p:spPr>
-        <p:txBody>
-          <a:bodyPr wrap="square" lIns="0" rIns="0" tIns="0" bIns="0" anchor="t">
-            <a:spAutoFit/>
-          </a:bodyPr>
-          <a:lstStyle/>
-          <a:p>
-            <a:pPr algn="ctr">
-              <a:lnSpc>
-                <a:spcPct val="128000"/>
-              </a:lnSpc>
-              <a:spcAft>
-                <a:spcPts val="0"/>
-              </a:spcAft>
-              <a:defRPr sz="950" b="1">
-                <a:solidFill>
-                  <a:srgbClr val="0A2E6B"/>
-                </a:solidFill>
-                <a:latin typeface="Helvetica Neue"/>
-              </a:defRPr>
-            </a:pPr>
-            <a:r>
-              <a:t>02</a:t>
-            </a:r>
-          </a:p>
-        </p:txBody>
-      </p:sp>
-      <p:sp>
-        <p:nvSpPr>
-          <p:cNvPr id="12" name="TextBox 11"/>
-          <p:cNvSpPr txBox="1"/>
-          <p:nvPr/>
-        </p:nvSpPr>
-        <p:spPr>
-          <a:xfrm>
-            <a:off x="1408176" y="2715768"/>
-            <a:ext cx="6318503" cy="640080"/>
-          </a:xfrm>
-          <a:prstGeom prst="rect">
-            <a:avLst/>
-          </a:prstGeom>
-          <a:noFill/>
-        </p:spPr>
-        <p:txBody>
-          <a:bodyPr wrap="square" lIns="0" rIns="0" tIns="0" bIns="0" anchor="t">
-            <a:spAutoFit/>
-          </a:bodyPr>
-          <a:lstStyle/>
-          <a:p>
-            <a:pPr algn="l">
-              <a:lnSpc>
-                <a:spcPct val="120000"/>
-              </a:lnSpc>
-              <a:spcAft>
-                <a:spcPts val="0"/>
-              </a:spcAft>
-              <a:defRPr sz="1600" b="0">
-                <a:solidFill>
-                  <a:srgbClr val="15171C"/>
-                </a:solidFill>
-                <a:latin typeface="Helvetica Neue"/>
-              </a:defRPr>
-            </a:pPr>
-            <a:r>
-              <a:t>Построить профили после применения фильтра Лапласа</a:t>
-            </a:r>
-          </a:p>
-        </p:txBody>
-      </p:sp>
-      <p:sp>
-        <p:nvSpPr>
-          <p:cNvPr id="13" name="Rounded Rectangle 12"/>
-          <p:cNvSpPr/>
-          <p:nvPr/>
-        </p:nvSpPr>
-        <p:spPr>
-          <a:xfrm>
-            <a:off x="822960" y="3337560"/>
-            <a:ext cx="365760" cy="365760"/>
-          </a:xfrm>
-          <a:prstGeom prst="roundRect">
-            <a:avLst>
-              <a:gd name="adj" fmla="val 25000"/>
-            </a:avLst>
-          </a:prstGeom>
-          <a:solidFill>
-            <a:srgbClr val="D7E3FC"/>
-          </a:solidFill>
-          <a:ln>
-            <a:noFill/>
-          </a:ln>
-          <a:effectLst/>
-        </p:spPr>
-        <p:txBody>
-          <a:bodyPr rtlCol="0" anchor="ctr" wrap="square"/>
-          <a:lstStyle/>
-          <a:p>
-            <a:pPr algn="ctr"/>
-          </a:p>
-        </p:txBody>
-      </p:sp>
-      <p:sp>
-        <p:nvSpPr>
-          <p:cNvPr id="14" name="TextBox 13"/>
-          <p:cNvSpPr txBox="1"/>
-          <p:nvPr/>
-        </p:nvSpPr>
-        <p:spPr>
-          <a:xfrm>
-            <a:off x="822960" y="3406140"/>
-            <a:ext cx="365760" cy="219456"/>
-          </a:xfrm>
-          <a:prstGeom prst="rect">
-            <a:avLst/>
-          </a:prstGeom>
-          <a:noFill/>
-        </p:spPr>
-        <p:txBody>
-          <a:bodyPr wrap="square" lIns="0" rIns="0" tIns="0" bIns="0" anchor="t">
-            <a:spAutoFit/>
-          </a:bodyPr>
-          <a:lstStyle/>
-          <a:p>
-            <a:pPr algn="ctr">
-              <a:lnSpc>
-                <a:spcPct val="128000"/>
-              </a:lnSpc>
-              <a:spcAft>
-                <a:spcPts val="0"/>
-              </a:spcAft>
-              <a:defRPr sz="950" b="1">
-                <a:solidFill>
-                  <a:srgbClr val="0A2E6B"/>
-                </a:solidFill>
-                <a:latin typeface="Helvetica Neue"/>
-              </a:defRPr>
-            </a:pPr>
-            <a:r>
-              <a:t>03</a:t>
-            </a:r>
-          </a:p>
-        </p:txBody>
-      </p:sp>
-      <p:sp>
-        <p:nvSpPr>
-          <p:cNvPr id="15" name="TextBox 14"/>
-          <p:cNvSpPr txBox="1"/>
-          <p:nvPr/>
-        </p:nvSpPr>
-        <p:spPr>
-          <a:xfrm>
-            <a:off x="1408176" y="3355848"/>
-            <a:ext cx="6318503" cy="640080"/>
-          </a:xfrm>
-          <a:prstGeom prst="rect">
-            <a:avLst/>
-          </a:prstGeom>
-          <a:noFill/>
-        </p:spPr>
-        <p:txBody>
-          <a:bodyPr wrap="square" lIns="0" rIns="0" tIns="0" bIns="0" anchor="t">
-            <a:spAutoFit/>
-          </a:bodyPr>
-          <a:lstStyle/>
-          <a:p>
-            <a:pPr algn="l">
-              <a:lnSpc>
-                <a:spcPct val="120000"/>
-              </a:lnSpc>
-              <a:spcAft>
-                <a:spcPts val="0"/>
-              </a:spcAft>
-              <a:defRPr sz="1600" b="0">
-                <a:solidFill>
-                  <a:srgbClr val="15171C"/>
-                </a:solidFill>
-                <a:latin typeface="Helvetica Neue"/>
-              </a:defRPr>
-            </a:pPr>
-            <a:r>
-              <a:t>Построить горизонтальную проекцию и найти строку максимума</a:t>
-            </a:r>
-          </a:p>
-        </p:txBody>
-      </p:sp>
-      <p:sp>
-        <p:nvSpPr>
-          <p:cNvPr id="16" name="Rounded Rectangle 15"/>
-          <p:cNvSpPr/>
-          <p:nvPr/>
-        </p:nvSpPr>
-        <p:spPr>
-          <a:xfrm>
-            <a:off x="822960" y="3977639"/>
-            <a:ext cx="365760" cy="365760"/>
-          </a:xfrm>
-          <a:prstGeom prst="roundRect">
-            <a:avLst>
-              <a:gd name="adj" fmla="val 25000"/>
-            </a:avLst>
-          </a:prstGeom>
-          <a:solidFill>
-            <a:srgbClr val="D7E3FC"/>
-          </a:solidFill>
-          <a:ln>
-            <a:noFill/>
-          </a:ln>
-          <a:effectLst/>
-        </p:spPr>
-        <p:txBody>
-          <a:bodyPr rtlCol="0" anchor="ctr" wrap="square"/>
-          <a:lstStyle/>
-          <a:p>
-            <a:pPr algn="ctr"/>
-          </a:p>
-        </p:txBody>
-      </p:sp>
-      <p:sp>
-        <p:nvSpPr>
-          <p:cNvPr id="17" name="TextBox 16"/>
-          <p:cNvSpPr txBox="1"/>
-          <p:nvPr/>
-        </p:nvSpPr>
-        <p:spPr>
-          <a:xfrm>
-            <a:off x="822960" y="4046220"/>
-            <a:ext cx="365760" cy="219456"/>
-          </a:xfrm>
-          <a:prstGeom prst="rect">
-            <a:avLst/>
-          </a:prstGeom>
-          <a:noFill/>
-        </p:spPr>
-        <p:txBody>
-          <a:bodyPr wrap="square" lIns="0" rIns="0" tIns="0" bIns="0" anchor="t">
-            <a:spAutoFit/>
-          </a:bodyPr>
-          <a:lstStyle/>
-          <a:p>
-            <a:pPr algn="ctr">
-              <a:lnSpc>
-                <a:spcPct val="128000"/>
-              </a:lnSpc>
-              <a:spcAft>
-                <a:spcPts val="0"/>
-              </a:spcAft>
-              <a:defRPr sz="950" b="1">
-                <a:solidFill>
-                  <a:srgbClr val="0A2E6B"/>
-                </a:solidFill>
-                <a:latin typeface="Helvetica Neue"/>
-              </a:defRPr>
-            </a:pPr>
-            <a:r>
-              <a:t>04</a:t>
-            </a:r>
-          </a:p>
-        </p:txBody>
-      </p:sp>
-      <p:sp>
-        <p:nvSpPr>
-          <p:cNvPr id="18" name="TextBox 17"/>
-          <p:cNvSpPr txBox="1"/>
-          <p:nvPr/>
-        </p:nvSpPr>
-        <p:spPr>
-          <a:xfrm>
-            <a:off x="1408176" y="3995927"/>
-            <a:ext cx="6318503" cy="640080"/>
-          </a:xfrm>
-          <a:prstGeom prst="rect">
-            <a:avLst/>
-          </a:prstGeom>
-          <a:noFill/>
-        </p:spPr>
-        <p:txBody>
-          <a:bodyPr wrap="square" lIns="0" rIns="0" tIns="0" bIns="0" anchor="t">
-            <a:spAutoFit/>
-          </a:bodyPr>
-          <a:lstStyle/>
-          <a:p>
-            <a:pPr algn="l">
-              <a:lnSpc>
-                <a:spcPct val="120000"/>
-              </a:lnSpc>
-              <a:spcAft>
-                <a:spcPts val="0"/>
-              </a:spcAft>
-              <a:defRPr sz="1600" b="0">
-                <a:solidFill>
-                  <a:srgbClr val="15171C"/>
-                </a:solidFill>
-                <a:latin typeface="Helvetica Neue"/>
-              </a:defRPr>
-            </a:pPr>
-            <a:r>
-              <a:t>Построить вертикальную проекцию и найти столбец максимума</a:t>
-            </a:r>
-          </a:p>
-        </p:txBody>
-      </p:sp>
-      <p:sp>
-        <p:nvSpPr>
-          <p:cNvPr id="19" name="Rounded Rectangle 18"/>
-          <p:cNvSpPr/>
-          <p:nvPr/>
-        </p:nvSpPr>
-        <p:spPr>
-          <a:xfrm>
-            <a:off x="822960" y="4617720"/>
-            <a:ext cx="365760" cy="365760"/>
-          </a:xfrm>
-          <a:prstGeom prst="roundRect">
-            <a:avLst>
-              <a:gd name="adj" fmla="val 25000"/>
-            </a:avLst>
-          </a:prstGeom>
-          <a:solidFill>
-            <a:srgbClr val="D7E3FC"/>
-          </a:solidFill>
-          <a:ln>
-            <a:noFill/>
-          </a:ln>
-          <a:effectLst/>
-        </p:spPr>
-        <p:txBody>
-          <a:bodyPr rtlCol="0" anchor="ctr" wrap="square"/>
-          <a:lstStyle/>
-          <a:p>
-            <a:pPr algn="ctr"/>
-          </a:p>
-        </p:txBody>
-      </p:sp>
-      <p:sp>
-        <p:nvSpPr>
-          <p:cNvPr id="20" name="TextBox 19"/>
-          <p:cNvSpPr txBox="1"/>
-          <p:nvPr/>
-        </p:nvSpPr>
-        <p:spPr>
-          <a:xfrm>
-            <a:off x="822960" y="4686300"/>
-            <a:ext cx="365760" cy="219456"/>
-          </a:xfrm>
-          <a:prstGeom prst="rect">
-            <a:avLst/>
-          </a:prstGeom>
-          <a:noFill/>
-        </p:spPr>
-        <p:txBody>
-          <a:bodyPr wrap="square" lIns="0" rIns="0" tIns="0" bIns="0" anchor="t">
-            <a:spAutoFit/>
-          </a:bodyPr>
-          <a:lstStyle/>
-          <a:p>
-            <a:pPr algn="ctr">
-              <a:lnSpc>
-                <a:spcPct val="128000"/>
-              </a:lnSpc>
-              <a:spcAft>
-                <a:spcPts val="0"/>
-              </a:spcAft>
-              <a:defRPr sz="950" b="1">
-                <a:solidFill>
-                  <a:srgbClr val="0A2E6B"/>
-                </a:solidFill>
-                <a:latin typeface="Helvetica Neue"/>
-              </a:defRPr>
-            </a:pPr>
-            <a:r>
-              <a:t>05</a:t>
-            </a:r>
-          </a:p>
-        </p:txBody>
-      </p:sp>
-      <p:sp>
-        <p:nvSpPr>
-          <p:cNvPr id="21" name="TextBox 20"/>
-          <p:cNvSpPr txBox="1"/>
-          <p:nvPr/>
-        </p:nvSpPr>
-        <p:spPr>
-          <a:xfrm>
-            <a:off x="1408176" y="4636007"/>
-            <a:ext cx="6318503" cy="640080"/>
-          </a:xfrm>
-          <a:prstGeom prst="rect">
-            <a:avLst/>
-          </a:prstGeom>
-          <a:noFill/>
-        </p:spPr>
-        <p:txBody>
-          <a:bodyPr wrap="square" lIns="0" rIns="0" tIns="0" bIns="0" anchor="t">
-            <a:spAutoFit/>
-          </a:bodyPr>
-          <a:lstStyle/>
-          <a:p>
-            <a:pPr algn="l">
-              <a:lnSpc>
-                <a:spcPct val="120000"/>
-              </a:lnSpc>
-              <a:spcAft>
-                <a:spcPts val="0"/>
-              </a:spcAft>
-              <a:defRPr sz="1600" b="0">
-                <a:solidFill>
-                  <a:srgbClr val="15171C"/>
-                </a:solidFill>
-                <a:latin typeface="Helvetica Neue"/>
-              </a:defRPr>
-            </a:pPr>
-            <a:r>
-              <a:t>Повторить профили и проекции после бинаризации Отсу</a:t>
-            </a:r>
-          </a:p>
-        </p:txBody>
-      </p:sp>
-      <p:sp>
-        <p:nvSpPr>
-          <p:cNvPr id="22" name="Rounded Rectangle 21"/>
-          <p:cNvSpPr/>
-          <p:nvPr/>
-        </p:nvSpPr>
-        <p:spPr>
-          <a:xfrm>
-            <a:off x="8101583" y="2011680"/>
-            <a:ext cx="3264408" cy="944880"/>
-          </a:xfrm>
-          <a:prstGeom prst="roundRect">
-            <a:avLst>
-              <a:gd name="adj" fmla="val 13548"/>
+              <a:gd name="adj" fmla="val 5691"/>
             </a:avLst>
           </a:prstGeom>
           <a:solidFill>
@@ -6338,43 +6310,44 @@
           <a:effectLst/>
         </p:spPr>
         <p:txBody>
-          <a:bodyPr rtlCol="0" anchor="ctr" wrap="square"/>
+          <a:bodyPr wrap="square" rtlCol="0" anchor="ctr"/>
           <a:lstStyle/>
           <a:p>
             <a:pPr algn="ctr"/>
-          </a:p>
-        </p:txBody>
-      </p:sp>
-      <p:sp>
-        <p:nvSpPr>
-          <p:cNvPr id="23" name="TextBox 22"/>
-          <p:cNvSpPr txBox="1"/>
-          <p:nvPr/>
-        </p:nvSpPr>
-        <p:spPr>
-          <a:xfrm>
-            <a:off x="8357615" y="2191512"/>
-            <a:ext cx="2752344" cy="365760"/>
-          </a:xfrm>
-          <a:prstGeom prst="rect">
-            <a:avLst/>
-          </a:prstGeom>
-          <a:noFill/>
-        </p:spPr>
-        <p:txBody>
-          <a:bodyPr wrap="square" lIns="0" rIns="0" tIns="0" bIns="0" anchor="t">
-            <a:spAutoFit/>
-          </a:bodyPr>
-          <a:lstStyle/>
-          <a:p>
-            <a:pPr algn="l">
-              <a:lnSpc>
-                <a:spcPct val="100000"/>
-              </a:lnSpc>
-              <a:spcAft>
-                <a:spcPts val="0"/>
-              </a:spcAft>
-              <a:defRPr sz="2500" b="1">
+            <a:endParaRPr/>
+          </a:p>
+        </p:txBody>
+      </p:sp>
+      <p:sp>
+        <p:nvSpPr>
+          <p:cNvPr id="8" name="TextBox 7"/>
+          <p:cNvSpPr txBox="1"/>
+          <p:nvPr/>
+        </p:nvSpPr>
+        <p:spPr>
+          <a:xfrm>
+            <a:off x="1097280" y="2212848"/>
+            <a:ext cx="2807208" cy="274320"/>
+          </a:xfrm>
+          <a:prstGeom prst="rect">
+            <a:avLst/>
+          </a:prstGeom>
+          <a:noFill/>
+        </p:spPr>
+        <p:txBody>
+          <a:bodyPr wrap="square" lIns="0" tIns="0" rIns="0" bIns="0" anchor="t">
+            <a:spAutoFit/>
+          </a:bodyPr>
+          <a:lstStyle/>
+          <a:p>
+            <a:pPr algn="l">
+              <a:lnSpc>
+                <a:spcPct val="128000"/>
+              </a:lnSpc>
+              <a:spcAft>
+                <a:spcPts val="0"/>
+              </a:spcAft>
+              <a:defRPr sz="1350" b="1">
                 <a:solidFill>
                   <a:srgbClr val="0B57D0"/>
                 </a:solidFill>
@@ -6382,41 +6355,41 @@
               </a:defRPr>
             </a:pPr>
             <a:r>
-              <a:t>1000 × 563</a:t>
-            </a:r>
-          </a:p>
-        </p:txBody>
-      </p:sp>
-      <p:sp>
-        <p:nvSpPr>
-          <p:cNvPr id="24" name="TextBox 23"/>
-          <p:cNvSpPr txBox="1"/>
-          <p:nvPr/>
-        </p:nvSpPr>
-        <p:spPr>
-          <a:xfrm>
-            <a:off x="8357615" y="2593848"/>
-            <a:ext cx="2752344" cy="274320"/>
-          </a:xfrm>
-          <a:prstGeom prst="rect">
-            <a:avLst/>
-          </a:prstGeom>
-          <a:noFill/>
-        </p:spPr>
-        <p:txBody>
-          <a:bodyPr wrap="square" lIns="0" rIns="0" tIns="0" bIns="0" anchor="t">
-            <a:spAutoFit/>
-          </a:bodyPr>
-          <a:lstStyle/>
-          <a:p>
-            <a:pPr algn="l">
-              <a:lnSpc>
-                <a:spcPct val="118000"/>
-              </a:lnSpc>
-              <a:spcAft>
-                <a:spcPts val="0"/>
-              </a:spcAft>
-              <a:defRPr sz="1000" b="0">
+              <a:t>Гистограмма</a:t>
+            </a:r>
+          </a:p>
+        </p:txBody>
+      </p:sp>
+      <p:sp>
+        <p:nvSpPr>
+          <p:cNvPr id="9" name="TextBox 8"/>
+          <p:cNvSpPr txBox="1"/>
+          <p:nvPr/>
+        </p:nvSpPr>
+        <p:spPr>
+          <a:xfrm>
+            <a:off x="1097280" y="2596896"/>
+            <a:ext cx="2807208" cy="1335024"/>
+          </a:xfrm>
+          <a:prstGeom prst="rect">
+            <a:avLst/>
+          </a:prstGeom>
+          <a:noFill/>
+        </p:spPr>
+        <p:txBody>
+          <a:bodyPr wrap="square" lIns="0" tIns="0" rIns="0" bIns="0" anchor="t">
+            <a:spAutoFit/>
+          </a:bodyPr>
+          <a:lstStyle/>
+          <a:p>
+            <a:pPr algn="l">
+              <a:lnSpc>
+                <a:spcPct val="128000"/>
+              </a:lnSpc>
+              <a:spcAft>
+                <a:spcPts val="400"/>
+              </a:spcAft>
+              <a:defRPr sz="1350" b="0">
                 <a:solidFill>
                   <a:srgbClr val="5B6070"/>
                 </a:solidFill>
@@ -6424,25 +6397,25 @@
               </a:defRPr>
             </a:pPr>
             <a:r>
-              <a:t>размер кадра, пикселей</a:t>
-            </a:r>
-          </a:p>
-        </p:txBody>
-      </p:sp>
-      <p:sp>
-        <p:nvSpPr>
-          <p:cNvPr id="25" name="Rounded Rectangle 24"/>
+              <a:t>H(k) — сколько пикселей имеют яркость k. Отвечает на вопрос «какая яркость встречается чаще всего» и показывает контраст и динамический диапазон.</a:t>
+            </a:r>
+          </a:p>
+        </p:txBody>
+      </p:sp>
+      <p:sp>
+        <p:nvSpPr>
+          <p:cNvPr id="10" name="Rounded Rectangle 9"/>
           <p:cNvSpPr/>
           <p:nvPr/>
         </p:nvSpPr>
         <p:spPr>
           <a:xfrm>
-            <a:off x="8101583" y="3194304"/>
-            <a:ext cx="3264408" cy="944880"/>
+            <a:off x="4416552" y="1938528"/>
+            <a:ext cx="3355848" cy="2249424"/>
           </a:xfrm>
           <a:prstGeom prst="roundRect">
             <a:avLst>
-              <a:gd name="adj" fmla="val 13548"/>
+              <a:gd name="adj" fmla="val 5691"/>
             </a:avLst>
           </a:prstGeom>
           <a:solidFill>
@@ -6454,43 +6427,44 @@
           <a:effectLst/>
         </p:spPr>
         <p:txBody>
-          <a:bodyPr rtlCol="0" anchor="ctr" wrap="square"/>
+          <a:bodyPr wrap="square" rtlCol="0" anchor="ctr"/>
           <a:lstStyle/>
           <a:p>
             <a:pPr algn="ctr"/>
-          </a:p>
-        </p:txBody>
-      </p:sp>
-      <p:sp>
-        <p:nvSpPr>
-          <p:cNvPr id="26" name="TextBox 25"/>
-          <p:cNvSpPr txBox="1"/>
-          <p:nvPr/>
-        </p:nvSpPr>
-        <p:spPr>
-          <a:xfrm>
-            <a:off x="8357615" y="3374136"/>
-            <a:ext cx="2752344" cy="365760"/>
-          </a:xfrm>
-          <a:prstGeom prst="rect">
-            <a:avLst/>
-          </a:prstGeom>
-          <a:noFill/>
-        </p:spPr>
-        <p:txBody>
-          <a:bodyPr wrap="square" lIns="0" rIns="0" tIns="0" bIns="0" anchor="t">
-            <a:spAutoFit/>
-          </a:bodyPr>
-          <a:lstStyle/>
-          <a:p>
-            <a:pPr algn="l">
-              <a:lnSpc>
-                <a:spcPct val="100000"/>
-              </a:lnSpc>
-              <a:spcAft>
-                <a:spcPts val="0"/>
-              </a:spcAft>
-              <a:defRPr sz="2500" b="1">
+            <a:endParaRPr/>
+          </a:p>
+        </p:txBody>
+      </p:sp>
+      <p:sp>
+        <p:nvSpPr>
+          <p:cNvPr id="11" name="TextBox 10"/>
+          <p:cNvSpPr txBox="1"/>
+          <p:nvPr/>
+        </p:nvSpPr>
+        <p:spPr>
+          <a:xfrm>
+            <a:off x="4690872" y="2212848"/>
+            <a:ext cx="2807208" cy="274320"/>
+          </a:xfrm>
+          <a:prstGeom prst="rect">
+            <a:avLst/>
+          </a:prstGeom>
+          <a:noFill/>
+        </p:spPr>
+        <p:txBody>
+          <a:bodyPr wrap="square" lIns="0" tIns="0" rIns="0" bIns="0" anchor="t">
+            <a:spAutoFit/>
+          </a:bodyPr>
+          <a:lstStyle/>
+          <a:p>
+            <a:pPr algn="l">
+              <a:lnSpc>
+                <a:spcPct val="128000"/>
+              </a:lnSpc>
+              <a:spcAft>
+                <a:spcPts val="0"/>
+              </a:spcAft>
+              <a:defRPr sz="1350" b="1">
                 <a:solidFill>
                   <a:srgbClr val="0B57D0"/>
                 </a:solidFill>
@@ -6498,41 +6472,41 @@
               </a:defRPr>
             </a:pPr>
             <a:r>
-              <a:t>0 … 255</a:t>
-            </a:r>
-          </a:p>
-        </p:txBody>
-      </p:sp>
-      <p:sp>
-        <p:nvSpPr>
-          <p:cNvPr id="27" name="TextBox 26"/>
-          <p:cNvSpPr txBox="1"/>
-          <p:nvPr/>
-        </p:nvSpPr>
-        <p:spPr>
-          <a:xfrm>
-            <a:off x="8357615" y="3776472"/>
-            <a:ext cx="2752344" cy="274320"/>
-          </a:xfrm>
-          <a:prstGeom prst="rect">
-            <a:avLst/>
-          </a:prstGeom>
-          <a:noFill/>
-        </p:spPr>
-        <p:txBody>
-          <a:bodyPr wrap="square" lIns="0" rIns="0" tIns="0" bIns="0" anchor="t">
-            <a:spAutoFit/>
-          </a:bodyPr>
-          <a:lstStyle/>
-          <a:p>
-            <a:pPr algn="l">
-              <a:lnSpc>
-                <a:spcPct val="118000"/>
-              </a:lnSpc>
-              <a:spcAft>
-                <a:spcPts val="0"/>
-              </a:spcAft>
-              <a:defRPr sz="1000" b="0">
+              <a:t>Профиль</a:t>
+            </a:r>
+          </a:p>
+        </p:txBody>
+      </p:sp>
+      <p:sp>
+        <p:nvSpPr>
+          <p:cNvPr id="12" name="TextBox 11"/>
+          <p:cNvSpPr txBox="1"/>
+          <p:nvPr/>
+        </p:nvSpPr>
+        <p:spPr>
+          <a:xfrm>
+            <a:off x="4690872" y="2596896"/>
+            <a:ext cx="2807208" cy="1335024"/>
+          </a:xfrm>
+          <a:prstGeom prst="rect">
+            <a:avLst/>
+          </a:prstGeom>
+          <a:noFill/>
+        </p:spPr>
+        <p:txBody>
+          <a:bodyPr wrap="square" lIns="0" tIns="0" rIns="0" bIns="0" anchor="t">
+            <a:spAutoFit/>
+          </a:bodyPr>
+          <a:lstStyle/>
+          <a:p>
+            <a:pPr algn="l">
+              <a:lnSpc>
+                <a:spcPct val="128000"/>
+              </a:lnSpc>
+              <a:spcAft>
+                <a:spcPts val="400"/>
+              </a:spcAft>
+              <a:defRPr sz="1350" b="0">
                 <a:solidFill>
                   <a:srgbClr val="5B6070"/>
                 </a:solidFill>
@@ -6540,25 +6514,25 @@
               </a:defRPr>
             </a:pPr>
             <a:r>
-              <a:t>диапазон значений яркости</a:t>
-            </a:r>
-          </a:p>
-        </p:txBody>
-      </p:sp>
-      <p:sp>
-        <p:nvSpPr>
-          <p:cNvPr id="28" name="Rounded Rectangle 27"/>
+              <a:t>Pₕ(y) = среднее по строке, Pᵥ(x) = среднее по столбцу. Нормирован на длину, поэтому профили разных изображений одного размера сравнимы напрямую.</a:t>
+            </a:r>
+          </a:p>
+        </p:txBody>
+      </p:sp>
+      <p:sp>
+        <p:nvSpPr>
+          <p:cNvPr id="13" name="Rounded Rectangle 12"/>
           <p:cNvSpPr/>
           <p:nvPr/>
         </p:nvSpPr>
         <p:spPr>
           <a:xfrm>
-            <a:off x="8101583" y="4376928"/>
-            <a:ext cx="3264408" cy="944880"/>
+            <a:off x="8010144" y="1938528"/>
+            <a:ext cx="3355848" cy="2249424"/>
           </a:xfrm>
           <a:prstGeom prst="roundRect">
             <a:avLst>
-              <a:gd name="adj" fmla="val 13548"/>
+              <a:gd name="adj" fmla="val 5691"/>
             </a:avLst>
           </a:prstGeom>
           <a:solidFill>
@@ -6570,43 +6544,44 @@
           <a:effectLst/>
         </p:spPr>
         <p:txBody>
-          <a:bodyPr rtlCol="0" anchor="ctr" wrap="square"/>
+          <a:bodyPr wrap="square" rtlCol="0" anchor="ctr"/>
           <a:lstStyle/>
           <a:p>
             <a:pPr algn="ctr"/>
-          </a:p>
-        </p:txBody>
-      </p:sp>
-      <p:sp>
-        <p:nvSpPr>
-          <p:cNvPr id="29" name="TextBox 28"/>
-          <p:cNvSpPr txBox="1"/>
-          <p:nvPr/>
-        </p:nvSpPr>
-        <p:spPr>
-          <a:xfrm>
-            <a:off x="8357615" y="4556760"/>
-            <a:ext cx="2752344" cy="365760"/>
-          </a:xfrm>
-          <a:prstGeom prst="rect">
-            <a:avLst/>
-          </a:prstGeom>
-          <a:noFill/>
-        </p:spPr>
-        <p:txBody>
-          <a:bodyPr wrap="square" lIns="0" rIns="0" tIns="0" bIns="0" anchor="t">
-            <a:spAutoFit/>
-          </a:bodyPr>
-          <a:lstStyle/>
-          <a:p>
-            <a:pPr algn="l">
-              <a:lnSpc>
-                <a:spcPct val="100000"/>
-              </a:lnSpc>
-              <a:spcAft>
-                <a:spcPts val="0"/>
-              </a:spcAft>
-              <a:defRPr sz="2500" b="1">
+            <a:endParaRPr/>
+          </a:p>
+        </p:txBody>
+      </p:sp>
+      <p:sp>
+        <p:nvSpPr>
+          <p:cNvPr id="14" name="TextBox 13"/>
+          <p:cNvSpPr txBox="1"/>
+          <p:nvPr/>
+        </p:nvSpPr>
+        <p:spPr>
+          <a:xfrm>
+            <a:off x="8284464" y="2212848"/>
+            <a:ext cx="2807208" cy="274320"/>
+          </a:xfrm>
+          <a:prstGeom prst="rect">
+            <a:avLst/>
+          </a:prstGeom>
+          <a:noFill/>
+        </p:spPr>
+        <p:txBody>
+          <a:bodyPr wrap="square" lIns="0" tIns="0" rIns="0" bIns="0" anchor="t">
+            <a:spAutoFit/>
+          </a:bodyPr>
+          <a:lstStyle/>
+          <a:p>
+            <a:pPr algn="l">
+              <a:lnSpc>
+                <a:spcPct val="128000"/>
+              </a:lnSpc>
+              <a:spcAft>
+                <a:spcPts val="0"/>
+              </a:spcAft>
+              <a:defRPr sz="1350" b="1">
                 <a:solidFill>
                   <a:srgbClr val="0B57D0"/>
                 </a:solidFill>
@@ -6614,41 +6589,41 @@
               </a:defRPr>
             </a:pPr>
             <a:r>
-              <a:t>1 канал</a:t>
-            </a:r>
-          </a:p>
-        </p:txBody>
-      </p:sp>
-      <p:sp>
-        <p:nvSpPr>
-          <p:cNvPr id="30" name="TextBox 29"/>
-          <p:cNvSpPr txBox="1"/>
-          <p:nvPr/>
-        </p:nvSpPr>
-        <p:spPr>
-          <a:xfrm>
-            <a:off x="8357615" y="4959096"/>
-            <a:ext cx="2752344" cy="274320"/>
-          </a:xfrm>
-          <a:prstGeom prst="rect">
-            <a:avLst/>
-          </a:prstGeom>
-          <a:noFill/>
-        </p:spPr>
-        <p:txBody>
-          <a:bodyPr wrap="square" lIns="0" rIns="0" tIns="0" bIns="0" anchor="t">
-            <a:spAutoFit/>
-          </a:bodyPr>
-          <a:lstStyle/>
-          <a:p>
-            <a:pPr algn="l">
-              <a:lnSpc>
-                <a:spcPct val="118000"/>
-              </a:lnSpc>
-              <a:spcAft>
-                <a:spcPts val="0"/>
-              </a:spcAft>
-              <a:defRPr sz="1000" b="0">
+              <a:t>Проекция</a:t>
+            </a:r>
+          </a:p>
+        </p:txBody>
+      </p:sp>
+      <p:sp>
+        <p:nvSpPr>
+          <p:cNvPr id="15" name="TextBox 14"/>
+          <p:cNvSpPr txBox="1"/>
+          <p:nvPr/>
+        </p:nvSpPr>
+        <p:spPr>
+          <a:xfrm>
+            <a:off x="8284464" y="2596896"/>
+            <a:ext cx="2807208" cy="1335024"/>
+          </a:xfrm>
+          <a:prstGeom prst="rect">
+            <a:avLst/>
+          </a:prstGeom>
+          <a:noFill/>
+        </p:spPr>
+        <p:txBody>
+          <a:bodyPr wrap="square" lIns="0" tIns="0" rIns="0" bIns="0" anchor="t">
+            <a:spAutoFit/>
+          </a:bodyPr>
+          <a:lstStyle/>
+          <a:p>
+            <a:pPr algn="l">
+              <a:lnSpc>
+                <a:spcPct val="128000"/>
+              </a:lnSpc>
+              <a:spcAft>
+                <a:spcPts val="400"/>
+              </a:spcAft>
+              <a:defRPr sz="1350" b="0">
                 <a:solidFill>
                   <a:srgbClr val="5B6070"/>
                 </a:solidFill>
@@ -6656,7 +6631,115 @@
               </a:defRPr>
             </a:pPr>
             <a:r>
-              <a:t>чтение с IMREAD_GRAYSCALE</a:t>
+              <a:t>HP(y) = сумма по строке, VP(x) = сумма по столбцу. Зависит от размера кадра и хранит суммарную энергию строки или столбца.</a:t>
+            </a:r>
+          </a:p>
+        </p:txBody>
+      </p:sp>
+      <p:sp>
+        <p:nvSpPr>
+          <p:cNvPr id="16" name="Rounded Rectangle 15"/>
+          <p:cNvSpPr/>
+          <p:nvPr/>
+        </p:nvSpPr>
+        <p:spPr>
+          <a:xfrm>
+            <a:off x="822960" y="4480560"/>
+            <a:ext cx="10543032" cy="1146048"/>
+          </a:xfrm>
+          <a:prstGeom prst="roundRect">
+            <a:avLst>
+              <a:gd name="adj" fmla="val 11170"/>
+            </a:avLst>
+          </a:prstGeom>
+          <a:solidFill>
+            <a:srgbClr val="F3F6FC"/>
+          </a:solidFill>
+          <a:ln>
+            <a:noFill/>
+          </a:ln>
+          <a:effectLst/>
+        </p:spPr>
+        <p:txBody>
+          <a:bodyPr wrap="square" rtlCol="0" anchor="ctr"/>
+          <a:lstStyle/>
+          <a:p>
+            <a:pPr algn="ctr"/>
+            <a:endParaRPr/>
+          </a:p>
+        </p:txBody>
+      </p:sp>
+      <p:sp>
+        <p:nvSpPr>
+          <p:cNvPr id="17" name="Rounded Rectangle 16"/>
+          <p:cNvSpPr/>
+          <p:nvPr/>
+        </p:nvSpPr>
+        <p:spPr>
+          <a:xfrm>
+            <a:off x="1060704" y="4718304"/>
+            <a:ext cx="50292" cy="670560"/>
+          </a:xfrm>
+          <a:prstGeom prst="roundRect">
+            <a:avLst>
+              <a:gd name="adj" fmla="val 50000"/>
+            </a:avLst>
+          </a:prstGeom>
+          <a:solidFill>
+            <a:srgbClr val="0B57D0"/>
+          </a:solidFill>
+          <a:ln>
+            <a:noFill/>
+          </a:ln>
+          <a:effectLst/>
+        </p:spPr>
+        <p:txBody>
+          <a:bodyPr wrap="square" rtlCol="0" anchor="ctr"/>
+          <a:lstStyle/>
+          <a:p>
+            <a:pPr algn="ctr"/>
+            <a:endParaRPr/>
+          </a:p>
+        </p:txBody>
+      </p:sp>
+      <p:sp>
+        <p:nvSpPr>
+          <p:cNvPr id="18" name="TextBox 17"/>
+          <p:cNvSpPr txBox="1"/>
+          <p:nvPr/>
+        </p:nvSpPr>
+        <p:spPr>
+          <a:xfrm>
+            <a:off x="1371600" y="4736592"/>
+            <a:ext cx="9701784" cy="633984"/>
+          </a:xfrm>
+          <a:prstGeom prst="rect">
+            <a:avLst/>
+          </a:prstGeom>
+          <a:noFill/>
+        </p:spPr>
+        <p:txBody>
+          <a:bodyPr wrap="square" lIns="0" tIns="0" rIns="0" bIns="0" anchor="t">
+            <a:spAutoFit/>
+          </a:bodyPr>
+          <a:lstStyle/>
+          <a:p>
+            <a:pPr algn="l">
+              <a:lnSpc>
+                <a:spcPct val="130000"/>
+              </a:lnSpc>
+              <a:spcAft>
+                <a:spcPts val="500"/>
+              </a:spcAft>
+              <a:defRPr sz="1600" b="0">
+                <a:solidFill>
+                  <a:srgbClr val="5B6070"/>
+                </a:solidFill>
+                <a:latin typeface="Helvetica Neue"/>
+              </a:defRPr>
+            </a:pPr>
+            <a:r>
+              <a:t>Фильтр Лапласа ∇²I — вторая производная яркости. Он усиливает резкие перепады, поэтому профиль по его модулю показывает не «где ярче», а «где сильнее меняется яркость».</a:t>
             </a:r>
           </a:p>
         </p:txBody>
@@ -6669,8 +6752,8 @@
 </p:sld>
 </file>
 
-<file path=ppt/slides/slide3.xml><?xml version="1.0" encoding="utf-8"?>
-<p:sld xmlns:a="http://schemas.openxmlformats.org/drawingml/2006/main" xmlns:p="http://schemas.openxmlformats.org/presentationml/2006/main" xmlns:r="http://schemas.openxmlformats.org/officeDocument/2006/relationships">
+<file path=ppt/slides/slide4.xml><?xml version="1.0" encoding="utf-8"?>
+<p:sld xmlns:a="http://schemas.openxmlformats.org/drawingml/2006/main" xmlns:r="http://schemas.openxmlformats.org/officeDocument/2006/relationships" xmlns:p="http://schemas.openxmlformats.org/presentationml/2006/main">
   <p:cSld>
     <p:bg>
       <p:bgPr>
@@ -6686,7 +6769,14 @@
         <p:cNvGrpSpPr/>
         <p:nvPr/>
       </p:nvGrpSpPr>
-      <p:grpSpPr/>
+      <p:grpSpPr>
+        <a:xfrm>
+          <a:off x="0" y="0"/>
+          <a:ext cx="0" cy="0"/>
+          <a:chOff x="0" y="0"/>
+          <a:chExt cx="0" cy="0"/>
+        </a:xfrm>
+      </p:grpSpPr>
       <p:sp>
         <p:nvSpPr>
           <p:cNvPr id="2" name="TextBox 1"/>
@@ -6704,7 +6794,7 @@
           <a:noFill/>
         </p:spPr>
         <p:txBody>
-          <a:bodyPr wrap="square" lIns="0" rIns="0" tIns="0" bIns="0" anchor="t">
+          <a:bodyPr wrap="square" lIns="0" tIns="0" rIns="0" bIns="0" anchor="t">
             <a:spAutoFit/>
           </a:bodyPr>
           <a:lstStyle/>
@@ -6725,7 +6815,7 @@
             </a:pPr>
             <a:r>
               <a:rPr spc="140"/>
-              <a:t>ТЕОРИЯ</a:t>
+              <a:t>ПУНКТ 01</a:t>
             </a:r>
           </a:p>
         </p:txBody>
@@ -6747,7 +6837,7 @@
           <a:noFill/>
         </p:spPr>
         <p:txBody>
-          <a:bodyPr wrap="square" lIns="0" rIns="0" tIns="0" bIns="0" anchor="t">
+          <a:bodyPr wrap="square" lIns="0" tIns="0" rIns="0" bIns="0" anchor="t">
             <a:spAutoFit/>
           </a:bodyPr>
           <a:lstStyle/>
@@ -6767,7 +6857,7 @@
               </a:defRPr>
             </a:pPr>
             <a:r>
-              <a:t>Три способа посмотреть на кадр</a:t>
+              <a:t>Гистограмма исходного кадра</a:t>
             </a:r>
           </a:p>
         </p:txBody>
@@ -6789,7 +6879,7 @@
           <a:noFill/>
         </p:spPr>
         <p:txBody>
-          <a:bodyPr wrap="square" lIns="0" rIns="0" tIns="0" bIns="0" anchor="t">
+          <a:bodyPr wrap="square" lIns="0" tIns="0" rIns="0" bIns="0" anchor="t">
             <a:spAutoFit/>
           </a:bodyPr>
           <a:lstStyle/>
@@ -6809,7 +6899,7 @@
               </a:defRPr>
             </a:pPr>
             <a:r>
-              <a:t>Каждая характеристика отвечает на свой вопрос</a:t>
+              <a:t>Пик показывает доминирующий тон</a:t>
             </a:r>
           </a:p>
         </p:txBody>
@@ -6831,7 +6921,7 @@
           <a:noFill/>
         </p:spPr>
         <p:txBody>
-          <a:bodyPr wrap="square" lIns="0" rIns="0" tIns="0" bIns="0" anchor="t">
+          <a:bodyPr wrap="square" lIns="0" tIns="0" rIns="0" bIns="0" anchor="t">
             <a:spAutoFit/>
           </a:bodyPr>
           <a:lstStyle/>
@@ -6873,7 +6963,7 @@
           <a:noFill/>
         </p:spPr>
         <p:txBody>
-          <a:bodyPr wrap="square" lIns="0" rIns="0" tIns="0" bIns="0" anchor="t">
+          <a:bodyPr wrap="square" lIns="0" tIns="0" rIns="0" bIns="0" anchor="t">
             <a:spAutoFit/>
           </a:bodyPr>
           <a:lstStyle/>
@@ -6893,25 +6983,25 @@
               </a:defRPr>
             </a:pPr>
             <a:r>
-              <a:t>03</a:t>
-            </a:r>
-          </a:p>
-        </p:txBody>
-      </p:sp>
-      <p:sp>
-        <p:nvSpPr>
-          <p:cNvPr id="7" name="Rounded Rectangle 6"/>
+              <a:t>04</a:t>
+            </a:r>
+          </a:p>
+        </p:txBody>
+      </p:sp>
+      <p:sp>
+        <p:nvSpPr>
+          <p:cNvPr id="8" name="Rounded Rectangle 7"/>
           <p:cNvSpPr/>
           <p:nvPr/>
         </p:nvSpPr>
         <p:spPr>
           <a:xfrm>
-            <a:off x="822960" y="1938528"/>
-            <a:ext cx="3355848" cy="2249424"/>
+            <a:off x="7882127" y="1965960"/>
+            <a:ext cx="3483864" cy="923544"/>
           </a:xfrm>
           <a:prstGeom prst="roundRect">
             <a:avLst>
-              <a:gd name="adj" fmla="val 5691"/>
+              <a:gd name="adj" fmla="val 13861"/>
             </a:avLst>
           </a:prstGeom>
           <a:solidFill>
@@ -6923,43 +7013,44 @@
           <a:effectLst/>
         </p:spPr>
         <p:txBody>
-          <a:bodyPr rtlCol="0" anchor="ctr" wrap="square"/>
+          <a:bodyPr wrap="square" rtlCol="0" anchor="ctr"/>
           <a:lstStyle/>
           <a:p>
             <a:pPr algn="ctr"/>
-          </a:p>
-        </p:txBody>
-      </p:sp>
-      <p:sp>
-        <p:nvSpPr>
-          <p:cNvPr id="8" name="TextBox 7"/>
-          <p:cNvSpPr txBox="1"/>
-          <p:nvPr/>
-        </p:nvSpPr>
-        <p:spPr>
-          <a:xfrm>
-            <a:off x="1097280" y="2212848"/>
-            <a:ext cx="2807208" cy="274320"/>
-          </a:xfrm>
-          <a:prstGeom prst="rect">
-            <a:avLst/>
-          </a:prstGeom>
-          <a:noFill/>
-        </p:spPr>
-        <p:txBody>
-          <a:bodyPr wrap="square" lIns="0" rIns="0" tIns="0" bIns="0" anchor="t">
-            <a:spAutoFit/>
-          </a:bodyPr>
-          <a:lstStyle/>
-          <a:p>
-            <a:pPr algn="l">
-              <a:lnSpc>
-                <a:spcPct val="128000"/>
-              </a:lnSpc>
-              <a:spcAft>
-                <a:spcPts val="0"/>
-              </a:spcAft>
-              <a:defRPr sz="1350" b="1">
+            <a:endParaRPr/>
+          </a:p>
+        </p:txBody>
+      </p:sp>
+      <p:sp>
+        <p:nvSpPr>
+          <p:cNvPr id="9" name="TextBox 8"/>
+          <p:cNvSpPr txBox="1"/>
+          <p:nvPr/>
+        </p:nvSpPr>
+        <p:spPr>
+          <a:xfrm>
+            <a:off x="8138159" y="2135124"/>
+            <a:ext cx="2971800" cy="365760"/>
+          </a:xfrm>
+          <a:prstGeom prst="rect">
+            <a:avLst/>
+          </a:prstGeom>
+          <a:noFill/>
+        </p:spPr>
+        <p:txBody>
+          <a:bodyPr wrap="square" lIns="0" tIns="0" rIns="0" bIns="0" anchor="t">
+            <a:spAutoFit/>
+          </a:bodyPr>
+          <a:lstStyle/>
+          <a:p>
+            <a:pPr algn="l">
+              <a:lnSpc>
+                <a:spcPct val="100000"/>
+              </a:lnSpc>
+              <a:spcAft>
+                <a:spcPts val="0"/>
+              </a:spcAft>
+              <a:defRPr sz="2500" b="1">
                 <a:solidFill>
                   <a:srgbClr val="0B57D0"/>
                 </a:solidFill>
@@ -6967,41 +7058,41 @@
               </a:defRPr>
             </a:pPr>
             <a:r>
-              <a:t>Гистограмма</a:t>
-            </a:r>
-          </a:p>
-        </p:txBody>
-      </p:sp>
-      <p:sp>
-        <p:nvSpPr>
-          <p:cNvPr id="9" name="TextBox 8"/>
-          <p:cNvSpPr txBox="1"/>
-          <p:nvPr/>
-        </p:nvSpPr>
-        <p:spPr>
-          <a:xfrm>
-            <a:off x="1097280" y="2596896"/>
-            <a:ext cx="2807208" cy="1335024"/>
-          </a:xfrm>
-          <a:prstGeom prst="rect">
-            <a:avLst/>
-          </a:prstGeom>
-          <a:noFill/>
-        </p:spPr>
-        <p:txBody>
-          <a:bodyPr wrap="square" lIns="0" rIns="0" tIns="0" bIns="0" anchor="t">
-            <a:spAutoFit/>
-          </a:bodyPr>
-          <a:lstStyle/>
-          <a:p>
-            <a:pPr algn="l">
-              <a:lnSpc>
-                <a:spcPct val="128000"/>
-              </a:lnSpc>
-              <a:spcAft>
-                <a:spcPts val="400"/>
-              </a:spcAft>
-              <a:defRPr sz="1350" b="0">
+              <a:t>225</a:t>
+            </a:r>
+          </a:p>
+        </p:txBody>
+      </p:sp>
+      <p:sp>
+        <p:nvSpPr>
+          <p:cNvPr id="10" name="TextBox 9"/>
+          <p:cNvSpPr txBox="1"/>
+          <p:nvPr/>
+        </p:nvSpPr>
+        <p:spPr>
+          <a:xfrm>
+            <a:off x="8138159" y="2537460"/>
+            <a:ext cx="2971800" cy="274320"/>
+          </a:xfrm>
+          <a:prstGeom prst="rect">
+            <a:avLst/>
+          </a:prstGeom>
+          <a:noFill/>
+        </p:spPr>
+        <p:txBody>
+          <a:bodyPr wrap="square" lIns="0" tIns="0" rIns="0" bIns="0" anchor="t">
+            <a:spAutoFit/>
+          </a:bodyPr>
+          <a:lstStyle/>
+          <a:p>
+            <a:pPr algn="l">
+              <a:lnSpc>
+                <a:spcPct val="118000"/>
+              </a:lnSpc>
+              <a:spcAft>
+                <a:spcPts val="0"/>
+              </a:spcAft>
+              <a:defRPr sz="1000" b="0">
                 <a:solidFill>
                   <a:srgbClr val="5B6070"/>
                 </a:solidFill>
@@ -7009,25 +7100,25 @@
               </a:defRPr>
             </a:pPr>
             <a:r>
-              <a:t>H(k) — сколько пикселей имеют яркость k. Отвечает на вопрос «какая яркость встречается чаще всего» и показывает контраст и динамический диапазон.</a:t>
-            </a:r>
-          </a:p>
-        </p:txBody>
-      </p:sp>
-      <p:sp>
-        <p:nvSpPr>
-          <p:cNvPr id="10" name="Rounded Rectangle 9"/>
+              <a:t>уровень яркости пика</a:t>
+            </a:r>
+          </a:p>
+        </p:txBody>
+      </p:sp>
+      <p:sp>
+        <p:nvSpPr>
+          <p:cNvPr id="11" name="Rounded Rectangle 10"/>
           <p:cNvSpPr/>
           <p:nvPr/>
         </p:nvSpPr>
         <p:spPr>
           <a:xfrm>
-            <a:off x="4416552" y="1938528"/>
-            <a:ext cx="3355848" cy="2249424"/>
+            <a:off x="7882127" y="3127248"/>
+            <a:ext cx="3483864" cy="923544"/>
           </a:xfrm>
           <a:prstGeom prst="roundRect">
             <a:avLst>
-              <a:gd name="adj" fmla="val 5691"/>
+              <a:gd name="adj" fmla="val 13861"/>
             </a:avLst>
           </a:prstGeom>
           <a:solidFill>
@@ -7039,43 +7130,44 @@
           <a:effectLst/>
         </p:spPr>
         <p:txBody>
-          <a:bodyPr rtlCol="0" anchor="ctr" wrap="square"/>
+          <a:bodyPr wrap="square" rtlCol="0" anchor="ctr"/>
           <a:lstStyle/>
           <a:p>
             <a:pPr algn="ctr"/>
-          </a:p>
-        </p:txBody>
-      </p:sp>
-      <p:sp>
-        <p:nvSpPr>
-          <p:cNvPr id="11" name="TextBox 10"/>
-          <p:cNvSpPr txBox="1"/>
-          <p:nvPr/>
-        </p:nvSpPr>
-        <p:spPr>
-          <a:xfrm>
-            <a:off x="4690872" y="2212848"/>
-            <a:ext cx="2807208" cy="274320"/>
-          </a:xfrm>
-          <a:prstGeom prst="rect">
-            <a:avLst/>
-          </a:prstGeom>
-          <a:noFill/>
-        </p:spPr>
-        <p:txBody>
-          <a:bodyPr wrap="square" lIns="0" rIns="0" tIns="0" bIns="0" anchor="t">
-            <a:spAutoFit/>
-          </a:bodyPr>
-          <a:lstStyle/>
-          <a:p>
-            <a:pPr algn="l">
-              <a:lnSpc>
-                <a:spcPct val="128000"/>
-              </a:lnSpc>
-              <a:spcAft>
-                <a:spcPts val="0"/>
-              </a:spcAft>
-              <a:defRPr sz="1350" b="1">
+            <a:endParaRPr/>
+          </a:p>
+        </p:txBody>
+      </p:sp>
+      <p:sp>
+        <p:nvSpPr>
+          <p:cNvPr id="12" name="TextBox 11"/>
+          <p:cNvSpPr txBox="1"/>
+          <p:nvPr/>
+        </p:nvSpPr>
+        <p:spPr>
+          <a:xfrm>
+            <a:off x="8138159" y="3296412"/>
+            <a:ext cx="2971800" cy="365760"/>
+          </a:xfrm>
+          <a:prstGeom prst="rect">
+            <a:avLst/>
+          </a:prstGeom>
+          <a:noFill/>
+        </p:spPr>
+        <p:txBody>
+          <a:bodyPr wrap="square" lIns="0" tIns="0" rIns="0" bIns="0" anchor="t">
+            <a:spAutoFit/>
+          </a:bodyPr>
+          <a:lstStyle/>
+          <a:p>
+            <a:pPr algn="l">
+              <a:lnSpc>
+                <a:spcPct val="100000"/>
+              </a:lnSpc>
+              <a:spcAft>
+                <a:spcPts val="0"/>
+              </a:spcAft>
+              <a:defRPr sz="2500" b="1">
                 <a:solidFill>
                   <a:srgbClr val="0B57D0"/>
                 </a:solidFill>
@@ -7083,41 +7175,41 @@
               </a:defRPr>
             </a:pPr>
             <a:r>
-              <a:t>Профиль</a:t>
-            </a:r>
-          </a:p>
-        </p:txBody>
-      </p:sp>
-      <p:sp>
-        <p:nvSpPr>
-          <p:cNvPr id="12" name="TextBox 11"/>
-          <p:cNvSpPr txBox="1"/>
-          <p:nvPr/>
-        </p:nvSpPr>
-        <p:spPr>
-          <a:xfrm>
-            <a:off x="4690872" y="2596896"/>
-            <a:ext cx="2807208" cy="1335024"/>
-          </a:xfrm>
-          <a:prstGeom prst="rect">
-            <a:avLst/>
-          </a:prstGeom>
-          <a:noFill/>
-        </p:spPr>
-        <p:txBody>
-          <a:bodyPr wrap="square" lIns="0" rIns="0" tIns="0" bIns="0" anchor="t">
-            <a:spAutoFit/>
-          </a:bodyPr>
-          <a:lstStyle/>
-          <a:p>
-            <a:pPr algn="l">
-              <a:lnSpc>
-                <a:spcPct val="128000"/>
-              </a:lnSpc>
-              <a:spcAft>
-                <a:spcPts val="400"/>
-              </a:spcAft>
-              <a:defRPr sz="1350" b="0">
+              <a:t>40765</a:t>
+            </a:r>
+          </a:p>
+        </p:txBody>
+      </p:sp>
+      <p:sp>
+        <p:nvSpPr>
+          <p:cNvPr id="13" name="TextBox 12"/>
+          <p:cNvSpPr txBox="1"/>
+          <p:nvPr/>
+        </p:nvSpPr>
+        <p:spPr>
+          <a:xfrm>
+            <a:off x="8138159" y="3698748"/>
+            <a:ext cx="2971800" cy="274320"/>
+          </a:xfrm>
+          <a:prstGeom prst="rect">
+            <a:avLst/>
+          </a:prstGeom>
+          <a:noFill/>
+        </p:spPr>
+        <p:txBody>
+          <a:bodyPr wrap="square" lIns="0" tIns="0" rIns="0" bIns="0" anchor="t">
+            <a:spAutoFit/>
+          </a:bodyPr>
+          <a:lstStyle/>
+          <a:p>
+            <a:pPr algn="l">
+              <a:lnSpc>
+                <a:spcPct val="118000"/>
+              </a:lnSpc>
+              <a:spcAft>
+                <a:spcPts val="0"/>
+              </a:spcAft>
+              <a:defRPr sz="1000" b="0">
                 <a:solidFill>
                   <a:srgbClr val="5B6070"/>
                 </a:solidFill>
@@ -7125,25 +7217,25 @@
               </a:defRPr>
             </a:pPr>
             <a:r>
-              <a:t>Pₕ(y) = среднее по строке, Pᵥ(x) = среднее по столбцу. Нормирован на длину, поэтому профили разных изображений одного размера сравнимы напрямую.</a:t>
-            </a:r>
-          </a:p>
-        </p:txBody>
-      </p:sp>
-      <p:sp>
-        <p:nvSpPr>
-          <p:cNvPr id="13" name="Rounded Rectangle 12"/>
+              <a:t>пикселей на этом уровне</a:t>
+            </a:r>
+          </a:p>
+        </p:txBody>
+      </p:sp>
+      <p:sp>
+        <p:nvSpPr>
+          <p:cNvPr id="14" name="Rounded Rectangle 13"/>
           <p:cNvSpPr/>
           <p:nvPr/>
         </p:nvSpPr>
         <p:spPr>
           <a:xfrm>
-            <a:off x="8010144" y="1938528"/>
-            <a:ext cx="3355848" cy="2249424"/>
+            <a:off x="7882127" y="4288536"/>
+            <a:ext cx="3483864" cy="923544"/>
           </a:xfrm>
           <a:prstGeom prst="roundRect">
             <a:avLst>
-              <a:gd name="adj" fmla="val 5691"/>
+              <a:gd name="adj" fmla="val 13861"/>
             </a:avLst>
           </a:prstGeom>
           <a:solidFill>
@@ -7155,31 +7247,116 @@
           <a:effectLst/>
         </p:spPr>
         <p:txBody>
-          <a:bodyPr rtlCol="0" anchor="ctr" wrap="square"/>
+          <a:bodyPr wrap="square" rtlCol="0" anchor="ctr"/>
           <a:lstStyle/>
           <a:p>
             <a:pPr algn="ctr"/>
-          </a:p>
-        </p:txBody>
-      </p:sp>
-      <p:sp>
-        <p:nvSpPr>
-          <p:cNvPr id="14" name="TextBox 13"/>
-          <p:cNvSpPr txBox="1"/>
-          <p:nvPr/>
-        </p:nvSpPr>
-        <p:spPr>
-          <a:xfrm>
-            <a:off x="8284464" y="2212848"/>
-            <a:ext cx="2807208" cy="274320"/>
-          </a:xfrm>
-          <a:prstGeom prst="rect">
-            <a:avLst/>
-          </a:prstGeom>
-          <a:noFill/>
-        </p:spPr>
-        <p:txBody>
-          <a:bodyPr wrap="square" lIns="0" rIns="0" tIns="0" bIns="0" anchor="t">
+            <a:endParaRPr/>
+          </a:p>
+        </p:txBody>
+      </p:sp>
+      <p:sp>
+        <p:nvSpPr>
+          <p:cNvPr id="15" name="TextBox 14"/>
+          <p:cNvSpPr txBox="1"/>
+          <p:nvPr/>
+        </p:nvSpPr>
+        <p:spPr>
+          <a:xfrm>
+            <a:off x="8138159" y="4457699"/>
+            <a:ext cx="2971800" cy="365760"/>
+          </a:xfrm>
+          <a:prstGeom prst="rect">
+            <a:avLst/>
+          </a:prstGeom>
+          <a:noFill/>
+        </p:spPr>
+        <p:txBody>
+          <a:bodyPr wrap="square" lIns="0" tIns="0" rIns="0" bIns="0" anchor="t">
+            <a:spAutoFit/>
+          </a:bodyPr>
+          <a:lstStyle/>
+          <a:p>
+            <a:pPr algn="l">
+              <a:lnSpc>
+                <a:spcPct val="100000"/>
+              </a:lnSpc>
+              <a:spcAft>
+                <a:spcPts val="0"/>
+              </a:spcAft>
+              <a:defRPr sz="2500" b="1">
+                <a:solidFill>
+                  <a:srgbClr val="0B57D0"/>
+                </a:solidFill>
+                <a:latin typeface="Helvetica Neue"/>
+              </a:defRPr>
+            </a:pPr>
+            <a:r>
+              <a:t>195.74</a:t>
+            </a:r>
+          </a:p>
+        </p:txBody>
+      </p:sp>
+      <p:sp>
+        <p:nvSpPr>
+          <p:cNvPr id="16" name="TextBox 15"/>
+          <p:cNvSpPr txBox="1"/>
+          <p:nvPr/>
+        </p:nvSpPr>
+        <p:spPr>
+          <a:xfrm>
+            <a:off x="8138159" y="4860036"/>
+            <a:ext cx="2971800" cy="274320"/>
+          </a:xfrm>
+          <a:prstGeom prst="rect">
+            <a:avLst/>
+          </a:prstGeom>
+          <a:noFill/>
+        </p:spPr>
+        <p:txBody>
+          <a:bodyPr wrap="square" lIns="0" tIns="0" rIns="0" bIns="0" anchor="t">
+            <a:spAutoFit/>
+          </a:bodyPr>
+          <a:lstStyle/>
+          <a:p>
+            <a:pPr algn="l">
+              <a:lnSpc>
+                <a:spcPct val="118000"/>
+              </a:lnSpc>
+              <a:spcAft>
+                <a:spcPts val="0"/>
+              </a:spcAft>
+              <a:defRPr sz="1000" b="0">
+                <a:solidFill>
+                  <a:srgbClr val="5B6070"/>
+                </a:solidFill>
+                <a:latin typeface="Helvetica Neue"/>
+              </a:defRPr>
+            </a:pPr>
+            <a:r>
+              <a:t>средняя яркость кадра</a:t>
+            </a:r>
+          </a:p>
+        </p:txBody>
+      </p:sp>
+      <p:sp>
+        <p:nvSpPr>
+          <p:cNvPr id="17" name="TextBox 16"/>
+          <p:cNvSpPr txBox="1"/>
+          <p:nvPr/>
+        </p:nvSpPr>
+        <p:spPr>
+          <a:xfrm>
+            <a:off x="822960" y="5870448"/>
+            <a:ext cx="10543032" cy="274320"/>
+          </a:xfrm>
+          <a:prstGeom prst="rect">
+            <a:avLst/>
+          </a:prstGeom>
+          <a:noFill/>
+        </p:spPr>
+        <p:txBody>
+          <a:bodyPr wrap="square" lIns="0" tIns="0" rIns="0" bIns="0" anchor="t">
             <a:spAutoFit/>
           </a:bodyPr>
           <a:lstStyle/>
@@ -7191,49 +7368,7 @@
               <a:spcAft>
                 <a:spcPts val="0"/>
               </a:spcAft>
-              <a:defRPr sz="1350" b="1">
-                <a:solidFill>
-                  <a:srgbClr val="0B57D0"/>
-                </a:solidFill>
-                <a:latin typeface="Helvetica Neue"/>
-              </a:defRPr>
-            </a:pPr>
-            <a:r>
-              <a:t>Проекция</a:t>
-            </a:r>
-          </a:p>
-        </p:txBody>
-      </p:sp>
-      <p:sp>
-        <p:nvSpPr>
-          <p:cNvPr id="15" name="TextBox 14"/>
-          <p:cNvSpPr txBox="1"/>
-          <p:nvPr/>
-        </p:nvSpPr>
-        <p:spPr>
-          <a:xfrm>
-            <a:off x="8284464" y="2596896"/>
-            <a:ext cx="2807208" cy="1335024"/>
-          </a:xfrm>
-          <a:prstGeom prst="rect">
-            <a:avLst/>
-          </a:prstGeom>
-          <a:noFill/>
-        </p:spPr>
-        <p:txBody>
-          <a:bodyPr wrap="square" lIns="0" rIns="0" tIns="0" bIns="0" anchor="t">
-            <a:spAutoFit/>
-          </a:bodyPr>
-          <a:lstStyle/>
-          <a:p>
-            <a:pPr algn="l">
-              <a:lnSpc>
-                <a:spcPct val="128000"/>
-              </a:lnSpc>
-              <a:spcAft>
-                <a:spcPts val="400"/>
-              </a:spcAft>
-              <a:defRPr sz="1350" b="0">
+              <a:defRPr sz="1050" b="0">
                 <a:solidFill>
                   <a:srgbClr val="5B6070"/>
                 </a:solidFill>
@@ -7241,117 +7376,41 @@
               </a:defRPr>
             </a:pPr>
             <a:r>
-              <a:t>HP(y) = сумма по строке, VP(x) = сумма по столбцу. Зависит от размера кадра и хранит суммарную энергию строки или столбца.</a:t>
-            </a:r>
-          </a:p>
-        </p:txBody>
-      </p:sp>
-      <p:sp>
-        <p:nvSpPr>
-          <p:cNvPr id="16" name="Rounded Rectangle 15"/>
-          <p:cNvSpPr/>
-          <p:nvPr/>
-        </p:nvSpPr>
-        <p:spPr>
-          <a:xfrm>
-            <a:off x="822960" y="4480560"/>
-            <a:ext cx="10543032" cy="1146048"/>
-          </a:xfrm>
-          <a:prstGeom prst="roundRect">
-            <a:avLst>
-              <a:gd name="adj" fmla="val 11170"/>
-            </a:avLst>
-          </a:prstGeom>
-          <a:solidFill>
-            <a:srgbClr val="F3F6FC"/>
-          </a:solidFill>
-          <a:ln>
-            <a:noFill/>
-          </a:ln>
-          <a:effectLst/>
-        </p:spPr>
-        <p:txBody>
-          <a:bodyPr rtlCol="0" anchor="ctr" wrap="square"/>
-          <a:lstStyle/>
-          <a:p>
-            <a:pPr algn="ctr"/>
-          </a:p>
-        </p:txBody>
-      </p:sp>
-      <p:sp>
-        <p:nvSpPr>
-          <p:cNvPr id="17" name="Rounded Rectangle 16"/>
-          <p:cNvSpPr/>
-          <p:nvPr/>
-        </p:nvSpPr>
-        <p:spPr>
-          <a:xfrm>
-            <a:off x="1060704" y="4718304"/>
-            <a:ext cx="50292" cy="670560"/>
-          </a:xfrm>
-          <a:prstGeom prst="roundRect">
-            <a:avLst>
-              <a:gd name="adj" fmla="val 50000"/>
-            </a:avLst>
-          </a:prstGeom>
-          <a:solidFill>
-            <a:srgbClr val="0B57D0"/>
-          </a:solidFill>
-          <a:ln>
-            <a:noFill/>
-          </a:ln>
-          <a:effectLst/>
-        </p:spPr>
-        <p:txBody>
-          <a:bodyPr rtlCol="0" anchor="ctr" wrap="square"/>
-          <a:lstStyle/>
-          <a:p>
-            <a:pPr algn="ctr"/>
-          </a:p>
-        </p:txBody>
-      </p:sp>
-      <p:sp>
-        <p:nvSpPr>
-          <p:cNvPr id="18" name="TextBox 17"/>
-          <p:cNvSpPr txBox="1"/>
-          <p:nvPr/>
-        </p:nvSpPr>
-        <p:spPr>
-          <a:xfrm>
-            <a:off x="1371600" y="4736592"/>
-            <a:ext cx="9701784" cy="633984"/>
-          </a:xfrm>
-          <a:prstGeom prst="rect">
-            <a:avLst/>
-          </a:prstGeom>
-          <a:noFill/>
-        </p:spPr>
-        <p:txBody>
-          <a:bodyPr wrap="square" lIns="0" rIns="0" tIns="0" bIns="0" anchor="t">
-            <a:spAutoFit/>
-          </a:bodyPr>
-          <a:lstStyle/>
-          <a:p>
-            <a:pPr algn="l">
-              <a:lnSpc>
-                <a:spcPct val="130000"/>
-              </a:lnSpc>
-              <a:spcAft>
-                <a:spcPts val="500"/>
-              </a:spcAft>
-              <a:defRPr sz="1600" b="0">
-                <a:solidFill>
-                  <a:srgbClr val="5B6070"/>
-                </a:solidFill>
-                <a:latin typeface="Helvetica Neue"/>
-              </a:defRPr>
-            </a:pPr>
-            <a:r>
-              <a:t>Фильтр Лапласа ∇²I — вторая производная яркости. Он усиливает резкие перепады, поэтому профиль по его модулю показывает не «где ярче», а «где сильнее меняется яркость».</a:t>
-            </a:r>
-          </a:p>
-        </p:txBody>
-      </p:sp>
+              <a:t>Пик не обязан совпадать с яркостью интересующего объекта: большой фон легко перевешивает небольшой объект.</a:t>
+            </a:r>
+          </a:p>
+        </p:txBody>
+      </p:sp>
+      <p:pic>
+        <p:nvPicPr>
+          <p:cNvPr id="19" name="Picture 18">
+            <a:extLst>
+              <a:ext uri="{FF2B5EF4-FFF2-40B4-BE49-F238E27FC236}">
+                <a16:creationId xmlns:a16="http://schemas.microsoft.com/office/drawing/2014/main" id="{2B369784-2CF4-8AED-BBD1-271A6C88A61A}"/>
+              </a:ext>
+            </a:extLst>
+          </p:cNvPr>
+          <p:cNvPicPr>
+            <a:picLocks noChangeAspect="1"/>
+          </p:cNvPicPr>
+          <p:nvPr/>
+        </p:nvPicPr>
+        <p:blipFill>
+          <a:blip r:embed="rId2"/>
+          <a:stretch>
+            <a:fillRect/>
+          </a:stretch>
+        </p:blipFill>
+        <p:spPr>
+          <a:xfrm>
+            <a:off x="527041" y="2474062"/>
+            <a:ext cx="6817171" cy="2229915"/>
+          </a:xfrm>
+          <a:prstGeom prst="rect">
+            <a:avLst/>
+          </a:prstGeom>
+        </p:spPr>
+      </p:pic>
     </p:spTree>
   </p:cSld>
   <p:clrMapOvr>
@@ -7360,8 +7419,8 @@
 </p:sld>
 </file>
 
-<file path=ppt/slides/slide4.xml><?xml version="1.0" encoding="utf-8"?>
-<p:sld xmlns:a="http://schemas.openxmlformats.org/drawingml/2006/main" xmlns:p="http://schemas.openxmlformats.org/presentationml/2006/main" xmlns:r="http://schemas.openxmlformats.org/officeDocument/2006/relationships">
+<file path=ppt/slides/slide5.xml><?xml version="1.0" encoding="utf-8"?>
+<p:sld xmlns:a="http://schemas.openxmlformats.org/drawingml/2006/main" xmlns:r="http://schemas.openxmlformats.org/officeDocument/2006/relationships" xmlns:p="http://schemas.openxmlformats.org/presentationml/2006/main">
   <p:cSld>
     <p:bg>
       <p:bgPr>
@@ -7377,7 +7436,14 @@
         <p:cNvGrpSpPr/>
         <p:nvPr/>
       </p:nvGrpSpPr>
-      <p:grpSpPr/>
+      <p:grpSpPr>
+        <a:xfrm>
+          <a:off x="0" y="0"/>
+          <a:ext cx="0" cy="0"/>
+          <a:chOff x="0" y="0"/>
+          <a:chExt cx="0" cy="0"/>
+        </a:xfrm>
+      </p:grpSpPr>
       <p:sp>
         <p:nvSpPr>
           <p:cNvPr id="2" name="TextBox 1"/>
@@ -7395,7 +7461,7 @@
           <a:noFill/>
         </p:spPr>
         <p:txBody>
-          <a:bodyPr wrap="square" lIns="0" rIns="0" tIns="0" bIns="0" anchor="t">
+          <a:bodyPr wrap="square" lIns="0" tIns="0" rIns="0" bIns="0" anchor="t">
             <a:spAutoFit/>
           </a:bodyPr>
           <a:lstStyle/>
@@ -7416,7 +7482,7 @@
             </a:pPr>
             <a:r>
               <a:rPr spc="140"/>
-              <a:t>ПУНКТ 01</a:t>
+              <a:t>ПУНКТ 02</a:t>
             </a:r>
           </a:p>
         </p:txBody>
@@ -7438,7 +7504,7 @@
           <a:noFill/>
         </p:spPr>
         <p:txBody>
-          <a:bodyPr wrap="square" lIns="0" rIns="0" tIns="0" bIns="0" anchor="t">
+          <a:bodyPr wrap="square" lIns="0" tIns="0" rIns="0" bIns="0" anchor="t">
             <a:spAutoFit/>
           </a:bodyPr>
           <a:lstStyle/>
@@ -7458,7 +7524,7 @@
               </a:defRPr>
             </a:pPr>
             <a:r>
-              <a:t>Гистограмма исходного кадра</a:t>
+              <a:t>Фильтр Лапласа</a:t>
             </a:r>
           </a:p>
         </p:txBody>
@@ -7480,7 +7546,7 @@
           <a:noFill/>
         </p:spPr>
         <p:txBody>
-          <a:bodyPr wrap="square" lIns="0" rIns="0" tIns="0" bIns="0" anchor="t">
+          <a:bodyPr wrap="square" lIns="0" tIns="0" rIns="0" bIns="0" anchor="t">
             <a:spAutoFit/>
           </a:bodyPr>
           <a:lstStyle/>
@@ -7500,7 +7566,7 @@
               </a:defRPr>
             </a:pPr>
             <a:r>
-              <a:t>Пик показывает доминирующий тон</a:t>
+              <a:t>Отклик берётся по модулю: важна сила, а не знак</a:t>
             </a:r>
           </a:p>
         </p:txBody>
@@ -7522,7 +7588,7 @@
           <a:noFill/>
         </p:spPr>
         <p:txBody>
-          <a:bodyPr wrap="square" lIns="0" rIns="0" tIns="0" bIns="0" anchor="t">
+          <a:bodyPr wrap="square" lIns="0" tIns="0" rIns="0" bIns="0" anchor="t">
             <a:spAutoFit/>
           </a:bodyPr>
           <a:lstStyle/>
@@ -7555,7 +7621,7 @@
         </p:nvSpPr>
         <p:spPr>
           <a:xfrm>
-            <a:off x="10454335" y="6345936"/>
+            <a:off x="10908792" y="6455664"/>
             <a:ext cx="914400" cy="219456"/>
           </a:xfrm>
           <a:prstGeom prst="rect">
@@ -7564,7 +7630,7 @@
           <a:noFill/>
         </p:spPr>
         <p:txBody>
-          <a:bodyPr wrap="square" lIns="0" rIns="0" tIns="0" bIns="0" anchor="t">
+          <a:bodyPr wrap="square" lIns="0" tIns="0" rIns="0" bIns="0" anchor="t">
             <a:spAutoFit/>
           </a:bodyPr>
           <a:lstStyle/>
@@ -7584,14 +7650,417 @@
               </a:defRPr>
             </a:pPr>
             <a:r>
-              <a:t>04</a:t>
+              <a:t>05</a:t>
+            </a:r>
+          </a:p>
+        </p:txBody>
+      </p:sp>
+      <p:sp>
+        <p:nvSpPr>
+          <p:cNvPr id="8" name="Rounded Rectangle 7"/>
+          <p:cNvSpPr/>
+          <p:nvPr/>
+        </p:nvSpPr>
+        <p:spPr>
+          <a:xfrm>
+            <a:off x="8366760" y="1965960"/>
+            <a:ext cx="2999232" cy="950976"/>
+          </a:xfrm>
+          <a:prstGeom prst="roundRect">
+            <a:avLst>
+              <a:gd name="adj" fmla="val 13461"/>
+            </a:avLst>
+          </a:prstGeom>
+          <a:solidFill>
+            <a:srgbClr val="F3F6FC"/>
+          </a:solidFill>
+          <a:ln>
+            <a:noFill/>
+          </a:ln>
+          <a:effectLst/>
+        </p:spPr>
+        <p:txBody>
+          <a:bodyPr wrap="square" rtlCol="0" anchor="ctr"/>
+          <a:lstStyle/>
+          <a:p>
+            <a:pPr algn="ctr"/>
+            <a:endParaRPr/>
+          </a:p>
+        </p:txBody>
+      </p:sp>
+      <p:sp>
+        <p:nvSpPr>
+          <p:cNvPr id="9" name="TextBox 8"/>
+          <p:cNvSpPr txBox="1"/>
+          <p:nvPr/>
+        </p:nvSpPr>
+        <p:spPr>
+          <a:xfrm>
+            <a:off x="8622792" y="2148840"/>
+            <a:ext cx="2487168" cy="365760"/>
+          </a:xfrm>
+          <a:prstGeom prst="rect">
+            <a:avLst/>
+          </a:prstGeom>
+          <a:noFill/>
+        </p:spPr>
+        <p:txBody>
+          <a:bodyPr wrap="square" lIns="0" tIns="0" rIns="0" bIns="0" anchor="t">
+            <a:spAutoFit/>
+          </a:bodyPr>
+          <a:lstStyle/>
+          <a:p>
+            <a:pPr algn="l">
+              <a:lnSpc>
+                <a:spcPct val="100000"/>
+              </a:lnSpc>
+              <a:spcAft>
+                <a:spcPts val="0"/>
+              </a:spcAft>
+              <a:defRPr sz="2500" b="1">
+                <a:solidFill>
+                  <a:srgbClr val="0B57D0"/>
+                </a:solidFill>
+                <a:latin typeface="Helvetica Neue"/>
+              </a:defRPr>
+            </a:pPr>
+            <a:r>
+              <a:t>563</a:t>
+            </a:r>
+          </a:p>
+        </p:txBody>
+      </p:sp>
+      <p:sp>
+        <p:nvSpPr>
+          <p:cNvPr id="10" name="TextBox 9"/>
+          <p:cNvSpPr txBox="1"/>
+          <p:nvPr/>
+        </p:nvSpPr>
+        <p:spPr>
+          <a:xfrm>
+            <a:off x="8622792" y="2551176"/>
+            <a:ext cx="2487168" cy="274320"/>
+          </a:xfrm>
+          <a:prstGeom prst="rect">
+            <a:avLst/>
+          </a:prstGeom>
+          <a:noFill/>
+        </p:spPr>
+        <p:txBody>
+          <a:bodyPr wrap="square" lIns="0" tIns="0" rIns="0" bIns="0" anchor="t">
+            <a:spAutoFit/>
+          </a:bodyPr>
+          <a:lstStyle/>
+          <a:p>
+            <a:pPr algn="l">
+              <a:lnSpc>
+                <a:spcPct val="118000"/>
+              </a:lnSpc>
+              <a:spcAft>
+                <a:spcPts val="0"/>
+              </a:spcAft>
+              <a:defRPr sz="1000" b="0">
+                <a:solidFill>
+                  <a:srgbClr val="5B6070"/>
+                </a:solidFill>
+                <a:latin typeface="Helvetica Neue"/>
+              </a:defRPr>
+            </a:pPr>
+            <a:r>
+              <a:t>максимум |∇²I|</a:t>
+            </a:r>
+          </a:p>
+        </p:txBody>
+      </p:sp>
+      <p:sp>
+        <p:nvSpPr>
+          <p:cNvPr id="11" name="Rounded Rectangle 10"/>
+          <p:cNvSpPr/>
+          <p:nvPr/>
+        </p:nvSpPr>
+        <p:spPr>
+          <a:xfrm>
+            <a:off x="8366760" y="3154680"/>
+            <a:ext cx="2999232" cy="950976"/>
+          </a:xfrm>
+          <a:prstGeom prst="roundRect">
+            <a:avLst>
+              <a:gd name="adj" fmla="val 13461"/>
+            </a:avLst>
+          </a:prstGeom>
+          <a:solidFill>
+            <a:srgbClr val="F3F6FC"/>
+          </a:solidFill>
+          <a:ln>
+            <a:noFill/>
+          </a:ln>
+          <a:effectLst/>
+        </p:spPr>
+        <p:txBody>
+          <a:bodyPr wrap="square" rtlCol="0" anchor="ctr"/>
+          <a:lstStyle/>
+          <a:p>
+            <a:pPr algn="ctr"/>
+            <a:endParaRPr/>
+          </a:p>
+        </p:txBody>
+      </p:sp>
+      <p:sp>
+        <p:nvSpPr>
+          <p:cNvPr id="12" name="TextBox 11"/>
+          <p:cNvSpPr txBox="1"/>
+          <p:nvPr/>
+        </p:nvSpPr>
+        <p:spPr>
+          <a:xfrm>
+            <a:off x="8622792" y="3337560"/>
+            <a:ext cx="2487168" cy="365760"/>
+          </a:xfrm>
+          <a:prstGeom prst="rect">
+            <a:avLst/>
+          </a:prstGeom>
+          <a:noFill/>
+        </p:spPr>
+        <p:txBody>
+          <a:bodyPr wrap="square" lIns="0" tIns="0" rIns="0" bIns="0" anchor="t">
+            <a:spAutoFit/>
+          </a:bodyPr>
+          <a:lstStyle/>
+          <a:p>
+            <a:pPr algn="l">
+              <a:lnSpc>
+                <a:spcPct val="100000"/>
+              </a:lnSpc>
+              <a:spcAft>
+                <a:spcPts val="0"/>
+              </a:spcAft>
+              <a:defRPr sz="2500" b="1">
+                <a:solidFill>
+                  <a:srgbClr val="0B57D0"/>
+                </a:solidFill>
+                <a:latin typeface="Helvetica Neue"/>
+              </a:defRPr>
+            </a:pPr>
+            <a:r>
+              <a:t>13.15</a:t>
+            </a:r>
+          </a:p>
+        </p:txBody>
+      </p:sp>
+      <p:sp>
+        <p:nvSpPr>
+          <p:cNvPr id="13" name="TextBox 12"/>
+          <p:cNvSpPr txBox="1"/>
+          <p:nvPr/>
+        </p:nvSpPr>
+        <p:spPr>
+          <a:xfrm>
+            <a:off x="8622792" y="3739896"/>
+            <a:ext cx="2487168" cy="274320"/>
+          </a:xfrm>
+          <a:prstGeom prst="rect">
+            <a:avLst/>
+          </a:prstGeom>
+          <a:noFill/>
+        </p:spPr>
+        <p:txBody>
+          <a:bodyPr wrap="square" lIns="0" tIns="0" rIns="0" bIns="0" anchor="t">
+            <a:spAutoFit/>
+          </a:bodyPr>
+          <a:lstStyle/>
+          <a:p>
+            <a:pPr algn="l">
+              <a:lnSpc>
+                <a:spcPct val="118000"/>
+              </a:lnSpc>
+              <a:spcAft>
+                <a:spcPts val="0"/>
+              </a:spcAft>
+              <a:defRPr sz="1000" b="0">
+                <a:solidFill>
+                  <a:srgbClr val="5B6070"/>
+                </a:solidFill>
+                <a:latin typeface="Helvetica Neue"/>
+              </a:defRPr>
+            </a:pPr>
+            <a:r>
+              <a:t>средний отклик по кадру</a:t>
+            </a:r>
+          </a:p>
+        </p:txBody>
+      </p:sp>
+      <p:sp>
+        <p:nvSpPr>
+          <p:cNvPr id="14" name="Rounded Rectangle 13"/>
+          <p:cNvSpPr/>
+          <p:nvPr/>
+        </p:nvSpPr>
+        <p:spPr>
+          <a:xfrm>
+            <a:off x="8366760" y="4537863"/>
+            <a:ext cx="3614994" cy="729081"/>
+          </a:xfrm>
+          <a:prstGeom prst="roundRect">
+            <a:avLst>
+              <a:gd name="adj" fmla="val 17558"/>
+            </a:avLst>
+          </a:prstGeom>
+          <a:solidFill>
+            <a:srgbClr val="F3F6FC"/>
+          </a:solidFill>
+          <a:ln>
+            <a:noFill/>
+          </a:ln>
+          <a:effectLst/>
+        </p:spPr>
+        <p:txBody>
+          <a:bodyPr wrap="square" rtlCol="0" anchor="ctr"/>
+          <a:lstStyle/>
+          <a:p>
+            <a:pPr algn="ctr"/>
+            <a:endParaRPr/>
+          </a:p>
+        </p:txBody>
+      </p:sp>
+      <p:sp>
+        <p:nvSpPr>
+          <p:cNvPr id="15" name="Rounded Rectangle 14"/>
+          <p:cNvSpPr/>
+          <p:nvPr/>
+        </p:nvSpPr>
+        <p:spPr>
+          <a:xfrm>
+            <a:off x="8366760" y="4757319"/>
+            <a:ext cx="50292" cy="290169"/>
+          </a:xfrm>
+          <a:prstGeom prst="roundRect">
+            <a:avLst>
+              <a:gd name="adj" fmla="val 50000"/>
+            </a:avLst>
+          </a:prstGeom>
+          <a:solidFill>
+            <a:srgbClr val="0B57D0"/>
+          </a:solidFill>
+          <a:ln>
+            <a:noFill/>
+          </a:ln>
+          <a:effectLst/>
+        </p:spPr>
+        <p:txBody>
+          <a:bodyPr wrap="square" rtlCol="0" anchor="ctr"/>
+          <a:lstStyle/>
+          <a:p>
+            <a:pPr algn="ctr"/>
+            <a:endParaRPr/>
+          </a:p>
+        </p:txBody>
+      </p:sp>
+      <p:sp>
+        <p:nvSpPr>
+          <p:cNvPr id="16" name="TextBox 15"/>
+          <p:cNvSpPr txBox="1"/>
+          <p:nvPr/>
+        </p:nvSpPr>
+        <p:spPr>
+          <a:xfrm>
+            <a:off x="8714033" y="4496477"/>
+            <a:ext cx="3267721" cy="770467"/>
+          </a:xfrm>
+          <a:prstGeom prst="rect">
+            <a:avLst/>
+          </a:prstGeom>
+          <a:noFill/>
+        </p:spPr>
+        <p:txBody>
+          <a:bodyPr wrap="square" lIns="0" tIns="0" rIns="0" bIns="0" anchor="t">
+            <a:spAutoFit/>
+          </a:bodyPr>
+          <a:lstStyle/>
+          <a:p>
+            <a:pPr algn="l">
+              <a:lnSpc>
+                <a:spcPct val="128000"/>
+              </a:lnSpc>
+              <a:spcAft>
+                <a:spcPts val="100"/>
+              </a:spcAft>
+              <a:defRPr sz="1300" b="0">
+                <a:solidFill>
+                  <a:srgbClr val="15171C"/>
+                </a:solidFill>
+                <a:latin typeface="Menlo"/>
+              </a:defRPr>
+            </a:pPr>
+            <a:r>
+              <a:rPr dirty="0" err="1"/>
+              <a:t>laplacian</a:t>
+            </a:r>
+            <a:r>
+              <a:rPr dirty="0"/>
+              <a:t> = </a:t>
+            </a:r>
+            <a:r>
+              <a:rPr dirty="0" err="1"/>
+              <a:t>np.abs</a:t>
+            </a:r>
+            <a:r>
+              <a:rPr dirty="0"/>
+              <a:t>(</a:t>
+            </a:r>
+            <a:endParaRPr lang="ru-RU" dirty="0"/>
+          </a:p>
+          <a:p>
+            <a:pPr algn="l">
+              <a:lnSpc>
+                <a:spcPct val="128000"/>
+              </a:lnSpc>
+              <a:spcAft>
+                <a:spcPts val="100"/>
+              </a:spcAft>
+              <a:defRPr sz="1300" b="0">
+                <a:solidFill>
+                  <a:srgbClr val="15171C"/>
+                </a:solidFill>
+                <a:latin typeface="Menlo"/>
+              </a:defRPr>
+            </a:pPr>
+            <a:r>
+              <a:rPr dirty="0"/>
+              <a:t>cv2.Laplacian(image, cv2.CV_64F)</a:t>
+            </a:r>
+            <a:endParaRPr lang="ru-RU" dirty="0"/>
+          </a:p>
+          <a:p>
+            <a:pPr algn="l">
+              <a:lnSpc>
+                <a:spcPct val="128000"/>
+              </a:lnSpc>
+              <a:spcAft>
+                <a:spcPts val="100"/>
+              </a:spcAft>
+              <a:defRPr sz="1300" b="0">
+                <a:solidFill>
+                  <a:srgbClr val="15171C"/>
+                </a:solidFill>
+                <a:latin typeface="Menlo"/>
+              </a:defRPr>
+            </a:pPr>
+            <a:r>
+              <a:rPr dirty="0"/>
+              <a:t>)</a:t>
             </a:r>
           </a:p>
         </p:txBody>
       </p:sp>
       <p:pic>
         <p:nvPicPr>
-          <p:cNvPr id="7" name="Picture 6" descr="hist.png"/>
+          <p:cNvPr id="18" name="Picture 17">
+            <a:extLst>
+              <a:ext uri="{FF2B5EF4-FFF2-40B4-BE49-F238E27FC236}">
+                <a16:creationId xmlns:a16="http://schemas.microsoft.com/office/drawing/2014/main" id="{5A54B0C2-CAA1-43A4-29D0-87943A01507F}"/>
+              </a:ext>
+            </a:extLst>
+          </p:cNvPr>
           <p:cNvPicPr>
             <a:picLocks noChangeAspect="1"/>
           </p:cNvPicPr>
@@ -7605,411 +8074,14 @@
         </p:blipFill>
         <p:spPr>
           <a:xfrm>
-            <a:off x="822960" y="1965960"/>
-            <a:ext cx="6720840" cy="3794760"/>
-          </a:xfrm>
-          <a:prstGeom prst="rect">
-            <a:avLst/>
-          </a:prstGeom>
-          <a:effectLst>
-            <a:outerShdw blurRad="114300" dist="25400" dir="5400000" rotWithShape="0">
-              <a:srgbClr val="1B2A44">
-                <a:alpha val="8000"/>
-              </a:srgbClr>
-            </a:outerShdw>
-          </a:effectLst>
+            <a:off x="1114842" y="1788740"/>
+            <a:ext cx="6225515" cy="4450952"/>
+          </a:xfrm>
+          <a:prstGeom prst="rect">
+            <a:avLst/>
+          </a:prstGeom>
         </p:spPr>
       </p:pic>
-      <p:sp>
-        <p:nvSpPr>
-          <p:cNvPr id="8" name="Rounded Rectangle 7"/>
-          <p:cNvSpPr/>
-          <p:nvPr/>
-        </p:nvSpPr>
-        <p:spPr>
-          <a:xfrm>
-            <a:off x="7882127" y="1965960"/>
-            <a:ext cx="3483864" cy="923544"/>
-          </a:xfrm>
-          <a:prstGeom prst="roundRect">
-            <a:avLst>
-              <a:gd name="adj" fmla="val 13861"/>
-            </a:avLst>
-          </a:prstGeom>
-          <a:solidFill>
-            <a:srgbClr val="F3F6FC"/>
-          </a:solidFill>
-          <a:ln>
-            <a:noFill/>
-          </a:ln>
-          <a:effectLst/>
-        </p:spPr>
-        <p:txBody>
-          <a:bodyPr rtlCol="0" anchor="ctr" wrap="square"/>
-          <a:lstStyle/>
-          <a:p>
-            <a:pPr algn="ctr"/>
-          </a:p>
-        </p:txBody>
-      </p:sp>
-      <p:sp>
-        <p:nvSpPr>
-          <p:cNvPr id="9" name="TextBox 8"/>
-          <p:cNvSpPr txBox="1"/>
-          <p:nvPr/>
-        </p:nvSpPr>
-        <p:spPr>
-          <a:xfrm>
-            <a:off x="8138159" y="2135124"/>
-            <a:ext cx="2971800" cy="365760"/>
-          </a:xfrm>
-          <a:prstGeom prst="rect">
-            <a:avLst/>
-          </a:prstGeom>
-          <a:noFill/>
-        </p:spPr>
-        <p:txBody>
-          <a:bodyPr wrap="square" lIns="0" rIns="0" tIns="0" bIns="0" anchor="t">
-            <a:spAutoFit/>
-          </a:bodyPr>
-          <a:lstStyle/>
-          <a:p>
-            <a:pPr algn="l">
-              <a:lnSpc>
-                <a:spcPct val="100000"/>
-              </a:lnSpc>
-              <a:spcAft>
-                <a:spcPts val="0"/>
-              </a:spcAft>
-              <a:defRPr sz="2500" b="1">
-                <a:solidFill>
-                  <a:srgbClr val="0B57D0"/>
-                </a:solidFill>
-                <a:latin typeface="Helvetica Neue"/>
-              </a:defRPr>
-            </a:pPr>
-            <a:r>
-              <a:t>225</a:t>
-            </a:r>
-          </a:p>
-        </p:txBody>
-      </p:sp>
-      <p:sp>
-        <p:nvSpPr>
-          <p:cNvPr id="10" name="TextBox 9"/>
-          <p:cNvSpPr txBox="1"/>
-          <p:nvPr/>
-        </p:nvSpPr>
-        <p:spPr>
-          <a:xfrm>
-            <a:off x="8138159" y="2537460"/>
-            <a:ext cx="2971800" cy="274320"/>
-          </a:xfrm>
-          <a:prstGeom prst="rect">
-            <a:avLst/>
-          </a:prstGeom>
-          <a:noFill/>
-        </p:spPr>
-        <p:txBody>
-          <a:bodyPr wrap="square" lIns="0" rIns="0" tIns="0" bIns="0" anchor="t">
-            <a:spAutoFit/>
-          </a:bodyPr>
-          <a:lstStyle/>
-          <a:p>
-            <a:pPr algn="l">
-              <a:lnSpc>
-                <a:spcPct val="118000"/>
-              </a:lnSpc>
-              <a:spcAft>
-                <a:spcPts val="0"/>
-              </a:spcAft>
-              <a:defRPr sz="1000" b="0">
-                <a:solidFill>
-                  <a:srgbClr val="5B6070"/>
-                </a:solidFill>
-                <a:latin typeface="Helvetica Neue"/>
-              </a:defRPr>
-            </a:pPr>
-            <a:r>
-              <a:t>уровень яркости пика</a:t>
-            </a:r>
-          </a:p>
-        </p:txBody>
-      </p:sp>
-      <p:sp>
-        <p:nvSpPr>
-          <p:cNvPr id="11" name="Rounded Rectangle 10"/>
-          <p:cNvSpPr/>
-          <p:nvPr/>
-        </p:nvSpPr>
-        <p:spPr>
-          <a:xfrm>
-            <a:off x="7882127" y="3127248"/>
-            <a:ext cx="3483864" cy="923544"/>
-          </a:xfrm>
-          <a:prstGeom prst="roundRect">
-            <a:avLst>
-              <a:gd name="adj" fmla="val 13861"/>
-            </a:avLst>
-          </a:prstGeom>
-          <a:solidFill>
-            <a:srgbClr val="F3F6FC"/>
-          </a:solidFill>
-          <a:ln>
-            <a:noFill/>
-          </a:ln>
-          <a:effectLst/>
-        </p:spPr>
-        <p:txBody>
-          <a:bodyPr rtlCol="0" anchor="ctr" wrap="square"/>
-          <a:lstStyle/>
-          <a:p>
-            <a:pPr algn="ctr"/>
-          </a:p>
-        </p:txBody>
-      </p:sp>
-      <p:sp>
-        <p:nvSpPr>
-          <p:cNvPr id="12" name="TextBox 11"/>
-          <p:cNvSpPr txBox="1"/>
-          <p:nvPr/>
-        </p:nvSpPr>
-        <p:spPr>
-          <a:xfrm>
-            <a:off x="8138159" y="3296412"/>
-            <a:ext cx="2971800" cy="365760"/>
-          </a:xfrm>
-          <a:prstGeom prst="rect">
-            <a:avLst/>
-          </a:prstGeom>
-          <a:noFill/>
-        </p:spPr>
-        <p:txBody>
-          <a:bodyPr wrap="square" lIns="0" rIns="0" tIns="0" bIns="0" anchor="t">
-            <a:spAutoFit/>
-          </a:bodyPr>
-          <a:lstStyle/>
-          <a:p>
-            <a:pPr algn="l">
-              <a:lnSpc>
-                <a:spcPct val="100000"/>
-              </a:lnSpc>
-              <a:spcAft>
-                <a:spcPts val="0"/>
-              </a:spcAft>
-              <a:defRPr sz="2500" b="1">
-                <a:solidFill>
-                  <a:srgbClr val="0B57D0"/>
-                </a:solidFill>
-                <a:latin typeface="Helvetica Neue"/>
-              </a:defRPr>
-            </a:pPr>
-            <a:r>
-              <a:t>40765</a:t>
-            </a:r>
-          </a:p>
-        </p:txBody>
-      </p:sp>
-      <p:sp>
-        <p:nvSpPr>
-          <p:cNvPr id="13" name="TextBox 12"/>
-          <p:cNvSpPr txBox="1"/>
-          <p:nvPr/>
-        </p:nvSpPr>
-        <p:spPr>
-          <a:xfrm>
-            <a:off x="8138159" y="3698748"/>
-            <a:ext cx="2971800" cy="274320"/>
-          </a:xfrm>
-          <a:prstGeom prst="rect">
-            <a:avLst/>
-          </a:prstGeom>
-          <a:noFill/>
-        </p:spPr>
-        <p:txBody>
-          <a:bodyPr wrap="square" lIns="0" rIns="0" tIns="0" bIns="0" anchor="t">
-            <a:spAutoFit/>
-          </a:bodyPr>
-          <a:lstStyle/>
-          <a:p>
-            <a:pPr algn="l">
-              <a:lnSpc>
-                <a:spcPct val="118000"/>
-              </a:lnSpc>
-              <a:spcAft>
-                <a:spcPts val="0"/>
-              </a:spcAft>
-              <a:defRPr sz="1000" b="0">
-                <a:solidFill>
-                  <a:srgbClr val="5B6070"/>
-                </a:solidFill>
-                <a:latin typeface="Helvetica Neue"/>
-              </a:defRPr>
-            </a:pPr>
-            <a:r>
-              <a:t>пикселей на этом уровне</a:t>
-            </a:r>
-          </a:p>
-        </p:txBody>
-      </p:sp>
-      <p:sp>
-        <p:nvSpPr>
-          <p:cNvPr id="14" name="Rounded Rectangle 13"/>
-          <p:cNvSpPr/>
-          <p:nvPr/>
-        </p:nvSpPr>
-        <p:spPr>
-          <a:xfrm>
-            <a:off x="7882127" y="4288536"/>
-            <a:ext cx="3483864" cy="923544"/>
-          </a:xfrm>
-          <a:prstGeom prst="roundRect">
-            <a:avLst>
-              <a:gd name="adj" fmla="val 13861"/>
-            </a:avLst>
-          </a:prstGeom>
-          <a:solidFill>
-            <a:srgbClr val="F3F6FC"/>
-          </a:solidFill>
-          <a:ln>
-            <a:noFill/>
-          </a:ln>
-          <a:effectLst/>
-        </p:spPr>
-        <p:txBody>
-          <a:bodyPr rtlCol="0" anchor="ctr" wrap="square"/>
-          <a:lstStyle/>
-          <a:p>
-            <a:pPr algn="ctr"/>
-          </a:p>
-        </p:txBody>
-      </p:sp>
-      <p:sp>
-        <p:nvSpPr>
-          <p:cNvPr id="15" name="TextBox 14"/>
-          <p:cNvSpPr txBox="1"/>
-          <p:nvPr/>
-        </p:nvSpPr>
-        <p:spPr>
-          <a:xfrm>
-            <a:off x="8138159" y="4457699"/>
-            <a:ext cx="2971800" cy="365760"/>
-          </a:xfrm>
-          <a:prstGeom prst="rect">
-            <a:avLst/>
-          </a:prstGeom>
-          <a:noFill/>
-        </p:spPr>
-        <p:txBody>
-          <a:bodyPr wrap="square" lIns="0" rIns="0" tIns="0" bIns="0" anchor="t">
-            <a:spAutoFit/>
-          </a:bodyPr>
-          <a:lstStyle/>
-          <a:p>
-            <a:pPr algn="l">
-              <a:lnSpc>
-                <a:spcPct val="100000"/>
-              </a:lnSpc>
-              <a:spcAft>
-                <a:spcPts val="0"/>
-              </a:spcAft>
-              <a:defRPr sz="2500" b="1">
-                <a:solidFill>
-                  <a:srgbClr val="0B57D0"/>
-                </a:solidFill>
-                <a:latin typeface="Helvetica Neue"/>
-              </a:defRPr>
-            </a:pPr>
-            <a:r>
-              <a:t>195.74</a:t>
-            </a:r>
-          </a:p>
-        </p:txBody>
-      </p:sp>
-      <p:sp>
-        <p:nvSpPr>
-          <p:cNvPr id="16" name="TextBox 15"/>
-          <p:cNvSpPr txBox="1"/>
-          <p:nvPr/>
-        </p:nvSpPr>
-        <p:spPr>
-          <a:xfrm>
-            <a:off x="8138159" y="4860036"/>
-            <a:ext cx="2971800" cy="274320"/>
-          </a:xfrm>
-          <a:prstGeom prst="rect">
-            <a:avLst/>
-          </a:prstGeom>
-          <a:noFill/>
-        </p:spPr>
-        <p:txBody>
-          <a:bodyPr wrap="square" lIns="0" rIns="0" tIns="0" bIns="0" anchor="t">
-            <a:spAutoFit/>
-          </a:bodyPr>
-          <a:lstStyle/>
-          <a:p>
-            <a:pPr algn="l">
-              <a:lnSpc>
-                <a:spcPct val="118000"/>
-              </a:lnSpc>
-              <a:spcAft>
-                <a:spcPts val="0"/>
-              </a:spcAft>
-              <a:defRPr sz="1000" b="0">
-                <a:solidFill>
-                  <a:srgbClr val="5B6070"/>
-                </a:solidFill>
-                <a:latin typeface="Helvetica Neue"/>
-              </a:defRPr>
-            </a:pPr>
-            <a:r>
-              <a:t>средняя яркость кадра</a:t>
-            </a:r>
-          </a:p>
-        </p:txBody>
-      </p:sp>
-      <p:sp>
-        <p:nvSpPr>
-          <p:cNvPr id="17" name="TextBox 16"/>
-          <p:cNvSpPr txBox="1"/>
-          <p:nvPr/>
-        </p:nvSpPr>
-        <p:spPr>
-          <a:xfrm>
-            <a:off x="822960" y="5870448"/>
-            <a:ext cx="10543032" cy="274320"/>
-          </a:xfrm>
-          <a:prstGeom prst="rect">
-            <a:avLst/>
-          </a:prstGeom>
-          <a:noFill/>
-        </p:spPr>
-        <p:txBody>
-          <a:bodyPr wrap="square" lIns="0" rIns="0" tIns="0" bIns="0" anchor="t">
-            <a:spAutoFit/>
-          </a:bodyPr>
-          <a:lstStyle/>
-          <a:p>
-            <a:pPr algn="l">
-              <a:lnSpc>
-                <a:spcPct val="128000"/>
-              </a:lnSpc>
-              <a:spcAft>
-                <a:spcPts val="0"/>
-              </a:spcAft>
-              <a:defRPr sz="1050" b="0">
-                <a:solidFill>
-                  <a:srgbClr val="5B6070"/>
-                </a:solidFill>
-                <a:latin typeface="Helvetica Neue"/>
-              </a:defRPr>
-            </a:pPr>
-            <a:r>
-              <a:t>Пик не обязан совпадать с яркостью интересующего объекта: большой фон легко перевешивает небольшой объект.</a:t>
-            </a:r>
-          </a:p>
-        </p:txBody>
-      </p:sp>
     </p:spTree>
   </p:cSld>
   <p:clrMapOvr>
@@ -8018,8 +8090,8 @@
 </p:sld>
 </file>
 
-<file path=ppt/slides/slide5.xml><?xml version="1.0" encoding="utf-8"?>
-<p:sld xmlns:a="http://schemas.openxmlformats.org/drawingml/2006/main" xmlns:p="http://schemas.openxmlformats.org/presentationml/2006/main" xmlns:r="http://schemas.openxmlformats.org/officeDocument/2006/relationships">
+<file path=ppt/slides/slide6.xml><?xml version="1.0" encoding="utf-8"?>
+<p:sld xmlns:a="http://schemas.openxmlformats.org/drawingml/2006/main" xmlns:r="http://schemas.openxmlformats.org/officeDocument/2006/relationships" xmlns:p="http://schemas.openxmlformats.org/presentationml/2006/main">
   <p:cSld>
     <p:bg>
       <p:bgPr>
@@ -8035,7 +8107,14 @@
         <p:cNvGrpSpPr/>
         <p:nvPr/>
       </p:nvGrpSpPr>
-      <p:grpSpPr/>
+      <p:grpSpPr>
+        <a:xfrm>
+          <a:off x="0" y="0"/>
+          <a:ext cx="0" cy="0"/>
+          <a:chOff x="0" y="0"/>
+          <a:chExt cx="0" cy="0"/>
+        </a:xfrm>
+      </p:grpSpPr>
       <p:sp>
         <p:nvSpPr>
           <p:cNvPr id="2" name="TextBox 1"/>
@@ -8053,7 +8132,7 @@
           <a:noFill/>
         </p:spPr>
         <p:txBody>
-          <a:bodyPr wrap="square" lIns="0" rIns="0" tIns="0" bIns="0" anchor="t">
+          <a:bodyPr wrap="square" lIns="0" tIns="0" rIns="0" bIns="0" anchor="t">
             <a:spAutoFit/>
           </a:bodyPr>
           <a:lstStyle/>
@@ -8074,7 +8153,7 @@
             </a:pPr>
             <a:r>
               <a:rPr spc="140"/>
-              <a:t>ПУНКТ 02</a:t>
+              <a:t>ПУНКТЫ 03–04</a:t>
             </a:r>
           </a:p>
         </p:txBody>
@@ -8096,7 +8175,7 @@
           <a:noFill/>
         </p:spPr>
         <p:txBody>
-          <a:bodyPr wrap="square" lIns="0" rIns="0" tIns="0" bIns="0" anchor="t">
+          <a:bodyPr wrap="square" lIns="0" tIns="0" rIns="0" bIns="0" anchor="t">
             <a:spAutoFit/>
           </a:bodyPr>
           <a:lstStyle/>
@@ -8116,7 +8195,7 @@
               </a:defRPr>
             </a:pPr>
             <a:r>
-              <a:t>Фильтр Лапласа</a:t>
+              <a:t>Проекции исходного кадра</a:t>
             </a:r>
           </a:p>
         </p:txBody>
@@ -8138,7 +8217,7 @@
           <a:noFill/>
         </p:spPr>
         <p:txBody>
-          <a:bodyPr wrap="square" lIns="0" rIns="0" tIns="0" bIns="0" anchor="t">
+          <a:bodyPr wrap="square" lIns="0" tIns="0" rIns="0" bIns="0" anchor="t">
             <a:spAutoFit/>
           </a:bodyPr>
           <a:lstStyle/>
@@ -8158,7 +8237,7 @@
               </a:defRPr>
             </a:pPr>
             <a:r>
-              <a:t>Отклик берётся по модулю: важна сила, а не знак</a:t>
+              <a:t>Сумма яркостей вдоль строки и вдоль столбца</a:t>
             </a:r>
           </a:p>
         </p:txBody>
@@ -8180,7 +8259,7 @@
           <a:noFill/>
         </p:spPr>
         <p:txBody>
-          <a:bodyPr wrap="square" lIns="0" rIns="0" tIns="0" bIns="0" anchor="t">
+          <a:bodyPr wrap="square" lIns="0" tIns="0" rIns="0" bIns="0" anchor="t">
             <a:spAutoFit/>
           </a:bodyPr>
           <a:lstStyle/>
@@ -8222,7 +8301,7 @@
           <a:noFill/>
         </p:spPr>
         <p:txBody>
-          <a:bodyPr wrap="square" lIns="0" rIns="0" tIns="0" bIns="0" anchor="t">
+          <a:bodyPr wrap="square" lIns="0" tIns="0" rIns="0" bIns="0" anchor="t">
             <a:spAutoFit/>
           </a:bodyPr>
           <a:lstStyle/>
@@ -8242,14 +8321,296 @@
               </a:defRPr>
             </a:pPr>
             <a:r>
-              <a:t>05</a:t>
+              <a:t>07</a:t>
+            </a:r>
+          </a:p>
+        </p:txBody>
+      </p:sp>
+      <p:sp>
+        <p:nvSpPr>
+          <p:cNvPr id="8" name="Rounded Rectangle 7"/>
+          <p:cNvSpPr/>
+          <p:nvPr/>
+        </p:nvSpPr>
+        <p:spPr>
+          <a:xfrm>
+            <a:off x="822960" y="4919471"/>
+            <a:ext cx="5152644" cy="896112"/>
+          </a:xfrm>
+          <a:prstGeom prst="roundRect">
+            <a:avLst>
+              <a:gd name="adj" fmla="val 14285"/>
+            </a:avLst>
+          </a:prstGeom>
+          <a:solidFill>
+            <a:srgbClr val="F3F6FC"/>
+          </a:solidFill>
+          <a:ln>
+            <a:noFill/>
+          </a:ln>
+          <a:effectLst/>
+        </p:spPr>
+        <p:txBody>
+          <a:bodyPr wrap="square" rtlCol="0" anchor="ctr"/>
+          <a:lstStyle/>
+          <a:p>
+            <a:pPr algn="ctr"/>
+            <a:endParaRPr/>
+          </a:p>
+        </p:txBody>
+      </p:sp>
+      <p:sp>
+        <p:nvSpPr>
+          <p:cNvPr id="9" name="TextBox 8"/>
+          <p:cNvSpPr txBox="1"/>
+          <p:nvPr/>
+        </p:nvSpPr>
+        <p:spPr>
+          <a:xfrm>
+            <a:off x="1078992" y="5074919"/>
+            <a:ext cx="4640579" cy="365760"/>
+          </a:xfrm>
+          <a:prstGeom prst="rect">
+            <a:avLst/>
+          </a:prstGeom>
+          <a:noFill/>
+        </p:spPr>
+        <p:txBody>
+          <a:bodyPr wrap="square" lIns="0" tIns="0" rIns="0" bIns="0" anchor="t">
+            <a:spAutoFit/>
+          </a:bodyPr>
+          <a:lstStyle/>
+          <a:p>
+            <a:pPr algn="l">
+              <a:lnSpc>
+                <a:spcPct val="100000"/>
+              </a:lnSpc>
+              <a:spcAft>
+                <a:spcPts val="0"/>
+              </a:spcAft>
+              <a:defRPr sz="2500" b="1">
+                <a:solidFill>
+                  <a:srgbClr val="0B57D0"/>
+                </a:solidFill>
+                <a:latin typeface="Helvetica Neue"/>
+              </a:defRPr>
+            </a:pPr>
+            <a:r>
+              <a:t>строка 86</a:t>
+            </a:r>
+          </a:p>
+        </p:txBody>
+      </p:sp>
+      <p:sp>
+        <p:nvSpPr>
+          <p:cNvPr id="10" name="TextBox 9"/>
+          <p:cNvSpPr txBox="1"/>
+          <p:nvPr/>
+        </p:nvSpPr>
+        <p:spPr>
+          <a:xfrm>
+            <a:off x="1078992" y="5477255"/>
+            <a:ext cx="4640579" cy="274320"/>
+          </a:xfrm>
+          <a:prstGeom prst="rect">
+            <a:avLst/>
+          </a:prstGeom>
+          <a:noFill/>
+        </p:spPr>
+        <p:txBody>
+          <a:bodyPr wrap="square" lIns="0" tIns="0" rIns="0" bIns="0" anchor="t">
+            <a:spAutoFit/>
+          </a:bodyPr>
+          <a:lstStyle/>
+          <a:p>
+            <a:pPr algn="l">
+              <a:lnSpc>
+                <a:spcPct val="118000"/>
+              </a:lnSpc>
+              <a:spcAft>
+                <a:spcPts val="0"/>
+              </a:spcAft>
+              <a:defRPr sz="1000" b="0">
+                <a:solidFill>
+                  <a:srgbClr val="5B6070"/>
+                </a:solidFill>
+                <a:latin typeface="Helvetica Neue"/>
+              </a:defRPr>
+            </a:pPr>
+            <a:r>
+              <a:t>HP = 223754</a:t>
+            </a:r>
+          </a:p>
+        </p:txBody>
+      </p:sp>
+      <p:sp>
+        <p:nvSpPr>
+          <p:cNvPr id="11" name="Rounded Rectangle 10"/>
+          <p:cNvSpPr/>
+          <p:nvPr/>
+        </p:nvSpPr>
+        <p:spPr>
+          <a:xfrm>
+            <a:off x="6213348" y="4919471"/>
+            <a:ext cx="5152644" cy="896112"/>
+          </a:xfrm>
+          <a:prstGeom prst="roundRect">
+            <a:avLst>
+              <a:gd name="adj" fmla="val 14285"/>
+            </a:avLst>
+          </a:prstGeom>
+          <a:solidFill>
+            <a:srgbClr val="F3F6FC"/>
+          </a:solidFill>
+          <a:ln>
+            <a:noFill/>
+          </a:ln>
+          <a:effectLst/>
+        </p:spPr>
+        <p:txBody>
+          <a:bodyPr wrap="square" rtlCol="0" anchor="ctr"/>
+          <a:lstStyle/>
+          <a:p>
+            <a:pPr algn="ctr"/>
+            <a:endParaRPr/>
+          </a:p>
+        </p:txBody>
+      </p:sp>
+      <p:sp>
+        <p:nvSpPr>
+          <p:cNvPr id="12" name="TextBox 11"/>
+          <p:cNvSpPr txBox="1"/>
+          <p:nvPr/>
+        </p:nvSpPr>
+        <p:spPr>
+          <a:xfrm>
+            <a:off x="6469380" y="5074919"/>
+            <a:ext cx="4640579" cy="365760"/>
+          </a:xfrm>
+          <a:prstGeom prst="rect">
+            <a:avLst/>
+          </a:prstGeom>
+          <a:noFill/>
+        </p:spPr>
+        <p:txBody>
+          <a:bodyPr wrap="square" lIns="0" tIns="0" rIns="0" bIns="0" anchor="t">
+            <a:spAutoFit/>
+          </a:bodyPr>
+          <a:lstStyle/>
+          <a:p>
+            <a:pPr algn="l">
+              <a:lnSpc>
+                <a:spcPct val="100000"/>
+              </a:lnSpc>
+              <a:spcAft>
+                <a:spcPts val="0"/>
+              </a:spcAft>
+              <a:defRPr sz="2500" b="1">
+                <a:solidFill>
+                  <a:srgbClr val="0B57D0"/>
+                </a:solidFill>
+                <a:latin typeface="Helvetica Neue"/>
+              </a:defRPr>
+            </a:pPr>
+            <a:r>
+              <a:t>столбец 372</a:t>
+            </a:r>
+          </a:p>
+        </p:txBody>
+      </p:sp>
+      <p:sp>
+        <p:nvSpPr>
+          <p:cNvPr id="13" name="TextBox 12"/>
+          <p:cNvSpPr txBox="1"/>
+          <p:nvPr/>
+        </p:nvSpPr>
+        <p:spPr>
+          <a:xfrm>
+            <a:off x="6469380" y="5477255"/>
+            <a:ext cx="4640579" cy="274320"/>
+          </a:xfrm>
+          <a:prstGeom prst="rect">
+            <a:avLst/>
+          </a:prstGeom>
+          <a:noFill/>
+        </p:spPr>
+        <p:txBody>
+          <a:bodyPr wrap="square" lIns="0" tIns="0" rIns="0" bIns="0" anchor="t">
+            <a:spAutoFit/>
+          </a:bodyPr>
+          <a:lstStyle/>
+          <a:p>
+            <a:pPr algn="l">
+              <a:lnSpc>
+                <a:spcPct val="118000"/>
+              </a:lnSpc>
+              <a:spcAft>
+                <a:spcPts val="0"/>
+              </a:spcAft>
+              <a:defRPr sz="1000" b="0">
+                <a:solidFill>
+                  <a:srgbClr val="5B6070"/>
+                </a:solidFill>
+                <a:latin typeface="Helvetica Neue"/>
+              </a:defRPr>
+            </a:pPr>
+            <a:r>
+              <a:t>VP = 129309</a:t>
+            </a:r>
+          </a:p>
+        </p:txBody>
+      </p:sp>
+      <p:sp>
+        <p:nvSpPr>
+          <p:cNvPr id="14" name="TextBox 13"/>
+          <p:cNvSpPr txBox="1"/>
+          <p:nvPr/>
+        </p:nvSpPr>
+        <p:spPr>
+          <a:xfrm>
+            <a:off x="822960" y="5980175"/>
+            <a:ext cx="10543032" cy="274320"/>
+          </a:xfrm>
+          <a:prstGeom prst="rect">
+            <a:avLst/>
+          </a:prstGeom>
+          <a:noFill/>
+        </p:spPr>
+        <p:txBody>
+          <a:bodyPr wrap="square" lIns="0" tIns="0" rIns="0" bIns="0" anchor="t">
+            <a:spAutoFit/>
+          </a:bodyPr>
+          <a:lstStyle/>
+          <a:p>
+            <a:pPr algn="l">
+              <a:lnSpc>
+                <a:spcPct val="128000"/>
+              </a:lnSpc>
+              <a:spcAft>
+                <a:spcPts val="0"/>
+              </a:spcAft>
+              <a:defRPr sz="1050" b="0">
+                <a:solidFill>
+                  <a:srgbClr val="5B6070"/>
+                </a:solidFill>
+                <a:latin typeface="Helvetica Neue"/>
+              </a:defRPr>
+            </a:pPr>
+            <a:r>
+              <a:t>Проекция отвечает на вопрос, где накоплено больше общей яркости.</a:t>
             </a:r>
           </a:p>
         </p:txBody>
       </p:sp>
       <p:pic>
         <p:nvPicPr>
-          <p:cNvPr id="7" name="Picture 6" descr="laplacian.png"/>
+          <p:cNvPr id="16" name="Picture 15">
+            <a:extLst>
+              <a:ext uri="{FF2B5EF4-FFF2-40B4-BE49-F238E27FC236}">
+                <a16:creationId xmlns:a16="http://schemas.microsoft.com/office/drawing/2014/main" id="{D74DF522-7839-8BEB-78E3-55AE6168983F}"/>
+              </a:ext>
+            </a:extLst>
+          </p:cNvPr>
           <p:cNvPicPr>
             <a:picLocks noChangeAspect="1"/>
           </p:cNvPicPr>
@@ -8263,359 +8624,14 @@
         </p:blipFill>
         <p:spPr>
           <a:xfrm>
-            <a:off x="822960" y="1965960"/>
-            <a:ext cx="7360920" cy="2350008"/>
-          </a:xfrm>
-          <a:prstGeom prst="rect">
-            <a:avLst/>
-          </a:prstGeom>
-          <a:effectLst>
-            <a:outerShdw blurRad="114300" dist="25400" dir="5400000" rotWithShape="0">
-              <a:srgbClr val="1B2A44">
-                <a:alpha val="8000"/>
-              </a:srgbClr>
-            </a:outerShdw>
-          </a:effectLst>
+            <a:off x="789955" y="1836761"/>
+            <a:ext cx="10612090" cy="2771814"/>
+          </a:xfrm>
+          <a:prstGeom prst="rect">
+            <a:avLst/>
+          </a:prstGeom>
         </p:spPr>
       </p:pic>
-      <p:sp>
-        <p:nvSpPr>
-          <p:cNvPr id="8" name="Rounded Rectangle 7"/>
-          <p:cNvSpPr/>
-          <p:nvPr/>
-        </p:nvSpPr>
-        <p:spPr>
-          <a:xfrm>
-            <a:off x="8366760" y="1965960"/>
-            <a:ext cx="2999232" cy="950976"/>
-          </a:xfrm>
-          <a:prstGeom prst="roundRect">
-            <a:avLst>
-              <a:gd name="adj" fmla="val 13461"/>
-            </a:avLst>
-          </a:prstGeom>
-          <a:solidFill>
-            <a:srgbClr val="F3F6FC"/>
-          </a:solidFill>
-          <a:ln>
-            <a:noFill/>
-          </a:ln>
-          <a:effectLst/>
-        </p:spPr>
-        <p:txBody>
-          <a:bodyPr rtlCol="0" anchor="ctr" wrap="square"/>
-          <a:lstStyle/>
-          <a:p>
-            <a:pPr algn="ctr"/>
-          </a:p>
-        </p:txBody>
-      </p:sp>
-      <p:sp>
-        <p:nvSpPr>
-          <p:cNvPr id="9" name="TextBox 8"/>
-          <p:cNvSpPr txBox="1"/>
-          <p:nvPr/>
-        </p:nvSpPr>
-        <p:spPr>
-          <a:xfrm>
-            <a:off x="8622792" y="2148840"/>
-            <a:ext cx="2487168" cy="365760"/>
-          </a:xfrm>
-          <a:prstGeom prst="rect">
-            <a:avLst/>
-          </a:prstGeom>
-          <a:noFill/>
-        </p:spPr>
-        <p:txBody>
-          <a:bodyPr wrap="square" lIns="0" rIns="0" tIns="0" bIns="0" anchor="t">
-            <a:spAutoFit/>
-          </a:bodyPr>
-          <a:lstStyle/>
-          <a:p>
-            <a:pPr algn="l">
-              <a:lnSpc>
-                <a:spcPct val="100000"/>
-              </a:lnSpc>
-              <a:spcAft>
-                <a:spcPts val="0"/>
-              </a:spcAft>
-              <a:defRPr sz="2500" b="1">
-                <a:solidFill>
-                  <a:srgbClr val="0B57D0"/>
-                </a:solidFill>
-                <a:latin typeface="Helvetica Neue"/>
-              </a:defRPr>
-            </a:pPr>
-            <a:r>
-              <a:t>563</a:t>
-            </a:r>
-          </a:p>
-        </p:txBody>
-      </p:sp>
-      <p:sp>
-        <p:nvSpPr>
-          <p:cNvPr id="10" name="TextBox 9"/>
-          <p:cNvSpPr txBox="1"/>
-          <p:nvPr/>
-        </p:nvSpPr>
-        <p:spPr>
-          <a:xfrm>
-            <a:off x="8622792" y="2551176"/>
-            <a:ext cx="2487168" cy="274320"/>
-          </a:xfrm>
-          <a:prstGeom prst="rect">
-            <a:avLst/>
-          </a:prstGeom>
-          <a:noFill/>
-        </p:spPr>
-        <p:txBody>
-          <a:bodyPr wrap="square" lIns="0" rIns="0" tIns="0" bIns="0" anchor="t">
-            <a:spAutoFit/>
-          </a:bodyPr>
-          <a:lstStyle/>
-          <a:p>
-            <a:pPr algn="l">
-              <a:lnSpc>
-                <a:spcPct val="118000"/>
-              </a:lnSpc>
-              <a:spcAft>
-                <a:spcPts val="0"/>
-              </a:spcAft>
-              <a:defRPr sz="1000" b="0">
-                <a:solidFill>
-                  <a:srgbClr val="5B6070"/>
-                </a:solidFill>
-                <a:latin typeface="Helvetica Neue"/>
-              </a:defRPr>
-            </a:pPr>
-            <a:r>
-              <a:t>максимум |∇²I|</a:t>
-            </a:r>
-          </a:p>
-        </p:txBody>
-      </p:sp>
-      <p:sp>
-        <p:nvSpPr>
-          <p:cNvPr id="11" name="Rounded Rectangle 10"/>
-          <p:cNvSpPr/>
-          <p:nvPr/>
-        </p:nvSpPr>
-        <p:spPr>
-          <a:xfrm>
-            <a:off x="8366760" y="3154680"/>
-            <a:ext cx="2999232" cy="950976"/>
-          </a:xfrm>
-          <a:prstGeom prst="roundRect">
-            <a:avLst>
-              <a:gd name="adj" fmla="val 13461"/>
-            </a:avLst>
-          </a:prstGeom>
-          <a:solidFill>
-            <a:srgbClr val="F3F6FC"/>
-          </a:solidFill>
-          <a:ln>
-            <a:noFill/>
-          </a:ln>
-          <a:effectLst/>
-        </p:spPr>
-        <p:txBody>
-          <a:bodyPr rtlCol="0" anchor="ctr" wrap="square"/>
-          <a:lstStyle/>
-          <a:p>
-            <a:pPr algn="ctr"/>
-          </a:p>
-        </p:txBody>
-      </p:sp>
-      <p:sp>
-        <p:nvSpPr>
-          <p:cNvPr id="12" name="TextBox 11"/>
-          <p:cNvSpPr txBox="1"/>
-          <p:nvPr/>
-        </p:nvSpPr>
-        <p:spPr>
-          <a:xfrm>
-            <a:off x="8622792" y="3337560"/>
-            <a:ext cx="2487168" cy="365760"/>
-          </a:xfrm>
-          <a:prstGeom prst="rect">
-            <a:avLst/>
-          </a:prstGeom>
-          <a:noFill/>
-        </p:spPr>
-        <p:txBody>
-          <a:bodyPr wrap="square" lIns="0" rIns="0" tIns="0" bIns="0" anchor="t">
-            <a:spAutoFit/>
-          </a:bodyPr>
-          <a:lstStyle/>
-          <a:p>
-            <a:pPr algn="l">
-              <a:lnSpc>
-                <a:spcPct val="100000"/>
-              </a:lnSpc>
-              <a:spcAft>
-                <a:spcPts val="0"/>
-              </a:spcAft>
-              <a:defRPr sz="2500" b="1">
-                <a:solidFill>
-                  <a:srgbClr val="0B57D0"/>
-                </a:solidFill>
-                <a:latin typeface="Helvetica Neue"/>
-              </a:defRPr>
-            </a:pPr>
-            <a:r>
-              <a:t>13.15</a:t>
-            </a:r>
-          </a:p>
-        </p:txBody>
-      </p:sp>
-      <p:sp>
-        <p:nvSpPr>
-          <p:cNvPr id="13" name="TextBox 12"/>
-          <p:cNvSpPr txBox="1"/>
-          <p:nvPr/>
-        </p:nvSpPr>
-        <p:spPr>
-          <a:xfrm>
-            <a:off x="8622792" y="3739896"/>
-            <a:ext cx="2487168" cy="274320"/>
-          </a:xfrm>
-          <a:prstGeom prst="rect">
-            <a:avLst/>
-          </a:prstGeom>
-          <a:noFill/>
-        </p:spPr>
-        <p:txBody>
-          <a:bodyPr wrap="square" lIns="0" rIns="0" tIns="0" bIns="0" anchor="t">
-            <a:spAutoFit/>
-          </a:bodyPr>
-          <a:lstStyle/>
-          <a:p>
-            <a:pPr algn="l">
-              <a:lnSpc>
-                <a:spcPct val="118000"/>
-              </a:lnSpc>
-              <a:spcAft>
-                <a:spcPts val="0"/>
-              </a:spcAft>
-              <a:defRPr sz="1000" b="0">
-                <a:solidFill>
-                  <a:srgbClr val="5B6070"/>
-                </a:solidFill>
-                <a:latin typeface="Helvetica Neue"/>
-              </a:defRPr>
-            </a:pPr>
-            <a:r>
-              <a:t>средний отклик по кадру</a:t>
-            </a:r>
-          </a:p>
-        </p:txBody>
-      </p:sp>
-      <p:sp>
-        <p:nvSpPr>
-          <p:cNvPr id="14" name="Rounded Rectangle 13"/>
-          <p:cNvSpPr/>
-          <p:nvPr/>
-        </p:nvSpPr>
-        <p:spPr>
-          <a:xfrm>
-            <a:off x="822960" y="4700016"/>
-            <a:ext cx="7360920" cy="729081"/>
-          </a:xfrm>
-          <a:prstGeom prst="roundRect">
-            <a:avLst>
-              <a:gd name="adj" fmla="val 17558"/>
-            </a:avLst>
-          </a:prstGeom>
-          <a:solidFill>
-            <a:srgbClr val="F3F6FC"/>
-          </a:solidFill>
-          <a:ln>
-            <a:noFill/>
-          </a:ln>
-          <a:effectLst/>
-        </p:spPr>
-        <p:txBody>
-          <a:bodyPr rtlCol="0" anchor="ctr" wrap="square"/>
-          <a:lstStyle/>
-          <a:p>
-            <a:pPr algn="ctr"/>
-          </a:p>
-        </p:txBody>
-      </p:sp>
-      <p:sp>
-        <p:nvSpPr>
-          <p:cNvPr id="15" name="Rounded Rectangle 14"/>
-          <p:cNvSpPr/>
-          <p:nvPr/>
-        </p:nvSpPr>
-        <p:spPr>
-          <a:xfrm>
-            <a:off x="822960" y="4919472"/>
-            <a:ext cx="50292" cy="290169"/>
-          </a:xfrm>
-          <a:prstGeom prst="roundRect">
-            <a:avLst>
-              <a:gd name="adj" fmla="val 50000"/>
-            </a:avLst>
-          </a:prstGeom>
-          <a:solidFill>
-            <a:srgbClr val="0B57D0"/>
-          </a:solidFill>
-          <a:ln>
-            <a:noFill/>
-          </a:ln>
-          <a:effectLst/>
-        </p:spPr>
-        <p:txBody>
-          <a:bodyPr rtlCol="0" anchor="ctr" wrap="square"/>
-          <a:lstStyle/>
-          <a:p>
-            <a:pPr algn="ctr"/>
-          </a:p>
-        </p:txBody>
-      </p:sp>
-      <p:sp>
-        <p:nvSpPr>
-          <p:cNvPr id="16" name="TextBox 15"/>
-          <p:cNvSpPr txBox="1"/>
-          <p:nvPr/>
-        </p:nvSpPr>
-        <p:spPr>
-          <a:xfrm>
-            <a:off x="1207008" y="4937759"/>
-            <a:ext cx="6702552" cy="253593"/>
-          </a:xfrm>
-          <a:prstGeom prst="rect">
-            <a:avLst/>
-          </a:prstGeom>
-          <a:noFill/>
-        </p:spPr>
-        <p:txBody>
-          <a:bodyPr wrap="square" lIns="0" rIns="0" tIns="0" bIns="0" anchor="t">
-            <a:spAutoFit/>
-          </a:bodyPr>
-          <a:lstStyle/>
-          <a:p>
-            <a:pPr algn="l">
-              <a:lnSpc>
-                <a:spcPct val="128000"/>
-              </a:lnSpc>
-              <a:spcAft>
-                <a:spcPts val="100"/>
-              </a:spcAft>
-              <a:defRPr sz="1300" b="0">
-                <a:solidFill>
-                  <a:srgbClr val="15171C"/>
-                </a:solidFill>
-                <a:latin typeface="Menlo"/>
-              </a:defRPr>
-            </a:pPr>
-            <a:r>
-              <a:t>laplacian = np.abs(cv2.Laplacian(image, cv2.CV_64F))</a:t>
-            </a:r>
-          </a:p>
-        </p:txBody>
-      </p:sp>
     </p:spTree>
   </p:cSld>
   <p:clrMapOvr>
@@ -8624,8 +8640,8 @@
 </p:sld>
 </file>
 
-<file path=ppt/slides/slide6.xml><?xml version="1.0" encoding="utf-8"?>
-<p:sld xmlns:a="http://schemas.openxmlformats.org/drawingml/2006/main" xmlns:p="http://schemas.openxmlformats.org/presentationml/2006/main" xmlns:r="http://schemas.openxmlformats.org/officeDocument/2006/relationships">
+<file path=ppt/slides/slide7.xml><?xml version="1.0" encoding="utf-8"?>
+<p:sld xmlns:a="http://schemas.openxmlformats.org/drawingml/2006/main" xmlns:r="http://schemas.openxmlformats.org/officeDocument/2006/relationships" xmlns:p="http://schemas.openxmlformats.org/presentationml/2006/main">
   <p:cSld>
     <p:bg>
       <p:bgPr>
@@ -8641,7 +8657,14 @@
         <p:cNvGrpSpPr/>
         <p:nvPr/>
       </p:nvGrpSpPr>
-      <p:grpSpPr/>
+      <p:grpSpPr>
+        <a:xfrm>
+          <a:off x="0" y="0"/>
+          <a:ext cx="0" cy="0"/>
+          <a:chOff x="0" y="0"/>
+          <a:chExt cx="0" cy="0"/>
+        </a:xfrm>
+      </p:grpSpPr>
       <p:sp>
         <p:nvSpPr>
           <p:cNvPr id="2" name="TextBox 1"/>
@@ -8659,7 +8682,7 @@
           <a:noFill/>
         </p:spPr>
         <p:txBody>
-          <a:bodyPr wrap="square" lIns="0" rIns="0" tIns="0" bIns="0" anchor="t">
+          <a:bodyPr wrap="square" lIns="0" tIns="0" rIns="0" bIns="0" anchor="t">
             <a:spAutoFit/>
           </a:bodyPr>
           <a:lstStyle/>
@@ -8680,7 +8703,7 @@
             </a:pPr>
             <a:r>
               <a:rPr spc="140"/>
-              <a:t>ПУНКТ 02</a:t>
+              <a:t>ПУНКТ 05</a:t>
             </a:r>
           </a:p>
         </p:txBody>
@@ -8702,7 +8725,7 @@
           <a:noFill/>
         </p:spPr>
         <p:txBody>
-          <a:bodyPr wrap="square" lIns="0" rIns="0" tIns="0" bIns="0" anchor="t">
+          <a:bodyPr wrap="square" lIns="0" tIns="0" rIns="0" bIns="0" anchor="t">
             <a:spAutoFit/>
           </a:bodyPr>
           <a:lstStyle/>
@@ -8722,7 +8745,7 @@
               </a:defRPr>
             </a:pPr>
             <a:r>
-              <a:t>Профили после Лапласа</a:t>
+              <a:t>Бинаризация методом Отсу</a:t>
             </a:r>
           </a:p>
         </p:txBody>
@@ -8744,7 +8767,7 @@
           <a:noFill/>
         </p:spPr>
         <p:txBody>
-          <a:bodyPr wrap="square" lIns="0" rIns="0" tIns="0" bIns="0" anchor="t">
+          <a:bodyPr wrap="square" lIns="0" tIns="0" rIns="0" bIns="0" anchor="t">
             <a:spAutoFit/>
           </a:bodyPr>
           <a:lstStyle/>
@@ -8764,7 +8787,7 @@
               </a:defRPr>
             </a:pPr>
             <a:r>
-              <a:t>Где в среднем сосредоточены перепады яркости</a:t>
+              <a:t>Порог подбирается по межклассовой дисперсии</a:t>
             </a:r>
           </a:p>
         </p:txBody>
@@ -8786,7 +8809,7 @@
           <a:noFill/>
         </p:spPr>
         <p:txBody>
-          <a:bodyPr wrap="square" lIns="0" rIns="0" tIns="0" bIns="0" anchor="t">
+          <a:bodyPr wrap="square" lIns="0" tIns="0" rIns="0" bIns="0" anchor="t">
             <a:spAutoFit/>
           </a:bodyPr>
           <a:lstStyle/>
@@ -8828,7 +8851,7 @@
           <a:noFill/>
         </p:spPr>
         <p:txBody>
-          <a:bodyPr wrap="square" lIns="0" rIns="0" tIns="0" bIns="0" anchor="t">
+          <a:bodyPr wrap="square" lIns="0" tIns="0" rIns="0" bIns="0" anchor="t">
             <a:spAutoFit/>
           </a:bodyPr>
           <a:lstStyle/>
@@ -8848,14 +8871,14 @@
               </a:defRPr>
             </a:pPr>
             <a:r>
-              <a:t>06</a:t>
+              <a:t>08</a:t>
             </a:r>
           </a:p>
         </p:txBody>
       </p:sp>
       <p:pic>
         <p:nvPicPr>
-          <p:cNvPr id="7" name="Picture 6" descr="lap_profiles.png"/>
+          <p:cNvPr id="7" name="Picture 6" descr="binary.png"/>
           <p:cNvPicPr>
             <a:picLocks noChangeAspect="1"/>
           </p:cNvPicPr>
@@ -8870,7 +8893,7 @@
         <p:spPr>
           <a:xfrm>
             <a:off x="822960" y="1965960"/>
-            <a:ext cx="10543032" cy="2788920"/>
+            <a:ext cx="7360920" cy="2350008"/>
           </a:xfrm>
           <a:prstGeom prst="rect">
             <a:avLst/>
@@ -8892,12 +8915,12 @@
         </p:nvSpPr>
         <p:spPr>
           <a:xfrm>
-            <a:off x="822960" y="5029200"/>
-            <a:ext cx="5152644" cy="969264"/>
+            <a:off x="8366760" y="1965960"/>
+            <a:ext cx="2999232" cy="923544"/>
           </a:xfrm>
           <a:prstGeom prst="roundRect">
             <a:avLst>
-              <a:gd name="adj" fmla="val 13207"/>
+              <a:gd name="adj" fmla="val 13861"/>
             </a:avLst>
           </a:prstGeom>
           <a:solidFill>
@@ -8909,10 +8932,11 @@
           <a:effectLst/>
         </p:spPr>
         <p:txBody>
-          <a:bodyPr rtlCol="0" anchor="ctr" wrap="square"/>
+          <a:bodyPr wrap="square" rtlCol="0" anchor="ctr"/>
           <a:lstStyle/>
           <a:p>
             <a:pPr algn="ctr"/>
+            <a:endParaRPr/>
           </a:p>
         </p:txBody>
       </p:sp>
@@ -8924,16 +8948,16 @@
         </p:nvSpPr>
         <p:spPr>
           <a:xfrm>
-            <a:off x="1078992" y="5221224"/>
-            <a:ext cx="4640579" cy="365760"/>
-          </a:xfrm>
-          <a:prstGeom prst="rect">
-            <a:avLst/>
-          </a:prstGeom>
-          <a:noFill/>
-        </p:spPr>
-        <p:txBody>
-          <a:bodyPr wrap="square" lIns="0" rIns="0" tIns="0" bIns="0" anchor="t">
+            <a:off x="8622792" y="2135124"/>
+            <a:ext cx="2487168" cy="365760"/>
+          </a:xfrm>
+          <a:prstGeom prst="rect">
+            <a:avLst/>
+          </a:prstGeom>
+          <a:noFill/>
+        </p:spPr>
+        <p:txBody>
+          <a:bodyPr wrap="square" lIns="0" tIns="0" rIns="0" bIns="0" anchor="t">
             <a:spAutoFit/>
           </a:bodyPr>
           <a:lstStyle/>
@@ -8953,7 +8977,7 @@
               </a:defRPr>
             </a:pPr>
             <a:r>
-              <a:t>строка 562</a:t>
+              <a:t>141</a:t>
             </a:r>
           </a:p>
         </p:txBody>
@@ -8966,16 +8990,16 @@
         </p:nvSpPr>
         <p:spPr>
           <a:xfrm>
-            <a:off x="1078992" y="5623560"/>
-            <a:ext cx="4640579" cy="274320"/>
-          </a:xfrm>
-          <a:prstGeom prst="rect">
-            <a:avLst/>
-          </a:prstGeom>
-          <a:noFill/>
-        </p:spPr>
-        <p:txBody>
-          <a:bodyPr wrap="square" lIns="0" rIns="0" tIns="0" bIns="0" anchor="t">
+            <a:off x="8622792" y="2537460"/>
+            <a:ext cx="2487168" cy="274320"/>
+          </a:xfrm>
+          <a:prstGeom prst="rect">
+            <a:avLst/>
+          </a:prstGeom>
+          <a:noFill/>
+        </p:spPr>
+        <p:txBody>
+          <a:bodyPr wrap="square" lIns="0" tIns="0" rIns="0" bIns="0" anchor="t">
             <a:spAutoFit/>
           </a:bodyPr>
           <a:lstStyle/>
@@ -8995,7 +9019,7 @@
               </a:defRPr>
             </a:pPr>
             <a:r>
-              <a:t>максимум профиля: 230.83</a:t>
+              <a:t>порог Отсу</a:t>
             </a:r>
           </a:p>
         </p:txBody>
@@ -9008,12 +9032,12 @@
         </p:nvSpPr>
         <p:spPr>
           <a:xfrm>
-            <a:off x="6213348" y="5029200"/>
-            <a:ext cx="5152644" cy="969264"/>
+            <a:off x="8366760" y="3127248"/>
+            <a:ext cx="2999232" cy="923544"/>
           </a:xfrm>
           <a:prstGeom prst="roundRect">
             <a:avLst>
-              <a:gd name="adj" fmla="val 13207"/>
+              <a:gd name="adj" fmla="val 13861"/>
             </a:avLst>
           </a:prstGeom>
           <a:solidFill>
@@ -9025,10 +9049,11 @@
           <a:effectLst/>
         </p:spPr>
         <p:txBody>
-          <a:bodyPr rtlCol="0" anchor="ctr" wrap="square"/>
+          <a:bodyPr wrap="square" rtlCol="0" anchor="ctr"/>
           <a:lstStyle/>
           <a:p>
             <a:pPr algn="ctr"/>
+            <a:endParaRPr/>
           </a:p>
         </p:txBody>
       </p:sp>
@@ -9040,16 +9065,16 @@
         </p:nvSpPr>
         <p:spPr>
           <a:xfrm>
-            <a:off x="6469380" y="5221224"/>
-            <a:ext cx="4640579" cy="365760"/>
-          </a:xfrm>
-          <a:prstGeom prst="rect">
-            <a:avLst/>
-          </a:prstGeom>
-          <a:noFill/>
-        </p:spPr>
-        <p:txBody>
-          <a:bodyPr wrap="square" lIns="0" rIns="0" tIns="0" bIns="0" anchor="t">
+            <a:off x="8622792" y="3296412"/>
+            <a:ext cx="2487168" cy="365760"/>
+          </a:xfrm>
+          <a:prstGeom prst="rect">
+            <a:avLst/>
+          </a:prstGeom>
+          <a:noFill/>
+        </p:spPr>
+        <p:txBody>
+          <a:bodyPr wrap="square" lIns="0" tIns="0" rIns="0" bIns="0" anchor="t">
             <a:spAutoFit/>
           </a:bodyPr>
           <a:lstStyle/>
@@ -9069,7 +9094,7 @@
               </a:defRPr>
             </a:pPr>
             <a:r>
-              <a:t>столбец 535</a:t>
+              <a:t>85.04 %</a:t>
             </a:r>
           </a:p>
         </p:txBody>
@@ -9082,16 +9107,16 @@
         </p:nvSpPr>
         <p:spPr>
           <a:xfrm>
-            <a:off x="6469380" y="5623560"/>
-            <a:ext cx="4640579" cy="274320"/>
-          </a:xfrm>
-          <a:prstGeom prst="rect">
-            <a:avLst/>
-          </a:prstGeom>
-          <a:noFill/>
-        </p:spPr>
-        <p:txBody>
-          <a:bodyPr wrap="square" lIns="0" rIns="0" tIns="0" bIns="0" anchor="t">
+            <a:off x="8622792" y="3698748"/>
+            <a:ext cx="2487168" cy="274320"/>
+          </a:xfrm>
+          <a:prstGeom prst="rect">
+            <a:avLst/>
+          </a:prstGeom>
+          <a:noFill/>
+        </p:spPr>
+        <p:txBody>
+          <a:bodyPr wrap="square" lIns="0" tIns="0" rIns="0" bIns="0" anchor="t">
             <a:spAutoFit/>
           </a:bodyPr>
           <a:lstStyle/>
@@ -9111,7 +9136,251 @@
               </a:defRPr>
             </a:pPr>
             <a:r>
-              <a:t>максимум профиля: 57.45</a:t>
+              <a:t>белых пикселей</a:t>
+            </a:r>
+          </a:p>
+        </p:txBody>
+      </p:sp>
+      <p:sp>
+        <p:nvSpPr>
+          <p:cNvPr id="14" name="Rounded Rectangle 13"/>
+          <p:cNvSpPr/>
+          <p:nvPr/>
+        </p:nvSpPr>
+        <p:spPr>
+          <a:xfrm>
+            <a:off x="8366760" y="4288536"/>
+            <a:ext cx="2999232" cy="923544"/>
+          </a:xfrm>
+          <a:prstGeom prst="roundRect">
+            <a:avLst>
+              <a:gd name="adj" fmla="val 13861"/>
+            </a:avLst>
+          </a:prstGeom>
+          <a:solidFill>
+            <a:srgbClr val="F3F6FC"/>
+          </a:solidFill>
+          <a:ln>
+            <a:noFill/>
+          </a:ln>
+          <a:effectLst/>
+        </p:spPr>
+        <p:txBody>
+          <a:bodyPr wrap="square" rtlCol="0" anchor="ctr"/>
+          <a:lstStyle/>
+          <a:p>
+            <a:pPr algn="ctr"/>
+            <a:endParaRPr/>
+          </a:p>
+        </p:txBody>
+      </p:sp>
+      <p:sp>
+        <p:nvSpPr>
+          <p:cNvPr id="15" name="TextBox 14"/>
+          <p:cNvSpPr txBox="1"/>
+          <p:nvPr/>
+        </p:nvSpPr>
+        <p:spPr>
+          <a:xfrm>
+            <a:off x="8622792" y="4457699"/>
+            <a:ext cx="2487168" cy="365760"/>
+          </a:xfrm>
+          <a:prstGeom prst="rect">
+            <a:avLst/>
+          </a:prstGeom>
+          <a:noFill/>
+        </p:spPr>
+        <p:txBody>
+          <a:bodyPr wrap="square" lIns="0" tIns="0" rIns="0" bIns="0" anchor="t">
+            <a:spAutoFit/>
+          </a:bodyPr>
+          <a:lstStyle/>
+          <a:p>
+            <a:pPr algn="l">
+              <a:lnSpc>
+                <a:spcPct val="100000"/>
+              </a:lnSpc>
+              <a:spcAft>
+                <a:spcPts val="0"/>
+              </a:spcAft>
+              <a:defRPr sz="2500" b="1">
+                <a:solidFill>
+                  <a:srgbClr val="0B57D0"/>
+                </a:solidFill>
+                <a:latin typeface="Helvetica Neue"/>
+              </a:defRPr>
+            </a:pPr>
+            <a:r>
+              <a:t>0 и 255</a:t>
+            </a:r>
+          </a:p>
+        </p:txBody>
+      </p:sp>
+      <p:sp>
+        <p:nvSpPr>
+          <p:cNvPr id="16" name="TextBox 15"/>
+          <p:cNvSpPr txBox="1"/>
+          <p:nvPr/>
+        </p:nvSpPr>
+        <p:spPr>
+          <a:xfrm>
+            <a:off x="8622792" y="4860036"/>
+            <a:ext cx="2487168" cy="274320"/>
+          </a:xfrm>
+          <a:prstGeom prst="rect">
+            <a:avLst/>
+          </a:prstGeom>
+          <a:noFill/>
+        </p:spPr>
+        <p:txBody>
+          <a:bodyPr wrap="square" lIns="0" tIns="0" rIns="0" bIns="0" anchor="t">
+            <a:spAutoFit/>
+          </a:bodyPr>
+          <a:lstStyle/>
+          <a:p>
+            <a:pPr algn="l">
+              <a:lnSpc>
+                <a:spcPct val="118000"/>
+              </a:lnSpc>
+              <a:spcAft>
+                <a:spcPts val="0"/>
+              </a:spcAft>
+              <a:defRPr sz="1000" b="0">
+                <a:solidFill>
+                  <a:srgbClr val="5B6070"/>
+                </a:solidFill>
+                <a:latin typeface="Helvetica Neue"/>
+              </a:defRPr>
+            </a:pPr>
+            <a:r>
+              <a:t>все значения после порога</a:t>
+            </a:r>
+          </a:p>
+        </p:txBody>
+      </p:sp>
+      <p:sp>
+        <p:nvSpPr>
+          <p:cNvPr id="17" name="Rounded Rectangle 16"/>
+          <p:cNvSpPr/>
+          <p:nvPr/>
+        </p:nvSpPr>
+        <p:spPr>
+          <a:xfrm>
+            <a:off x="822960" y="4700016"/>
+            <a:ext cx="7360920" cy="995375"/>
+          </a:xfrm>
+          <a:prstGeom prst="roundRect">
+            <a:avLst>
+              <a:gd name="adj" fmla="val 12861"/>
+            </a:avLst>
+          </a:prstGeom>
+          <a:solidFill>
+            <a:srgbClr val="F3F6FC"/>
+          </a:solidFill>
+          <a:ln>
+            <a:noFill/>
+          </a:ln>
+          <a:effectLst/>
+        </p:spPr>
+        <p:txBody>
+          <a:bodyPr wrap="square" rtlCol="0" anchor="ctr"/>
+          <a:lstStyle/>
+          <a:p>
+            <a:pPr algn="ctr"/>
+            <a:endParaRPr/>
+          </a:p>
+        </p:txBody>
+      </p:sp>
+      <p:sp>
+        <p:nvSpPr>
+          <p:cNvPr id="18" name="Rounded Rectangle 17"/>
+          <p:cNvSpPr/>
+          <p:nvPr/>
+        </p:nvSpPr>
+        <p:spPr>
+          <a:xfrm>
+            <a:off x="822960" y="4919472"/>
+            <a:ext cx="50292" cy="556463"/>
+          </a:xfrm>
+          <a:prstGeom prst="roundRect">
+            <a:avLst>
+              <a:gd name="adj" fmla="val 50000"/>
+            </a:avLst>
+          </a:prstGeom>
+          <a:solidFill>
+            <a:srgbClr val="0B57D0"/>
+          </a:solidFill>
+          <a:ln>
+            <a:noFill/>
+          </a:ln>
+          <a:effectLst/>
+        </p:spPr>
+        <p:txBody>
+          <a:bodyPr wrap="square" rtlCol="0" anchor="ctr"/>
+          <a:lstStyle/>
+          <a:p>
+            <a:pPr algn="ctr"/>
+            <a:endParaRPr/>
+          </a:p>
+        </p:txBody>
+      </p:sp>
+      <p:sp>
+        <p:nvSpPr>
+          <p:cNvPr id="19" name="TextBox 18"/>
+          <p:cNvSpPr txBox="1"/>
+          <p:nvPr/>
+        </p:nvSpPr>
+        <p:spPr>
+          <a:xfrm>
+            <a:off x="1207008" y="4937759"/>
+            <a:ext cx="6702552" cy="519887"/>
+          </a:xfrm>
+          <a:prstGeom prst="rect">
+            <a:avLst/>
+          </a:prstGeom>
+          <a:noFill/>
+        </p:spPr>
+        <p:txBody>
+          <a:bodyPr wrap="square" lIns="0" tIns="0" rIns="0" bIns="0" anchor="t">
+            <a:spAutoFit/>
+          </a:bodyPr>
+          <a:lstStyle/>
+          <a:p>
+            <a:pPr algn="l">
+              <a:lnSpc>
+                <a:spcPct val="128000"/>
+              </a:lnSpc>
+              <a:spcAft>
+                <a:spcPts val="100"/>
+              </a:spcAft>
+              <a:defRPr sz="1300" b="0">
+                <a:solidFill>
+                  <a:srgbClr val="15171C"/>
+                </a:solidFill>
+                <a:latin typeface="Menlo"/>
+              </a:defRPr>
+            </a:pPr>
+            <a:r>
+              <a:t>otsu, binary = cv2.threshold(</a:t>
+            </a:r>
+          </a:p>
+          <a:p>
+            <a:pPr algn="l">
+              <a:lnSpc>
+                <a:spcPct val="128000"/>
+              </a:lnSpc>
+              <a:spcAft>
+                <a:spcPts val="100"/>
+              </a:spcAft>
+              <a:defRPr sz="1300" b="0">
+                <a:solidFill>
+                  <a:srgbClr val="15171C"/>
+                </a:solidFill>
+                <a:latin typeface="Menlo"/>
+              </a:defRPr>
+            </a:pPr>
+            <a:r>
+              <a:t>    image, 0, 255, cv2.THRESH_BINARY + cv2.THRESH_OTSU)</a:t>
             </a:r>
           </a:p>
         </p:txBody>
@@ -9124,8 +9393,8 @@
 </p:sld>
 </file>
 
-<file path=ppt/slides/slide7.xml><?xml version="1.0" encoding="utf-8"?>
-<p:sld xmlns:a="http://schemas.openxmlformats.org/drawingml/2006/main" xmlns:p="http://schemas.openxmlformats.org/presentationml/2006/main" xmlns:r="http://schemas.openxmlformats.org/officeDocument/2006/relationships">
+<file path=ppt/slides/slide8.xml><?xml version="1.0" encoding="utf-8"?>
+<p:sld xmlns:a="http://schemas.openxmlformats.org/drawingml/2006/main" xmlns:r="http://schemas.openxmlformats.org/officeDocument/2006/relationships" xmlns:p="http://schemas.openxmlformats.org/presentationml/2006/main">
   <p:cSld>
     <p:bg>
       <p:bgPr>
@@ -9141,7 +9410,14 @@
         <p:cNvGrpSpPr/>
         <p:nvPr/>
       </p:nvGrpSpPr>
-      <p:grpSpPr/>
+      <p:grpSpPr>
+        <a:xfrm>
+          <a:off x="0" y="0"/>
+          <a:ext cx="0" cy="0"/>
+          <a:chOff x="0" y="0"/>
+          <a:chExt cx="0" cy="0"/>
+        </a:xfrm>
+      </p:grpSpPr>
       <p:sp>
         <p:nvSpPr>
           <p:cNvPr id="2" name="TextBox 1"/>
@@ -9159,7 +9435,7 @@
           <a:noFill/>
         </p:spPr>
         <p:txBody>
-          <a:bodyPr wrap="square" lIns="0" rIns="0" tIns="0" bIns="0" anchor="t">
+          <a:bodyPr wrap="square" lIns="0" tIns="0" rIns="0" bIns="0" anchor="t">
             <a:spAutoFit/>
           </a:bodyPr>
           <a:lstStyle/>
@@ -9180,7 +9456,7 @@
             </a:pPr>
             <a:r>
               <a:rPr spc="140"/>
-              <a:t>ПУНКТЫ 03–04</a:t>
+              <a:t>ПУНКТ 05</a:t>
             </a:r>
           </a:p>
         </p:txBody>
@@ -9202,7 +9478,7 @@
           <a:noFill/>
         </p:spPr>
         <p:txBody>
-          <a:bodyPr wrap="square" lIns="0" rIns="0" tIns="0" bIns="0" anchor="t">
+          <a:bodyPr wrap="square" lIns="0" tIns="0" rIns="0" bIns="0" anchor="t">
             <a:spAutoFit/>
           </a:bodyPr>
           <a:lstStyle/>
@@ -9222,7 +9498,7 @@
               </a:defRPr>
             </a:pPr>
             <a:r>
-              <a:t>Проекции исходного кадра</a:t>
+              <a:t>Проекции бинарного кадра</a:t>
             </a:r>
           </a:p>
         </p:txBody>
@@ -9244,7 +9520,7 @@
           <a:noFill/>
         </p:spPr>
         <p:txBody>
-          <a:bodyPr wrap="square" lIns="0" rIns="0" tIns="0" bIns="0" anchor="t">
+          <a:bodyPr wrap="square" lIns="0" tIns="0" rIns="0" bIns="0" anchor="t">
             <a:spAutoFit/>
           </a:bodyPr>
           <a:lstStyle/>
@@ -9264,7 +9540,7 @@
               </a:defRPr>
             </a:pPr>
             <a:r>
-              <a:t>Сумма яркостей вдоль строки и вдоль столбца</a:t>
+              <a:t>Теперь проекция пропорциональна числу белых пикселей</a:t>
             </a:r>
           </a:p>
         </p:txBody>
@@ -9286,7 +9562,7 @@
           <a:noFill/>
         </p:spPr>
         <p:txBody>
-          <a:bodyPr wrap="square" lIns="0" rIns="0" tIns="0" bIns="0" anchor="t">
+          <a:bodyPr wrap="square" lIns="0" tIns="0" rIns="0" bIns="0" anchor="t">
             <a:spAutoFit/>
           </a:bodyPr>
           <a:lstStyle/>
@@ -9328,7 +9604,7 @@
           <a:noFill/>
         </p:spPr>
         <p:txBody>
-          <a:bodyPr wrap="square" lIns="0" rIns="0" tIns="0" bIns="0" anchor="t">
+          <a:bodyPr wrap="square" lIns="0" tIns="0" rIns="0" bIns="0" anchor="t">
             <a:spAutoFit/>
           </a:bodyPr>
           <a:lstStyle/>
@@ -9348,14 +9624,20 @@
               </a:defRPr>
             </a:pPr>
             <a:r>
-              <a:t>07</a:t>
+              <a:t>09</a:t>
             </a:r>
           </a:p>
         </p:txBody>
       </p:sp>
       <p:pic>
         <p:nvPicPr>
-          <p:cNvPr id="7" name="Picture 6" descr="projections.png"/>
+          <p:cNvPr id="16" name="Picture 15">
+            <a:extLst>
+              <a:ext uri="{FF2B5EF4-FFF2-40B4-BE49-F238E27FC236}">
+                <a16:creationId xmlns:a16="http://schemas.microsoft.com/office/drawing/2014/main" id="{4EB4DB09-FCDC-319E-F48D-502E68468CA6}"/>
+              </a:ext>
+            </a:extLst>
+          </p:cNvPr>
           <p:cNvPicPr>
             <a:picLocks noChangeAspect="1"/>
           </p:cNvPicPr>
@@ -9369,295 +9651,14 @@
         </p:blipFill>
         <p:spPr>
           <a:xfrm>
-            <a:off x="822960" y="1874519"/>
-            <a:ext cx="10543032" cy="2788920"/>
-          </a:xfrm>
-          <a:prstGeom prst="rect">
-            <a:avLst/>
-          </a:prstGeom>
-          <a:effectLst>
-            <a:outerShdw blurRad="114300" dist="25400" dir="5400000" rotWithShape="0">
-              <a:srgbClr val="1B2A44">
-                <a:alpha val="8000"/>
-              </a:srgbClr>
-            </a:outerShdw>
-          </a:effectLst>
+            <a:off x="1739012" y="1609344"/>
+            <a:ext cx="8715323" cy="4617819"/>
+          </a:xfrm>
+          <a:prstGeom prst="rect">
+            <a:avLst/>
+          </a:prstGeom>
         </p:spPr>
       </p:pic>
-      <p:sp>
-        <p:nvSpPr>
-          <p:cNvPr id="8" name="Rounded Rectangle 7"/>
-          <p:cNvSpPr/>
-          <p:nvPr/>
-        </p:nvSpPr>
-        <p:spPr>
-          <a:xfrm>
-            <a:off x="822960" y="4919471"/>
-            <a:ext cx="5152644" cy="896112"/>
-          </a:xfrm>
-          <a:prstGeom prst="roundRect">
-            <a:avLst>
-              <a:gd name="adj" fmla="val 14285"/>
-            </a:avLst>
-          </a:prstGeom>
-          <a:solidFill>
-            <a:srgbClr val="F3F6FC"/>
-          </a:solidFill>
-          <a:ln>
-            <a:noFill/>
-          </a:ln>
-          <a:effectLst/>
-        </p:spPr>
-        <p:txBody>
-          <a:bodyPr rtlCol="0" anchor="ctr" wrap="square"/>
-          <a:lstStyle/>
-          <a:p>
-            <a:pPr algn="ctr"/>
-          </a:p>
-        </p:txBody>
-      </p:sp>
-      <p:sp>
-        <p:nvSpPr>
-          <p:cNvPr id="9" name="TextBox 8"/>
-          <p:cNvSpPr txBox="1"/>
-          <p:nvPr/>
-        </p:nvSpPr>
-        <p:spPr>
-          <a:xfrm>
-            <a:off x="1078992" y="5074919"/>
-            <a:ext cx="4640579" cy="365760"/>
-          </a:xfrm>
-          <a:prstGeom prst="rect">
-            <a:avLst/>
-          </a:prstGeom>
-          <a:noFill/>
-        </p:spPr>
-        <p:txBody>
-          <a:bodyPr wrap="square" lIns="0" rIns="0" tIns="0" bIns="0" anchor="t">
-            <a:spAutoFit/>
-          </a:bodyPr>
-          <a:lstStyle/>
-          <a:p>
-            <a:pPr algn="l">
-              <a:lnSpc>
-                <a:spcPct val="100000"/>
-              </a:lnSpc>
-              <a:spcAft>
-                <a:spcPts val="0"/>
-              </a:spcAft>
-              <a:defRPr sz="2500" b="1">
-                <a:solidFill>
-                  <a:srgbClr val="0B57D0"/>
-                </a:solidFill>
-                <a:latin typeface="Helvetica Neue"/>
-              </a:defRPr>
-            </a:pPr>
-            <a:r>
-              <a:t>строка 86</a:t>
-            </a:r>
-          </a:p>
-        </p:txBody>
-      </p:sp>
-      <p:sp>
-        <p:nvSpPr>
-          <p:cNvPr id="10" name="TextBox 9"/>
-          <p:cNvSpPr txBox="1"/>
-          <p:nvPr/>
-        </p:nvSpPr>
-        <p:spPr>
-          <a:xfrm>
-            <a:off x="1078992" y="5477255"/>
-            <a:ext cx="4640579" cy="274320"/>
-          </a:xfrm>
-          <a:prstGeom prst="rect">
-            <a:avLst/>
-          </a:prstGeom>
-          <a:noFill/>
-        </p:spPr>
-        <p:txBody>
-          <a:bodyPr wrap="square" lIns="0" rIns="0" tIns="0" bIns="0" anchor="t">
-            <a:spAutoFit/>
-          </a:bodyPr>
-          <a:lstStyle/>
-          <a:p>
-            <a:pPr algn="l">
-              <a:lnSpc>
-                <a:spcPct val="118000"/>
-              </a:lnSpc>
-              <a:spcAft>
-                <a:spcPts val="0"/>
-              </a:spcAft>
-              <a:defRPr sz="1000" b="0">
-                <a:solidFill>
-                  <a:srgbClr val="5B6070"/>
-                </a:solidFill>
-                <a:latin typeface="Helvetica Neue"/>
-              </a:defRPr>
-            </a:pPr>
-            <a:r>
-              <a:t>HP = 223754</a:t>
-            </a:r>
-          </a:p>
-        </p:txBody>
-      </p:sp>
-      <p:sp>
-        <p:nvSpPr>
-          <p:cNvPr id="11" name="Rounded Rectangle 10"/>
-          <p:cNvSpPr/>
-          <p:nvPr/>
-        </p:nvSpPr>
-        <p:spPr>
-          <a:xfrm>
-            <a:off x="6213348" y="4919471"/>
-            <a:ext cx="5152644" cy="896112"/>
-          </a:xfrm>
-          <a:prstGeom prst="roundRect">
-            <a:avLst>
-              <a:gd name="adj" fmla="val 14285"/>
-            </a:avLst>
-          </a:prstGeom>
-          <a:solidFill>
-            <a:srgbClr val="F3F6FC"/>
-          </a:solidFill>
-          <a:ln>
-            <a:noFill/>
-          </a:ln>
-          <a:effectLst/>
-        </p:spPr>
-        <p:txBody>
-          <a:bodyPr rtlCol="0" anchor="ctr" wrap="square"/>
-          <a:lstStyle/>
-          <a:p>
-            <a:pPr algn="ctr"/>
-          </a:p>
-        </p:txBody>
-      </p:sp>
-      <p:sp>
-        <p:nvSpPr>
-          <p:cNvPr id="12" name="TextBox 11"/>
-          <p:cNvSpPr txBox="1"/>
-          <p:nvPr/>
-        </p:nvSpPr>
-        <p:spPr>
-          <a:xfrm>
-            <a:off x="6469380" y="5074919"/>
-            <a:ext cx="4640579" cy="365760"/>
-          </a:xfrm>
-          <a:prstGeom prst="rect">
-            <a:avLst/>
-          </a:prstGeom>
-          <a:noFill/>
-        </p:spPr>
-        <p:txBody>
-          <a:bodyPr wrap="square" lIns="0" rIns="0" tIns="0" bIns="0" anchor="t">
-            <a:spAutoFit/>
-          </a:bodyPr>
-          <a:lstStyle/>
-          <a:p>
-            <a:pPr algn="l">
-              <a:lnSpc>
-                <a:spcPct val="100000"/>
-              </a:lnSpc>
-              <a:spcAft>
-                <a:spcPts val="0"/>
-              </a:spcAft>
-              <a:defRPr sz="2500" b="1">
-                <a:solidFill>
-                  <a:srgbClr val="0B57D0"/>
-                </a:solidFill>
-                <a:latin typeface="Helvetica Neue"/>
-              </a:defRPr>
-            </a:pPr>
-            <a:r>
-              <a:t>столбец 372</a:t>
-            </a:r>
-          </a:p>
-        </p:txBody>
-      </p:sp>
-      <p:sp>
-        <p:nvSpPr>
-          <p:cNvPr id="13" name="TextBox 12"/>
-          <p:cNvSpPr txBox="1"/>
-          <p:nvPr/>
-        </p:nvSpPr>
-        <p:spPr>
-          <a:xfrm>
-            <a:off x="6469380" y="5477255"/>
-            <a:ext cx="4640579" cy="274320"/>
-          </a:xfrm>
-          <a:prstGeom prst="rect">
-            <a:avLst/>
-          </a:prstGeom>
-          <a:noFill/>
-        </p:spPr>
-        <p:txBody>
-          <a:bodyPr wrap="square" lIns="0" rIns="0" tIns="0" bIns="0" anchor="t">
-            <a:spAutoFit/>
-          </a:bodyPr>
-          <a:lstStyle/>
-          <a:p>
-            <a:pPr algn="l">
-              <a:lnSpc>
-                <a:spcPct val="118000"/>
-              </a:lnSpc>
-              <a:spcAft>
-                <a:spcPts val="0"/>
-              </a:spcAft>
-              <a:defRPr sz="1000" b="0">
-                <a:solidFill>
-                  <a:srgbClr val="5B6070"/>
-                </a:solidFill>
-                <a:latin typeface="Helvetica Neue"/>
-              </a:defRPr>
-            </a:pPr>
-            <a:r>
-              <a:t>VP = 129309</a:t>
-            </a:r>
-          </a:p>
-        </p:txBody>
-      </p:sp>
-      <p:sp>
-        <p:nvSpPr>
-          <p:cNvPr id="14" name="TextBox 13"/>
-          <p:cNvSpPr txBox="1"/>
-          <p:nvPr/>
-        </p:nvSpPr>
-        <p:spPr>
-          <a:xfrm>
-            <a:off x="822960" y="5980175"/>
-            <a:ext cx="10543032" cy="274320"/>
-          </a:xfrm>
-          <a:prstGeom prst="rect">
-            <a:avLst/>
-          </a:prstGeom>
-          <a:noFill/>
-        </p:spPr>
-        <p:txBody>
-          <a:bodyPr wrap="square" lIns="0" rIns="0" tIns="0" bIns="0" anchor="t">
-            <a:spAutoFit/>
-          </a:bodyPr>
-          <a:lstStyle/>
-          <a:p>
-            <a:pPr algn="l">
-              <a:lnSpc>
-                <a:spcPct val="128000"/>
-              </a:lnSpc>
-              <a:spcAft>
-                <a:spcPts val="0"/>
-              </a:spcAft>
-              <a:defRPr sz="1050" b="0">
-                <a:solidFill>
-                  <a:srgbClr val="5B6070"/>
-                </a:solidFill>
-                <a:latin typeface="Helvetica Neue"/>
-              </a:defRPr>
-            </a:pPr>
-            <a:r>
-              <a:t>Проекция отвечает на вопрос, где накоплено больше общей яркости.</a:t>
-            </a:r>
-          </a:p>
-        </p:txBody>
-      </p:sp>
     </p:spTree>
   </p:cSld>
   <p:clrMapOvr>
@@ -9666,8 +9667,8 @@
 </p:sld>
 </file>
 
-<file path=ppt/slides/slide8.xml><?xml version="1.0" encoding="utf-8"?>
-<p:sld xmlns:a="http://schemas.openxmlformats.org/drawingml/2006/main" xmlns:p="http://schemas.openxmlformats.org/presentationml/2006/main" xmlns:r="http://schemas.openxmlformats.org/officeDocument/2006/relationships">
+<file path=ppt/slides/slide9.xml><?xml version="1.0" encoding="utf-8"?>
+<p:sld xmlns:a="http://schemas.openxmlformats.org/drawingml/2006/main" xmlns:r="http://schemas.openxmlformats.org/officeDocument/2006/relationships" xmlns:p="http://schemas.openxmlformats.org/presentationml/2006/main">
   <p:cSld>
     <p:bg>
       <p:bgPr>
@@ -9683,7 +9684,14 @@
         <p:cNvGrpSpPr/>
         <p:nvPr/>
       </p:nvGrpSpPr>
-      <p:grpSpPr/>
+      <p:grpSpPr>
+        <a:xfrm>
+          <a:off x="0" y="0"/>
+          <a:ext cx="0" cy="0"/>
+          <a:chOff x="0" y="0"/>
+          <a:chExt cx="0" cy="0"/>
+        </a:xfrm>
+      </p:grpSpPr>
       <p:sp>
         <p:nvSpPr>
           <p:cNvPr id="2" name="TextBox 1"/>
@@ -9701,7 +9709,7 @@
           <a:noFill/>
         </p:spPr>
         <p:txBody>
-          <a:bodyPr wrap="square" lIns="0" rIns="0" tIns="0" bIns="0" anchor="t">
+          <a:bodyPr wrap="square" lIns="0" tIns="0" rIns="0" bIns="0" anchor="t">
             <a:spAutoFit/>
           </a:bodyPr>
           <a:lstStyle/>
@@ -9722,7 +9730,7 @@
             </a:pPr>
             <a:r>
               <a:rPr spc="140"/>
-              <a:t>ПУНКТ 05</a:t>
+              <a:t>ЗАЩИТА</a:t>
             </a:r>
           </a:p>
         </p:txBody>
@@ -9744,7 +9752,7 @@
           <a:noFill/>
         </p:spPr>
         <p:txBody>
-          <a:bodyPr wrap="square" lIns="0" rIns="0" tIns="0" bIns="0" anchor="t">
+          <a:bodyPr wrap="square" lIns="0" tIns="0" rIns="0" bIns="0" anchor="t">
             <a:spAutoFit/>
           </a:bodyPr>
           <a:lstStyle/>
@@ -9764,7 +9772,7 @@
               </a:defRPr>
             </a:pPr>
             <a:r>
-              <a:t>Бинаризация методом Отсу</a:t>
+              <a:t>Контрольные вопросы</a:t>
             </a:r>
           </a:p>
         </p:txBody>
@@ -9786,7 +9794,7 @@
           <a:noFill/>
         </p:spPr>
         <p:txBody>
-          <a:bodyPr wrap="square" lIns="0" rIns="0" tIns="0" bIns="0" anchor="t">
+          <a:bodyPr wrap="square" lIns="0" tIns="0" rIns="0" bIns="0" anchor="t">
             <a:spAutoFit/>
           </a:bodyPr>
           <a:lstStyle/>
@@ -9806,7 +9814,7 @@
               </a:defRPr>
             </a:pPr>
             <a:r>
-              <a:t>Порог подбирается по межклассовой дисперсии</a:t>
+              <a:t>Часть первая</a:t>
             </a:r>
           </a:p>
         </p:txBody>
@@ -9828,7 +9836,7 @@
           <a:noFill/>
         </p:spPr>
         <p:txBody>
-          <a:bodyPr wrap="square" lIns="0" rIns="0" tIns="0" bIns="0" anchor="t">
+          <a:bodyPr wrap="square" lIns="0" tIns="0" rIns="0" bIns="0" anchor="t">
             <a:spAutoFit/>
           </a:bodyPr>
           <a:lstStyle/>
@@ -9870,7 +9878,7 @@
           <a:noFill/>
         </p:spPr>
         <p:txBody>
-          <a:bodyPr wrap="square" lIns="0" rIns="0" tIns="0" bIns="0" anchor="t">
+          <a:bodyPr wrap="square" lIns="0" tIns="0" rIns="0" bIns="0" anchor="t">
             <a:spAutoFit/>
           </a:bodyPr>
           <a:lstStyle/>
@@ -9890,71 +9898,92 @@
               </a:defRPr>
             </a:pPr>
             <a:r>
-              <a:t>08</a:t>
-            </a:r>
-          </a:p>
-        </p:txBody>
-      </p:sp>
-      <p:pic>
-        <p:nvPicPr>
-          <p:cNvPr id="7" name="Picture 6" descr="binary.png"/>
-          <p:cNvPicPr>
-            <a:picLocks noChangeAspect="1"/>
-          </p:cNvPicPr>
-          <p:nvPr/>
-        </p:nvPicPr>
-        <p:blipFill>
-          <a:blip r:embed="rId2"/>
-          <a:stretch>
-            <a:fillRect/>
-          </a:stretch>
-        </p:blipFill>
-        <p:spPr>
-          <a:xfrm>
-            <a:off x="822960" y="1965960"/>
-            <a:ext cx="7360920" cy="2350008"/>
-          </a:xfrm>
-          <a:prstGeom prst="rect">
-            <a:avLst/>
-          </a:prstGeom>
-          <a:effectLst>
-            <a:outerShdw blurRad="114300" dist="25400" dir="5400000" rotWithShape="0">
-              <a:srgbClr val="1B2A44">
-                <a:alpha val="8000"/>
-              </a:srgbClr>
-            </a:outerShdw>
-          </a:effectLst>
-        </p:spPr>
-      </p:pic>
-      <p:sp>
-        <p:nvSpPr>
-          <p:cNvPr id="8" name="Rounded Rectangle 7"/>
-          <p:cNvSpPr/>
-          <p:nvPr/>
-        </p:nvSpPr>
-        <p:spPr>
-          <a:xfrm>
-            <a:off x="8366760" y="1965960"/>
-            <a:ext cx="2999232" cy="923544"/>
-          </a:xfrm>
-          <a:prstGeom prst="roundRect">
-            <a:avLst>
-              <a:gd name="adj" fmla="val 13861"/>
-            </a:avLst>
-          </a:prstGeom>
-          <a:solidFill>
-            <a:srgbClr val="F3F6FC"/>
-          </a:solidFill>
-          <a:ln>
-            <a:noFill/>
-          </a:ln>
-          <a:effectLst/>
-        </p:spPr>
-        <p:txBody>
-          <a:bodyPr rtlCol="0" anchor="ctr" wrap="square"/>
-          <a:lstStyle/>
-          <a:p>
-            <a:pPr algn="ctr"/>
+              <a:t>10</a:t>
+            </a:r>
+          </a:p>
+        </p:txBody>
+      </p:sp>
+      <p:sp>
+        <p:nvSpPr>
+          <p:cNvPr id="7" name="TextBox 6"/>
+          <p:cNvSpPr txBox="1"/>
+          <p:nvPr/>
+        </p:nvSpPr>
+        <p:spPr>
+          <a:xfrm>
+            <a:off x="822960" y="2011680"/>
+            <a:ext cx="5042916" cy="227837"/>
+          </a:xfrm>
+          <a:prstGeom prst="rect">
+            <a:avLst/>
+          </a:prstGeom>
+          <a:noFill/>
+        </p:spPr>
+        <p:txBody>
+          <a:bodyPr wrap="square" lIns="0" tIns="0" rIns="0" bIns="0" anchor="t">
+            <a:spAutoFit/>
+          </a:bodyPr>
+          <a:lstStyle/>
+          <a:p>
+            <a:pPr algn="l">
+              <a:lnSpc>
+                <a:spcPct val="115000"/>
+              </a:lnSpc>
+              <a:spcAft>
+                <a:spcPts val="0"/>
+              </a:spcAft>
+              <a:defRPr sz="1300" b="1">
+                <a:solidFill>
+                  <a:srgbClr val="15171C"/>
+                </a:solidFill>
+                <a:latin typeface="Helvetica Neue"/>
+              </a:defRPr>
+            </a:pPr>
+            <a:r>
+              <a:t>Что такое гистограмма и зачем она нужна?</a:t>
+            </a:r>
+          </a:p>
+        </p:txBody>
+      </p:sp>
+      <p:sp>
+        <p:nvSpPr>
+          <p:cNvPr id="8" name="TextBox 7"/>
+          <p:cNvSpPr txBox="1"/>
+          <p:nvPr/>
+        </p:nvSpPr>
+        <p:spPr>
+          <a:xfrm>
+            <a:off x="822960" y="2303526"/>
+            <a:ext cx="5042916" cy="991361"/>
+          </a:xfrm>
+          <a:prstGeom prst="rect">
+            <a:avLst/>
+          </a:prstGeom>
+          <a:noFill/>
+        </p:spPr>
+        <p:txBody>
+          <a:bodyPr wrap="square" lIns="0" tIns="0" rIns="0" bIns="0" anchor="t">
+            <a:spAutoFit/>
+          </a:bodyPr>
+          <a:lstStyle/>
+          <a:p>
+            <a:pPr algn="l">
+              <a:lnSpc>
+                <a:spcPct val="122000"/>
+              </a:lnSpc>
+              <a:spcAft>
+                <a:spcPts val="0"/>
+              </a:spcAft>
+              <a:defRPr sz="1250" b="0">
+                <a:solidFill>
+                  <a:srgbClr val="5B6070"/>
+                </a:solidFill>
+                <a:latin typeface="Helvetica Neue"/>
+              </a:defRPr>
+            </a:pPr>
+            <a:r>
+              <a:t>Распределение количества пикселей по уровням яркости. Нужна для анализа тонов, контраста и выбора порога сегментации.</a:t>
+            </a:r>
           </a:p>
         </p:txBody>
       </p:sp>
@@ -9966,36 +9995,36 @@
         </p:nvSpPr>
         <p:spPr>
           <a:xfrm>
-            <a:off x="8622792" y="2135124"/>
-            <a:ext cx="2487168" cy="365760"/>
-          </a:xfrm>
-          <a:prstGeom prst="rect">
-            <a:avLst/>
-          </a:prstGeom>
-          <a:noFill/>
-        </p:spPr>
-        <p:txBody>
-          <a:bodyPr wrap="square" lIns="0" rIns="0" tIns="0" bIns="0" anchor="t">
-            <a:spAutoFit/>
-          </a:bodyPr>
-          <a:lstStyle/>
-          <a:p>
-            <a:pPr algn="l">
-              <a:lnSpc>
-                <a:spcPct val="100000"/>
-              </a:lnSpc>
-              <a:spcAft>
-                <a:spcPts val="0"/>
-              </a:spcAft>
-              <a:defRPr sz="2500" b="1">
-                <a:solidFill>
-                  <a:srgbClr val="0B57D0"/>
-                </a:solidFill>
-                <a:latin typeface="Helvetica Neue"/>
-              </a:defRPr>
-            </a:pPr>
-            <a:r>
-              <a:t>141</a:t>
+            <a:off x="822960" y="3322320"/>
+            <a:ext cx="5042916" cy="227837"/>
+          </a:xfrm>
+          <a:prstGeom prst="rect">
+            <a:avLst/>
+          </a:prstGeom>
+          <a:noFill/>
+        </p:spPr>
+        <p:txBody>
+          <a:bodyPr wrap="square" lIns="0" tIns="0" rIns="0" bIns="0" anchor="t">
+            <a:spAutoFit/>
+          </a:bodyPr>
+          <a:lstStyle/>
+          <a:p>
+            <a:pPr algn="l">
+              <a:lnSpc>
+                <a:spcPct val="115000"/>
+              </a:lnSpc>
+              <a:spcAft>
+                <a:spcPts val="0"/>
+              </a:spcAft>
+              <a:defRPr sz="1300" b="1">
+                <a:solidFill>
+                  <a:srgbClr val="15171C"/>
+                </a:solidFill>
+                <a:latin typeface="Helvetica Neue"/>
+              </a:defRPr>
+            </a:pPr>
+            <a:r>
+              <a:t>Чем гистограмма цветного кадра отличается от серого?</a:t>
             </a:r>
           </a:p>
         </p:txBody>
@@ -10008,28 +10037,28 @@
         </p:nvSpPr>
         <p:spPr>
           <a:xfrm>
-            <a:off x="8622792" y="2537460"/>
-            <a:ext cx="2487168" cy="274320"/>
-          </a:xfrm>
-          <a:prstGeom prst="rect">
-            <a:avLst/>
-          </a:prstGeom>
-          <a:noFill/>
-        </p:spPr>
-        <p:txBody>
-          <a:bodyPr wrap="square" lIns="0" rIns="0" tIns="0" bIns="0" anchor="t">
-            <a:spAutoFit/>
-          </a:bodyPr>
-          <a:lstStyle/>
-          <a:p>
-            <a:pPr algn="l">
-              <a:lnSpc>
-                <a:spcPct val="118000"/>
-              </a:lnSpc>
-              <a:spcAft>
-                <a:spcPts val="0"/>
-              </a:spcAft>
-              <a:defRPr sz="1000" b="0">
+            <a:off x="822960" y="3614166"/>
+            <a:ext cx="5042916" cy="991361"/>
+          </a:xfrm>
+          <a:prstGeom prst="rect">
+            <a:avLst/>
+          </a:prstGeom>
+          <a:noFill/>
+        </p:spPr>
+        <p:txBody>
+          <a:bodyPr wrap="square" lIns="0" tIns="0" rIns="0" bIns="0" anchor="t">
+            <a:spAutoFit/>
+          </a:bodyPr>
+          <a:lstStyle/>
+          <a:p>
+            <a:pPr algn="l">
+              <a:lnSpc>
+                <a:spcPct val="122000"/>
+              </a:lnSpc>
+              <a:spcAft>
+                <a:spcPts val="0"/>
+              </a:spcAft>
+              <a:defRPr sz="1250" b="0">
                 <a:solidFill>
                   <a:srgbClr val="5B6070"/>
                 </a:solidFill>
@@ -10037,40 +10066,50 @@
               </a:defRPr>
             </a:pPr>
             <a:r>
-              <a:t>порог Отсу</a:t>
-            </a:r>
-          </a:p>
-        </p:txBody>
-      </p:sp>
-      <p:sp>
-        <p:nvSpPr>
-          <p:cNvPr id="11" name="Rounded Rectangle 10"/>
-          <p:cNvSpPr/>
-          <p:nvPr/>
-        </p:nvSpPr>
-        <p:spPr>
-          <a:xfrm>
-            <a:off x="8366760" y="3127248"/>
-            <a:ext cx="2999232" cy="923544"/>
-          </a:xfrm>
-          <a:prstGeom prst="roundRect">
-            <a:avLst>
-              <a:gd name="adj" fmla="val 13861"/>
-            </a:avLst>
-          </a:prstGeom>
-          <a:solidFill>
-            <a:srgbClr val="F3F6FC"/>
-          </a:solidFill>
-          <a:ln>
-            <a:noFill/>
-          </a:ln>
-          <a:effectLst/>
-        </p:spPr>
-        <p:txBody>
-          <a:bodyPr rtlCol="0" anchor="ctr" wrap="square"/>
-          <a:lstStyle/>
-          <a:p>
-            <a:pPr algn="ctr"/>
+              <a:t>У серого один канал и одна гистограмма 0…255. У цветного строят три — по R, G и B; одинаковая яркость получается разными сочетаниями цветов.</a:t>
+            </a:r>
+          </a:p>
+        </p:txBody>
+      </p:sp>
+      <p:sp>
+        <p:nvSpPr>
+          <p:cNvPr id="11" name="TextBox 10"/>
+          <p:cNvSpPr txBox="1"/>
+          <p:nvPr/>
+        </p:nvSpPr>
+        <p:spPr>
+          <a:xfrm>
+            <a:off x="822960" y="4632960"/>
+            <a:ext cx="5042916" cy="227837"/>
+          </a:xfrm>
+          <a:prstGeom prst="rect">
+            <a:avLst/>
+          </a:prstGeom>
+          <a:noFill/>
+        </p:spPr>
+        <p:txBody>
+          <a:bodyPr wrap="square" lIns="0" tIns="0" rIns="0" bIns="0" anchor="t">
+            <a:spAutoFit/>
+          </a:bodyPr>
+          <a:lstStyle/>
+          <a:p>
+            <a:pPr algn="l">
+              <a:lnSpc>
+                <a:spcPct val="115000"/>
+              </a:lnSpc>
+              <a:spcAft>
+                <a:spcPts val="0"/>
+              </a:spcAft>
+              <a:defRPr sz="1300" b="1">
+                <a:solidFill>
+                  <a:srgbClr val="15171C"/>
+                </a:solidFill>
+                <a:latin typeface="Helvetica Neue"/>
+              </a:defRPr>
+            </a:pPr>
+            <a:r>
+              <a:t>Что такое профиль изображения?</a:t>
+            </a:r>
           </a:p>
         </p:txBody>
       </p:sp>
@@ -10082,36 +10121,36 @@
         </p:nvSpPr>
         <p:spPr>
           <a:xfrm>
-            <a:off x="8622792" y="3296412"/>
-            <a:ext cx="2487168" cy="365760"/>
-          </a:xfrm>
-          <a:prstGeom prst="rect">
-            <a:avLst/>
-          </a:prstGeom>
-          <a:noFill/>
-        </p:spPr>
-        <p:txBody>
-          <a:bodyPr wrap="square" lIns="0" rIns="0" tIns="0" bIns="0" anchor="t">
-            <a:spAutoFit/>
-          </a:bodyPr>
-          <a:lstStyle/>
-          <a:p>
-            <a:pPr algn="l">
-              <a:lnSpc>
-                <a:spcPct val="100000"/>
-              </a:lnSpc>
-              <a:spcAft>
-                <a:spcPts val="0"/>
-              </a:spcAft>
-              <a:defRPr sz="2500" b="1">
-                <a:solidFill>
-                  <a:srgbClr val="0B57D0"/>
-                </a:solidFill>
-                <a:latin typeface="Helvetica Neue"/>
-              </a:defRPr>
-            </a:pPr>
-            <a:r>
-              <a:t>85.04 %</a:t>
+            <a:off x="822960" y="4924806"/>
+            <a:ext cx="5042916" cy="991361"/>
+          </a:xfrm>
+          <a:prstGeom prst="rect">
+            <a:avLst/>
+          </a:prstGeom>
+          <a:noFill/>
+        </p:spPr>
+        <p:txBody>
+          <a:bodyPr wrap="square" lIns="0" tIns="0" rIns="0" bIns="0" anchor="t">
+            <a:spAutoFit/>
+          </a:bodyPr>
+          <a:lstStyle/>
+          <a:p>
+            <a:pPr algn="l">
+              <a:lnSpc>
+                <a:spcPct val="122000"/>
+              </a:lnSpc>
+              <a:spcAft>
+                <a:spcPts val="0"/>
+              </a:spcAft>
+              <a:defRPr sz="1250" b="0">
+                <a:solidFill>
+                  <a:srgbClr val="5B6070"/>
+                </a:solidFill>
+                <a:latin typeface="Helvetica Neue"/>
+              </a:defRPr>
+            </a:pPr>
+            <a:r>
+              <a:t>Одномерный массив средних интенсивностей по строкам или по столбцам.</a:t>
             </a:r>
           </a:p>
         </p:txBody>
@@ -10124,28 +10163,70 @@
         </p:nvSpPr>
         <p:spPr>
           <a:xfrm>
-            <a:off x="8622792" y="3698748"/>
-            <a:ext cx="2487168" cy="274320"/>
-          </a:xfrm>
-          <a:prstGeom prst="rect">
-            <a:avLst/>
-          </a:prstGeom>
-          <a:noFill/>
-        </p:spPr>
-        <p:txBody>
-          <a:bodyPr wrap="square" lIns="0" rIns="0" tIns="0" bIns="0" anchor="t">
-            <a:spAutoFit/>
-          </a:bodyPr>
-          <a:lstStyle/>
-          <a:p>
-            <a:pPr algn="l">
-              <a:lnSpc>
-                <a:spcPct val="118000"/>
-              </a:lnSpc>
-              <a:spcAft>
-                <a:spcPts val="0"/>
-              </a:spcAft>
-              <a:defRPr sz="1000" b="0">
+            <a:off x="6323076" y="2011680"/>
+            <a:ext cx="5042916" cy="455675"/>
+          </a:xfrm>
+          <a:prstGeom prst="rect">
+            <a:avLst/>
+          </a:prstGeom>
+          <a:noFill/>
+        </p:spPr>
+        <p:txBody>
+          <a:bodyPr wrap="square" lIns="0" tIns="0" rIns="0" bIns="0" anchor="t">
+            <a:spAutoFit/>
+          </a:bodyPr>
+          <a:lstStyle/>
+          <a:p>
+            <a:pPr algn="l">
+              <a:lnSpc>
+                <a:spcPct val="115000"/>
+              </a:lnSpc>
+              <a:spcAft>
+                <a:spcPts val="0"/>
+              </a:spcAft>
+              <a:defRPr sz="1300" b="1">
+                <a:solidFill>
+                  <a:srgbClr val="15171C"/>
+                </a:solidFill>
+                <a:latin typeface="Helvetica Neue"/>
+              </a:defRPr>
+            </a:pPr>
+            <a:r>
+              <a:t>Как вычисляются горизонтальный и вертикальный профили?</a:t>
+            </a:r>
+          </a:p>
+        </p:txBody>
+      </p:sp>
+      <p:sp>
+        <p:nvSpPr>
+          <p:cNvPr id="14" name="TextBox 13"/>
+          <p:cNvSpPr txBox="1"/>
+          <p:nvPr/>
+        </p:nvSpPr>
+        <p:spPr>
+          <a:xfrm>
+            <a:off x="6323076" y="2531364"/>
+            <a:ext cx="5042916" cy="763524"/>
+          </a:xfrm>
+          <a:prstGeom prst="rect">
+            <a:avLst/>
+          </a:prstGeom>
+          <a:noFill/>
+        </p:spPr>
+        <p:txBody>
+          <a:bodyPr wrap="square" lIns="0" tIns="0" rIns="0" bIns="0" anchor="t">
+            <a:spAutoFit/>
+          </a:bodyPr>
+          <a:lstStyle/>
+          <a:p>
+            <a:pPr algn="l">
+              <a:lnSpc>
+                <a:spcPct val="122000"/>
+              </a:lnSpc>
+              <a:spcAft>
+                <a:spcPts val="0"/>
+              </a:spcAft>
+              <a:defRPr sz="1250" b="0">
                 <a:solidFill>
                   <a:srgbClr val="5B6070"/>
                 </a:solidFill>
@@ -10153,40 +10234,8 @@
               </a:defRPr>
             </a:pPr>
             <a:r>
-              <a:t>белых пикселей</a:t>
-            </a:r>
-          </a:p>
-        </p:txBody>
-      </p:sp>
-      <p:sp>
-        <p:nvSpPr>
-          <p:cNvPr id="14" name="Rounded Rectangle 13"/>
-          <p:cNvSpPr/>
-          <p:nvPr/>
-        </p:nvSpPr>
-        <p:spPr>
-          <a:xfrm>
-            <a:off x="8366760" y="4288536"/>
-            <a:ext cx="2999232" cy="923544"/>
-          </a:xfrm>
-          <a:prstGeom prst="roundRect">
-            <a:avLst>
-              <a:gd name="adj" fmla="val 13861"/>
-            </a:avLst>
-          </a:prstGeom>
-          <a:solidFill>
-            <a:srgbClr val="F3F6FC"/>
-          </a:solidFill>
-          <a:ln>
-            <a:noFill/>
-          </a:ln>
-          <a:effectLst/>
-        </p:spPr>
-        <p:txBody>
-          <a:bodyPr rtlCol="0" anchor="ctr" wrap="square"/>
-          <a:lstStyle/>
-          <a:p>
-            <a:pPr algn="ctr"/>
+              <a:t>Горизонтальный — усреднением по оси столбцов (axis=1), вертикальный — по оси строк (axis=0).</a:t>
+            </a:r>
           </a:p>
         </p:txBody>
       </p:sp>
@@ -10198,36 +10247,36 @@
         </p:nvSpPr>
         <p:spPr>
           <a:xfrm>
-            <a:off x="8622792" y="4457699"/>
-            <a:ext cx="2487168" cy="365760"/>
-          </a:xfrm>
-          <a:prstGeom prst="rect">
-            <a:avLst/>
-          </a:prstGeom>
-          <a:noFill/>
-        </p:spPr>
-        <p:txBody>
-          <a:bodyPr wrap="square" lIns="0" rIns="0" tIns="0" bIns="0" anchor="t">
-            <a:spAutoFit/>
-          </a:bodyPr>
-          <a:lstStyle/>
-          <a:p>
-            <a:pPr algn="l">
-              <a:lnSpc>
-                <a:spcPct val="100000"/>
-              </a:lnSpc>
-              <a:spcAft>
-                <a:spcPts val="0"/>
-              </a:spcAft>
-              <a:defRPr sz="2500" b="1">
-                <a:solidFill>
-                  <a:srgbClr val="0B57D0"/>
-                </a:solidFill>
-                <a:latin typeface="Helvetica Neue"/>
-              </a:defRPr>
-            </a:pPr>
-            <a:r>
-              <a:t>0 и 255</a:t>
+            <a:off x="6323076" y="3322320"/>
+            <a:ext cx="5042916" cy="227837"/>
+          </a:xfrm>
+          <a:prstGeom prst="rect">
+            <a:avLst/>
+          </a:prstGeom>
+          <a:noFill/>
+        </p:spPr>
+        <p:txBody>
+          <a:bodyPr wrap="square" lIns="0" tIns="0" rIns="0" bIns="0" anchor="t">
+            <a:spAutoFit/>
+          </a:bodyPr>
+          <a:lstStyle/>
+          <a:p>
+            <a:pPr algn="l">
+              <a:lnSpc>
+                <a:spcPct val="115000"/>
+              </a:lnSpc>
+              <a:spcAft>
+                <a:spcPts val="0"/>
+              </a:spcAft>
+              <a:defRPr sz="1300" b="1">
+                <a:solidFill>
+                  <a:srgbClr val="15171C"/>
+                </a:solidFill>
+                <a:latin typeface="Helvetica Neue"/>
+              </a:defRPr>
+            </a:pPr>
+            <a:r>
+              <a:t>Что такое проекция изображения?</a:t>
             </a:r>
           </a:p>
         </p:txBody>
@@ -10240,28 +10289,28 @@
         </p:nvSpPr>
         <p:spPr>
           <a:xfrm>
-            <a:off x="8622792" y="4860036"/>
-            <a:ext cx="2487168" cy="274320"/>
-          </a:xfrm>
-          <a:prstGeom prst="rect">
-            <a:avLst/>
-          </a:prstGeom>
-          <a:noFill/>
-        </p:spPr>
-        <p:txBody>
-          <a:bodyPr wrap="square" lIns="0" rIns="0" tIns="0" bIns="0" anchor="t">
-            <a:spAutoFit/>
-          </a:bodyPr>
-          <a:lstStyle/>
-          <a:p>
-            <a:pPr algn="l">
-              <a:lnSpc>
-                <a:spcPct val="118000"/>
-              </a:lnSpc>
-              <a:spcAft>
-                <a:spcPts val="0"/>
-              </a:spcAft>
-              <a:defRPr sz="1000" b="0">
+            <a:off x="6323076" y="3614166"/>
+            <a:ext cx="5042916" cy="991361"/>
+          </a:xfrm>
+          <a:prstGeom prst="rect">
+            <a:avLst/>
+          </a:prstGeom>
+          <a:noFill/>
+        </p:spPr>
+        <p:txBody>
+          <a:bodyPr wrap="square" lIns="0" tIns="0" rIns="0" bIns="0" anchor="t">
+            <a:spAutoFit/>
+          </a:bodyPr>
+          <a:lstStyle/>
+          <a:p>
+            <a:pPr algn="l">
+              <a:lnSpc>
+                <a:spcPct val="122000"/>
+              </a:lnSpc>
+              <a:spcAft>
+                <a:spcPts val="0"/>
+              </a:spcAft>
+              <a:defRPr sz="1250" b="0">
                 <a:solidFill>
                   <a:srgbClr val="5B6070"/>
                 </a:solidFill>
@@ -10269,674 +10318,7 @@
               </a:defRPr>
             </a:pPr>
             <a:r>
-              <a:t>все значения после порога</a:t>
-            </a:r>
-          </a:p>
-        </p:txBody>
-      </p:sp>
-      <p:sp>
-        <p:nvSpPr>
-          <p:cNvPr id="17" name="Rounded Rectangle 16"/>
-          <p:cNvSpPr/>
-          <p:nvPr/>
-        </p:nvSpPr>
-        <p:spPr>
-          <a:xfrm>
-            <a:off x="822960" y="4700016"/>
-            <a:ext cx="7360920" cy="995375"/>
-          </a:xfrm>
-          <a:prstGeom prst="roundRect">
-            <a:avLst>
-              <a:gd name="adj" fmla="val 12861"/>
-            </a:avLst>
-          </a:prstGeom>
-          <a:solidFill>
-            <a:srgbClr val="F3F6FC"/>
-          </a:solidFill>
-          <a:ln>
-            <a:noFill/>
-          </a:ln>
-          <a:effectLst/>
-        </p:spPr>
-        <p:txBody>
-          <a:bodyPr rtlCol="0" anchor="ctr" wrap="square"/>
-          <a:lstStyle/>
-          <a:p>
-            <a:pPr algn="ctr"/>
-          </a:p>
-        </p:txBody>
-      </p:sp>
-      <p:sp>
-        <p:nvSpPr>
-          <p:cNvPr id="18" name="Rounded Rectangle 17"/>
-          <p:cNvSpPr/>
-          <p:nvPr/>
-        </p:nvSpPr>
-        <p:spPr>
-          <a:xfrm>
-            <a:off x="822960" y="4919472"/>
-            <a:ext cx="50292" cy="556463"/>
-          </a:xfrm>
-          <a:prstGeom prst="roundRect">
-            <a:avLst>
-              <a:gd name="adj" fmla="val 50000"/>
-            </a:avLst>
-          </a:prstGeom>
-          <a:solidFill>
-            <a:srgbClr val="0B57D0"/>
-          </a:solidFill>
-          <a:ln>
-            <a:noFill/>
-          </a:ln>
-          <a:effectLst/>
-        </p:spPr>
-        <p:txBody>
-          <a:bodyPr rtlCol="0" anchor="ctr" wrap="square"/>
-          <a:lstStyle/>
-          <a:p>
-            <a:pPr algn="ctr"/>
-          </a:p>
-        </p:txBody>
-      </p:sp>
-      <p:sp>
-        <p:nvSpPr>
-          <p:cNvPr id="19" name="TextBox 18"/>
-          <p:cNvSpPr txBox="1"/>
-          <p:nvPr/>
-        </p:nvSpPr>
-        <p:spPr>
-          <a:xfrm>
-            <a:off x="1207008" y="4937759"/>
-            <a:ext cx="6702552" cy="519887"/>
-          </a:xfrm>
-          <a:prstGeom prst="rect">
-            <a:avLst/>
-          </a:prstGeom>
-          <a:noFill/>
-        </p:spPr>
-        <p:txBody>
-          <a:bodyPr wrap="square" lIns="0" rIns="0" tIns="0" bIns="0" anchor="t">
-            <a:spAutoFit/>
-          </a:bodyPr>
-          <a:lstStyle/>
-          <a:p>
-            <a:pPr algn="l">
-              <a:lnSpc>
-                <a:spcPct val="128000"/>
-              </a:lnSpc>
-              <a:spcAft>
-                <a:spcPts val="100"/>
-              </a:spcAft>
-              <a:defRPr sz="1300" b="0">
-                <a:solidFill>
-                  <a:srgbClr val="15171C"/>
-                </a:solidFill>
-                <a:latin typeface="Menlo"/>
-              </a:defRPr>
-            </a:pPr>
-            <a:r>
-              <a:t>otsu, binary = cv2.threshold(</a:t>
-            </a:r>
-          </a:p>
-          <a:p>
-            <a:pPr algn="l">
-              <a:lnSpc>
-                <a:spcPct val="128000"/>
-              </a:lnSpc>
-              <a:spcAft>
-                <a:spcPts val="100"/>
-              </a:spcAft>
-              <a:defRPr sz="1300" b="0">
-                <a:solidFill>
-                  <a:srgbClr val="15171C"/>
-                </a:solidFill>
-                <a:latin typeface="Menlo"/>
-              </a:defRPr>
-            </a:pPr>
-            <a:r>
-              <a:t>    image, 0, 255, cv2.THRESH_BINARY + cv2.THRESH_OTSU)</a:t>
-            </a:r>
-          </a:p>
-        </p:txBody>
-      </p:sp>
-    </p:spTree>
-  </p:cSld>
-  <p:clrMapOvr>
-    <a:masterClrMapping/>
-  </p:clrMapOvr>
-</p:sld>
-</file>
-
-<file path=ppt/slides/slide9.xml><?xml version="1.0" encoding="utf-8"?>
-<p:sld xmlns:a="http://schemas.openxmlformats.org/drawingml/2006/main" xmlns:p="http://schemas.openxmlformats.org/presentationml/2006/main" xmlns:r="http://schemas.openxmlformats.org/officeDocument/2006/relationships">
-  <p:cSld>
-    <p:bg>
-      <p:bgPr>
-        <a:solidFill>
-          <a:srgbClr val="FFFFFF"/>
-        </a:solidFill>
-        <a:effectLst/>
-      </p:bgPr>
-    </p:bg>
-    <p:spTree>
-      <p:nvGrpSpPr>
-        <p:cNvPr id="1" name=""/>
-        <p:cNvGrpSpPr/>
-        <p:nvPr/>
-      </p:nvGrpSpPr>
-      <p:grpSpPr/>
-      <p:sp>
-        <p:nvSpPr>
-          <p:cNvPr id="2" name="TextBox 1"/>
-          <p:cNvSpPr txBox="1"/>
-          <p:nvPr/>
-        </p:nvSpPr>
-        <p:spPr>
-          <a:xfrm>
-            <a:off x="822960" y="512064"/>
-            <a:ext cx="10545775" cy="219456"/>
-          </a:xfrm>
-          <a:prstGeom prst="rect">
-            <a:avLst/>
-          </a:prstGeom>
-          <a:noFill/>
-        </p:spPr>
-        <p:txBody>
-          <a:bodyPr wrap="square" lIns="0" rIns="0" tIns="0" bIns="0" anchor="t">
-            <a:spAutoFit/>
-          </a:bodyPr>
-          <a:lstStyle/>
-          <a:p>
-            <a:pPr algn="l">
-              <a:lnSpc>
-                <a:spcPct val="128000"/>
-              </a:lnSpc>
-              <a:spcAft>
-                <a:spcPts val="0"/>
-              </a:spcAft>
-              <a:defRPr sz="1000" b="1">
-                <a:solidFill>
-                  <a:srgbClr val="0B57D0"/>
-                </a:solidFill>
-                <a:latin typeface="Helvetica Neue"/>
-              </a:defRPr>
-            </a:pPr>
-            <a:r>
-              <a:rPr spc="140"/>
-              <a:t>ПУНКТ 05</a:t>
-            </a:r>
-          </a:p>
-        </p:txBody>
-      </p:sp>
-      <p:sp>
-        <p:nvSpPr>
-          <p:cNvPr id="3" name="TextBox 2"/>
-          <p:cNvSpPr txBox="1"/>
-          <p:nvPr/>
-        </p:nvSpPr>
-        <p:spPr>
-          <a:xfrm>
-            <a:off x="822960" y="731520"/>
-            <a:ext cx="10545775" cy="548640"/>
-          </a:xfrm>
-          <a:prstGeom prst="rect">
-            <a:avLst/>
-          </a:prstGeom>
-          <a:noFill/>
-        </p:spPr>
-        <p:txBody>
-          <a:bodyPr wrap="square" lIns="0" rIns="0" tIns="0" bIns="0" anchor="t">
-            <a:spAutoFit/>
-          </a:bodyPr>
-          <a:lstStyle/>
-          <a:p>
-            <a:pPr algn="l">
-              <a:lnSpc>
-                <a:spcPct val="100000"/>
-              </a:lnSpc>
-              <a:spcAft>
-                <a:spcPts val="0"/>
-              </a:spcAft>
-              <a:defRPr sz="2700" b="1">
-                <a:solidFill>
-                  <a:srgbClr val="15171C"/>
-                </a:solidFill>
-                <a:latin typeface="Helvetica Neue"/>
-              </a:defRPr>
-            </a:pPr>
-            <a:r>
-              <a:t>Проекции бинарного кадра</a:t>
-            </a:r>
-          </a:p>
-        </p:txBody>
-      </p:sp>
-      <p:sp>
-        <p:nvSpPr>
-          <p:cNvPr id="4" name="TextBox 3"/>
-          <p:cNvSpPr txBox="1"/>
-          <p:nvPr/>
-        </p:nvSpPr>
-        <p:spPr>
-          <a:xfrm>
-            <a:off x="822960" y="1298448"/>
-            <a:ext cx="10545775" cy="292608"/>
-          </a:xfrm>
-          <a:prstGeom prst="rect">
-            <a:avLst/>
-          </a:prstGeom>
-          <a:noFill/>
-        </p:spPr>
-        <p:txBody>
-          <a:bodyPr wrap="square" lIns="0" rIns="0" tIns="0" bIns="0" anchor="t">
-            <a:spAutoFit/>
-          </a:bodyPr>
-          <a:lstStyle/>
-          <a:p>
-            <a:pPr algn="l">
-              <a:lnSpc>
-                <a:spcPct val="128000"/>
-              </a:lnSpc>
-              <a:spcAft>
-                <a:spcPts val="0"/>
-              </a:spcAft>
-              <a:defRPr sz="1350" b="0">
-                <a:solidFill>
-                  <a:srgbClr val="5B6070"/>
-                </a:solidFill>
-                <a:latin typeface="Helvetica Neue"/>
-              </a:defRPr>
-            </a:pPr>
-            <a:r>
-              <a:t>Теперь проекция пропорциональна числу белых пикселей</a:t>
-            </a:r>
-          </a:p>
-        </p:txBody>
-      </p:sp>
-      <p:sp>
-        <p:nvSpPr>
-          <p:cNvPr id="5" name="TextBox 4"/>
-          <p:cNvSpPr txBox="1"/>
-          <p:nvPr/>
-        </p:nvSpPr>
-        <p:spPr>
-          <a:xfrm>
-            <a:off x="822960" y="6345936"/>
-            <a:ext cx="7315200" cy="219456"/>
-          </a:xfrm>
-          <a:prstGeom prst="rect">
-            <a:avLst/>
-          </a:prstGeom>
-          <a:noFill/>
-        </p:spPr>
-        <p:txBody>
-          <a:bodyPr wrap="square" lIns="0" rIns="0" tIns="0" bIns="0" anchor="t">
-            <a:spAutoFit/>
-          </a:bodyPr>
-          <a:lstStyle/>
-          <a:p>
-            <a:pPr algn="l">
-              <a:lnSpc>
-                <a:spcPct val="128000"/>
-              </a:lnSpc>
-              <a:spcAft>
-                <a:spcPts val="0"/>
-              </a:spcAft>
-              <a:defRPr sz="900" b="0">
-                <a:solidFill>
-                  <a:srgbClr val="5B6070"/>
-                </a:solidFill>
-                <a:latin typeface="Helvetica Neue"/>
-              </a:defRPr>
-            </a:pPr>
-            <a:r>
-              <a:t>Лабораторная работа 2 · вариант 9</a:t>
-            </a:r>
-          </a:p>
-        </p:txBody>
-      </p:sp>
-      <p:sp>
-        <p:nvSpPr>
-          <p:cNvPr id="6" name="TextBox 5"/>
-          <p:cNvSpPr txBox="1"/>
-          <p:nvPr/>
-        </p:nvSpPr>
-        <p:spPr>
-          <a:xfrm>
-            <a:off x="10454335" y="6345936"/>
-            <a:ext cx="914400" cy="219456"/>
-          </a:xfrm>
-          <a:prstGeom prst="rect">
-            <a:avLst/>
-          </a:prstGeom>
-          <a:noFill/>
-        </p:spPr>
-        <p:txBody>
-          <a:bodyPr wrap="square" lIns="0" rIns="0" tIns="0" bIns="0" anchor="t">
-            <a:spAutoFit/>
-          </a:bodyPr>
-          <a:lstStyle/>
-          <a:p>
-            <a:pPr algn="r">
-              <a:lnSpc>
-                <a:spcPct val="128000"/>
-              </a:lnSpc>
-              <a:spcAft>
-                <a:spcPts val="0"/>
-              </a:spcAft>
-              <a:defRPr sz="900" b="0">
-                <a:solidFill>
-                  <a:srgbClr val="5B6070"/>
-                </a:solidFill>
-                <a:latin typeface="Helvetica Neue"/>
-              </a:defRPr>
-            </a:pPr>
-            <a:r>
-              <a:t>09</a:t>
-            </a:r>
-          </a:p>
-        </p:txBody>
-      </p:sp>
-      <p:pic>
-        <p:nvPicPr>
-          <p:cNvPr id="7" name="Picture 6" descr="binary_projections.png"/>
-          <p:cNvPicPr>
-            <a:picLocks noChangeAspect="1"/>
-          </p:cNvPicPr>
-          <p:nvPr/>
-        </p:nvPicPr>
-        <p:blipFill>
-          <a:blip r:embed="rId2"/>
-          <a:stretch>
-            <a:fillRect/>
-          </a:stretch>
-        </p:blipFill>
-        <p:spPr>
-          <a:xfrm>
-            <a:off x="822960" y="1874519"/>
-            <a:ext cx="10543032" cy="2788920"/>
-          </a:xfrm>
-          <a:prstGeom prst="rect">
-            <a:avLst/>
-          </a:prstGeom>
-          <a:effectLst>
-            <a:outerShdw blurRad="114300" dist="25400" dir="5400000" rotWithShape="0">
-              <a:srgbClr val="1B2A44">
-                <a:alpha val="8000"/>
-              </a:srgbClr>
-            </a:outerShdw>
-          </a:effectLst>
-        </p:spPr>
-      </p:pic>
-      <p:sp>
-        <p:nvSpPr>
-          <p:cNvPr id="8" name="Rounded Rectangle 7"/>
-          <p:cNvSpPr/>
-          <p:nvPr/>
-        </p:nvSpPr>
-        <p:spPr>
-          <a:xfrm>
-            <a:off x="822960" y="4919471"/>
-            <a:ext cx="5152644" cy="896112"/>
-          </a:xfrm>
-          <a:prstGeom prst="roundRect">
-            <a:avLst>
-              <a:gd name="adj" fmla="val 14285"/>
-            </a:avLst>
-          </a:prstGeom>
-          <a:solidFill>
-            <a:srgbClr val="F3F6FC"/>
-          </a:solidFill>
-          <a:ln>
-            <a:noFill/>
-          </a:ln>
-          <a:effectLst/>
-        </p:spPr>
-        <p:txBody>
-          <a:bodyPr rtlCol="0" anchor="ctr" wrap="square"/>
-          <a:lstStyle/>
-          <a:p>
-            <a:pPr algn="ctr"/>
-          </a:p>
-        </p:txBody>
-      </p:sp>
-      <p:sp>
-        <p:nvSpPr>
-          <p:cNvPr id="9" name="TextBox 8"/>
-          <p:cNvSpPr txBox="1"/>
-          <p:nvPr/>
-        </p:nvSpPr>
-        <p:spPr>
-          <a:xfrm>
-            <a:off x="1078992" y="5074919"/>
-            <a:ext cx="4640579" cy="365760"/>
-          </a:xfrm>
-          <a:prstGeom prst="rect">
-            <a:avLst/>
-          </a:prstGeom>
-          <a:noFill/>
-        </p:spPr>
-        <p:txBody>
-          <a:bodyPr wrap="square" lIns="0" rIns="0" tIns="0" bIns="0" anchor="t">
-            <a:spAutoFit/>
-          </a:bodyPr>
-          <a:lstStyle/>
-          <a:p>
-            <a:pPr algn="l">
-              <a:lnSpc>
-                <a:spcPct val="100000"/>
-              </a:lnSpc>
-              <a:spcAft>
-                <a:spcPts val="0"/>
-              </a:spcAft>
-              <a:defRPr sz="2500" b="1">
-                <a:solidFill>
-                  <a:srgbClr val="0B57D0"/>
-                </a:solidFill>
-                <a:latin typeface="Helvetica Neue"/>
-              </a:defRPr>
-            </a:pPr>
-            <a:r>
-              <a:t>строка 0</a:t>
-            </a:r>
-          </a:p>
-        </p:txBody>
-      </p:sp>
-      <p:sp>
-        <p:nvSpPr>
-          <p:cNvPr id="10" name="TextBox 9"/>
-          <p:cNvSpPr txBox="1"/>
-          <p:nvPr/>
-        </p:nvSpPr>
-        <p:spPr>
-          <a:xfrm>
-            <a:off x="1078992" y="5477255"/>
-            <a:ext cx="4640579" cy="274320"/>
-          </a:xfrm>
-          <a:prstGeom prst="rect">
-            <a:avLst/>
-          </a:prstGeom>
-          <a:noFill/>
-        </p:spPr>
-        <p:txBody>
-          <a:bodyPr wrap="square" lIns="0" rIns="0" tIns="0" bIns="0" anchor="t">
-            <a:spAutoFit/>
-          </a:bodyPr>
-          <a:lstStyle/>
-          <a:p>
-            <a:pPr algn="l">
-              <a:lnSpc>
-                <a:spcPct val="118000"/>
-              </a:lnSpc>
-              <a:spcAft>
-                <a:spcPts val="0"/>
-              </a:spcAft>
-              <a:defRPr sz="1000" b="0">
-                <a:solidFill>
-                  <a:srgbClr val="5B6070"/>
-                </a:solidFill>
-                <a:latin typeface="Helvetica Neue"/>
-              </a:defRPr>
-            </a:pPr>
-            <a:r>
-              <a:t>первая из 106 полностью белых строк</a:t>
-            </a:r>
-          </a:p>
-        </p:txBody>
-      </p:sp>
-      <p:sp>
-        <p:nvSpPr>
-          <p:cNvPr id="11" name="Rounded Rectangle 10"/>
-          <p:cNvSpPr/>
-          <p:nvPr/>
-        </p:nvSpPr>
-        <p:spPr>
-          <a:xfrm>
-            <a:off x="6213348" y="4919471"/>
-            <a:ext cx="5152644" cy="896112"/>
-          </a:xfrm>
-          <a:prstGeom prst="roundRect">
-            <a:avLst>
-              <a:gd name="adj" fmla="val 14285"/>
-            </a:avLst>
-          </a:prstGeom>
-          <a:solidFill>
-            <a:srgbClr val="F3F6FC"/>
-          </a:solidFill>
-          <a:ln>
-            <a:noFill/>
-          </a:ln>
-          <a:effectLst/>
-        </p:spPr>
-        <p:txBody>
-          <a:bodyPr rtlCol="0" anchor="ctr" wrap="square"/>
-          <a:lstStyle/>
-          <a:p>
-            <a:pPr algn="ctr"/>
-          </a:p>
-        </p:txBody>
-      </p:sp>
-      <p:sp>
-        <p:nvSpPr>
-          <p:cNvPr id="12" name="TextBox 11"/>
-          <p:cNvSpPr txBox="1"/>
-          <p:nvPr/>
-        </p:nvSpPr>
-        <p:spPr>
-          <a:xfrm>
-            <a:off x="6469380" y="5074919"/>
-            <a:ext cx="4640579" cy="365760"/>
-          </a:xfrm>
-          <a:prstGeom prst="rect">
-            <a:avLst/>
-          </a:prstGeom>
-          <a:noFill/>
-        </p:spPr>
-        <p:txBody>
-          <a:bodyPr wrap="square" lIns="0" rIns="0" tIns="0" bIns="0" anchor="t">
-            <a:spAutoFit/>
-          </a:bodyPr>
-          <a:lstStyle/>
-          <a:p>
-            <a:pPr algn="l">
-              <a:lnSpc>
-                <a:spcPct val="100000"/>
-              </a:lnSpc>
-              <a:spcAft>
-                <a:spcPts val="0"/>
-              </a:spcAft>
-              <a:defRPr sz="2500" b="1">
-                <a:solidFill>
-                  <a:srgbClr val="0B57D0"/>
-                </a:solidFill>
-                <a:latin typeface="Helvetica Neue"/>
-              </a:defRPr>
-            </a:pPr>
-            <a:r>
-              <a:t>столбец 0</a:t>
-            </a:r>
-          </a:p>
-        </p:txBody>
-      </p:sp>
-      <p:sp>
-        <p:nvSpPr>
-          <p:cNvPr id="13" name="TextBox 12"/>
-          <p:cNvSpPr txBox="1"/>
-          <p:nvPr/>
-        </p:nvSpPr>
-        <p:spPr>
-          <a:xfrm>
-            <a:off x="6469380" y="5477255"/>
-            <a:ext cx="4640579" cy="274320"/>
-          </a:xfrm>
-          <a:prstGeom prst="rect">
-            <a:avLst/>
-          </a:prstGeom>
-          <a:noFill/>
-        </p:spPr>
-        <p:txBody>
-          <a:bodyPr wrap="square" lIns="0" rIns="0" tIns="0" bIns="0" anchor="t">
-            <a:spAutoFit/>
-          </a:bodyPr>
-          <a:lstStyle/>
-          <a:p>
-            <a:pPr algn="l">
-              <a:lnSpc>
-                <a:spcPct val="118000"/>
-              </a:lnSpc>
-              <a:spcAft>
-                <a:spcPts val="0"/>
-              </a:spcAft>
-              <a:defRPr sz="1000" b="0">
-                <a:solidFill>
-                  <a:srgbClr val="5B6070"/>
-                </a:solidFill>
-                <a:latin typeface="Helvetica Neue"/>
-              </a:defRPr>
-            </a:pPr>
-            <a:r>
-              <a:t>первый из 261 полностью белых столбцов</a:t>
-            </a:r>
-          </a:p>
-        </p:txBody>
-      </p:sp>
-      <p:sp>
-        <p:nvSpPr>
-          <p:cNvPr id="14" name="TextBox 13"/>
-          <p:cNvSpPr txBox="1"/>
-          <p:nvPr/>
-        </p:nvSpPr>
-        <p:spPr>
-          <a:xfrm>
-            <a:off x="822960" y="5980175"/>
-            <a:ext cx="10543032" cy="274320"/>
-          </a:xfrm>
-          <a:prstGeom prst="rect">
-            <a:avLst/>
-          </a:prstGeom>
-          <a:noFill/>
-        </p:spPr>
-        <p:txBody>
-          <a:bodyPr wrap="square" lIns="0" rIns="0" tIns="0" bIns="0" anchor="t">
-            <a:spAutoFit/>
-          </a:bodyPr>
-          <a:lstStyle/>
-          <a:p>
-            <a:pPr algn="l">
-              <a:lnSpc>
-                <a:spcPct val="128000"/>
-              </a:lnSpc>
-              <a:spcAft>
-                <a:spcPts val="0"/>
-              </a:spcAft>
-              <a:defRPr sz="1050" b="0">
-                <a:solidFill>
-                  <a:srgbClr val="5B6070"/>
-                </a:solidFill>
-                <a:latin typeface="Helvetica Neue"/>
-              </a:defRPr>
-            </a:pPr>
-            <a:r>
-              <a:t>По пикам и провалам таких проекций находят строки текста и границы объектов.</a:t>
+              <a:t>Сумма интенсивностей вдоль одной координаты: она сворачивает двумерный кадр в одномерный сигнал.</a:t>
             </a:r>
           </a:p>
         </p:txBody>
